--- a/Self-built_nitride_MBE_proposal_v3.pptx
+++ b/Self-built_nitride_MBE_proposal_v3.pptx
@@ -5,18 +5,18 @@
     <p:sldMasterId id="2147483672" r:id="rId4"/>
   </p:sldMasterIdLst>
   <p:notesMasterIdLst>
-    <p:notesMasterId r:id="rId10"/>
+    <p:notesMasterId r:id="rId11"/>
   </p:notesMasterIdLst>
   <p:handoutMasterIdLst>
-    <p:handoutMasterId r:id="rId11"/>
+    <p:handoutMasterId r:id="rId12"/>
   </p:handoutMasterIdLst>
   <p:sldIdLst>
     <p:sldId id="263" r:id="rId5"/>
     <p:sldId id="257" r:id="rId6"/>
     <p:sldId id="256" r:id="rId7"/>
-    <p:sldId id="264" r:id="rId18"/>
-    <p:sldId id="258" r:id="rId8"/>
-    <p:sldId id="259" r:id="rId9"/>
+    <p:sldId id="264" r:id="rId8"/>
+    <p:sldId id="258" r:id="rId9"/>
+    <p:sldId id="259" r:id="rId10"/>
   </p:sldIdLst>
   <p:sldSz cx="9144000" cy="5143500" type="screen16x9"/>
   <p:notesSz cx="6858000" cy="9144000"/>
@@ -123,6 +123,7 @@
             <p14:sldId id="263"/>
             <p14:sldId id="257"/>
             <p14:sldId id="256"/>
+            <p14:sldId id="264"/>
             <p14:sldId id="258"/>
             <p14:sldId id="259"/>
           </p14:sldIdLst>
@@ -19539,7 +19540,7 @@
         <p:spPr>
           <a:xfrm>
             <a:off x="3438144" y="1956816"/>
-            <a:ext cx="2240280" cy="593560"/>
+            <a:ext cx="2240280" cy="390428"/>
           </a:xfrm>
           <a:prstGeom prst="rect">
             <a:avLst/>
@@ -19600,23 +19601,8 @@
                 </a:solidFill>
                 <a:latin typeface="Outfit" pitchFamily="2" charset="0"/>
               </a:rPr>
-              <a:t>growth </a:t>
-            </a:r>
-            <a:r>
-              <a:rPr lang="en-HK" sz="1100" dirty="0">
-                <a:solidFill>
-                  <a:srgbClr val="191919"/>
-                </a:solidFill>
-                <a:latin typeface="Outfit" pitchFamily="2" charset="0"/>
-              </a:rPr>
-              <a:t>and normal epitaxy</a:t>
-            </a:r>
-            <a:endParaRPr sz="1100" dirty="0">
-              <a:solidFill>
-                <a:srgbClr val="191919"/>
-              </a:solidFill>
-              <a:latin typeface="Outfit" pitchFamily="2" charset="0"/>
-            </a:endParaRPr>
+              <a:t>growth</a:t>
+            </a:r>
           </a:p>
         </p:txBody>
       </p:sp>
@@ -20085,7 +20071,7 @@
         </p:nvSpPr>
         <p:spPr>
           <a:xfrm>
-            <a:off x="612648" y="1444752"/>
+            <a:off x="723836" y="1081566"/>
             <a:ext cx="7918704" cy="512064"/>
           </a:xfrm>
           <a:prstGeom prst="roundRect">
@@ -20140,7 +20126,7 @@
         </p:blipFill>
         <p:spPr>
           <a:xfrm>
-            <a:off x="704088" y="1517904"/>
+            <a:off x="815276" y="1154718"/>
             <a:ext cx="365760" cy="365760"/>
           </a:xfrm>
           <a:prstGeom prst="rect">
@@ -20156,7 +20142,7 @@
         </p:nvSpPr>
         <p:spPr>
           <a:xfrm>
-            <a:off x="1161288" y="1517904"/>
+            <a:off x="1272476" y="1154718"/>
             <a:ext cx="7260336" cy="170239"/>
           </a:xfrm>
           <a:prstGeom prst="rect">
@@ -20213,7 +20199,7 @@
         </p:nvSpPr>
         <p:spPr>
           <a:xfrm>
-            <a:off x="1161288" y="1700784"/>
+            <a:off x="1272476" y="1337598"/>
             <a:ext cx="7260336" cy="160493"/>
           </a:xfrm>
           <a:prstGeom prst="rect">
@@ -20351,7 +20337,7 @@
         </p:nvSpPr>
         <p:spPr>
           <a:xfrm>
-            <a:off x="611187" y="2088578"/>
+            <a:off x="722375" y="1725392"/>
             <a:ext cx="2514600" cy="512064"/>
           </a:xfrm>
           <a:prstGeom prst="roundRect">
@@ -20406,7 +20392,7 @@
         </p:blipFill>
         <p:spPr>
           <a:xfrm>
-            <a:off x="702627" y="2161730"/>
+            <a:off x="813815" y="1798544"/>
             <a:ext cx="365760" cy="365760"/>
           </a:xfrm>
           <a:prstGeom prst="rect">
@@ -20422,7 +20408,7 @@
         </p:nvSpPr>
         <p:spPr>
           <a:xfrm>
-            <a:off x="1168971" y="2129232"/>
+            <a:off x="1280159" y="1766046"/>
             <a:ext cx="1856232" cy="152734"/>
           </a:xfrm>
           <a:prstGeom prst="rect">
@@ -20461,7 +20447,7 @@
         </p:nvSpPr>
         <p:spPr>
           <a:xfrm>
-            <a:off x="1159827" y="2296485"/>
+            <a:off x="1271015" y="1933299"/>
             <a:ext cx="1965960" cy="300082"/>
           </a:xfrm>
           <a:prstGeom prst="rect">
@@ -20536,7 +20522,7 @@
         </p:nvSpPr>
         <p:spPr>
           <a:xfrm>
-            <a:off x="3308667" y="2088578"/>
+            <a:off x="3419855" y="1725392"/>
             <a:ext cx="2514600" cy="512064"/>
           </a:xfrm>
           <a:prstGeom prst="roundRect">
@@ -20591,7 +20577,7 @@
         </p:blipFill>
         <p:spPr>
           <a:xfrm>
-            <a:off x="3400107" y="2161730"/>
+            <a:off x="3511295" y="1798544"/>
             <a:ext cx="365760" cy="365760"/>
           </a:xfrm>
           <a:prstGeom prst="rect">
@@ -20607,7 +20593,7 @@
         </p:nvSpPr>
         <p:spPr>
           <a:xfrm>
-            <a:off x="3857307" y="2134230"/>
+            <a:off x="3968495" y="1771044"/>
             <a:ext cx="1856232" cy="152734"/>
           </a:xfrm>
           <a:prstGeom prst="rect">
@@ -20661,7 +20647,7 @@
         </p:nvSpPr>
         <p:spPr>
           <a:xfrm>
-            <a:off x="3857307" y="2303360"/>
+            <a:off x="3968495" y="1940174"/>
             <a:ext cx="1856232" cy="300082"/>
           </a:xfrm>
           <a:prstGeom prst="rect">
@@ -20724,7 +20710,7 @@
         </p:nvSpPr>
         <p:spPr>
           <a:xfrm>
-            <a:off x="6006147" y="2088578"/>
+            <a:off x="6117335" y="1725392"/>
             <a:ext cx="2514600" cy="512064"/>
           </a:xfrm>
           <a:prstGeom prst="roundRect">
@@ -20779,7 +20765,7 @@
         </p:blipFill>
         <p:spPr>
           <a:xfrm>
-            <a:off x="6097587" y="2161730"/>
+            <a:off x="6208775" y="1798544"/>
             <a:ext cx="365760" cy="365760"/>
           </a:xfrm>
           <a:prstGeom prst="rect">
@@ -20795,7 +20781,7 @@
         </p:nvSpPr>
         <p:spPr>
           <a:xfrm>
-            <a:off x="6554787" y="2161730"/>
+            <a:off x="6665975" y="1798544"/>
             <a:ext cx="1856232" cy="152799"/>
           </a:xfrm>
           <a:prstGeom prst="rect">
@@ -20849,7 +20835,7 @@
         </p:nvSpPr>
         <p:spPr>
           <a:xfrm>
-            <a:off x="6554787" y="2344610"/>
+            <a:off x="6665975" y="1981424"/>
             <a:ext cx="1856232" cy="144976"/>
           </a:xfrm>
           <a:prstGeom prst="rect">
@@ -20888,7 +20874,7 @@
         </p:nvSpPr>
         <p:spPr>
           <a:xfrm>
-            <a:off x="611187" y="2673794"/>
+            <a:off x="722375" y="2310608"/>
             <a:ext cx="2514600" cy="512064"/>
           </a:xfrm>
           <a:prstGeom prst="roundRect">
@@ -20943,7 +20929,7 @@
         </p:blipFill>
         <p:spPr>
           <a:xfrm>
-            <a:off x="702627" y="2746946"/>
+            <a:off x="813815" y="2383760"/>
             <a:ext cx="365760" cy="365760"/>
           </a:xfrm>
           <a:prstGeom prst="rect">
@@ -20959,7 +20945,7 @@
         </p:nvSpPr>
         <p:spPr>
           <a:xfrm>
-            <a:off x="1159827" y="2746946"/>
+            <a:off x="1271015" y="2383760"/>
             <a:ext cx="1856232" cy="152799"/>
           </a:xfrm>
           <a:prstGeom prst="rect">
@@ -20998,7 +20984,7 @@
         </p:nvSpPr>
         <p:spPr>
           <a:xfrm>
-            <a:off x="1159827" y="2929826"/>
+            <a:off x="1271015" y="2566640"/>
             <a:ext cx="1856232" cy="144976"/>
           </a:xfrm>
           <a:prstGeom prst="rect">
@@ -21037,7 +21023,7 @@
         </p:nvSpPr>
         <p:spPr>
           <a:xfrm>
-            <a:off x="3308667" y="2673794"/>
+            <a:off x="3419855" y="2310608"/>
             <a:ext cx="2514600" cy="512064"/>
           </a:xfrm>
           <a:prstGeom prst="roundRect">
@@ -21092,7 +21078,7 @@
         </p:blipFill>
         <p:spPr>
           <a:xfrm>
-            <a:off x="3400107" y="2746946"/>
+            <a:off x="3511295" y="2383760"/>
             <a:ext cx="365760" cy="365760"/>
           </a:xfrm>
           <a:prstGeom prst="rect">
@@ -21108,7 +21094,7 @@
         </p:nvSpPr>
         <p:spPr>
           <a:xfrm>
-            <a:off x="3857307" y="2746946"/>
+            <a:off x="3968495" y="2383760"/>
             <a:ext cx="1856232" cy="155107"/>
           </a:xfrm>
           <a:prstGeom prst="rect">
@@ -21165,7 +21151,7 @@
         </p:nvSpPr>
         <p:spPr>
           <a:xfrm>
-            <a:off x="3857307" y="2929826"/>
+            <a:off x="3968495" y="2566640"/>
             <a:ext cx="1856232" cy="144463"/>
           </a:xfrm>
           <a:prstGeom prst="rect">
@@ -21204,7 +21190,7 @@
         </p:nvSpPr>
         <p:spPr>
           <a:xfrm>
-            <a:off x="6006147" y="2673794"/>
+            <a:off x="6117335" y="2310608"/>
             <a:ext cx="2514600" cy="512064"/>
           </a:xfrm>
           <a:prstGeom prst="roundRect">
@@ -21259,7 +21245,7 @@
         </p:blipFill>
         <p:spPr>
           <a:xfrm>
-            <a:off x="6097587" y="2746946"/>
+            <a:off x="6208775" y="2383760"/>
             <a:ext cx="365760" cy="365760"/>
           </a:xfrm>
           <a:prstGeom prst="rect">
@@ -21275,7 +21261,7 @@
         </p:nvSpPr>
         <p:spPr>
           <a:xfrm>
-            <a:off x="6554787" y="2671321"/>
+            <a:off x="6665975" y="2308135"/>
             <a:ext cx="1866838" cy="319446"/>
           </a:xfrm>
           <a:prstGeom prst="rect">
@@ -21329,7 +21315,7 @@
         </p:nvSpPr>
         <p:spPr>
           <a:xfrm>
-            <a:off x="6554787" y="2991497"/>
+            <a:off x="6665975" y="2628311"/>
             <a:ext cx="1856232" cy="144976"/>
           </a:xfrm>
           <a:prstGeom prst="rect">
@@ -21395,7 +21381,7 @@
         </p:nvSpPr>
         <p:spPr>
           <a:xfrm>
-            <a:off x="611187" y="3259010"/>
+            <a:off x="722375" y="2895824"/>
             <a:ext cx="2514600" cy="512064"/>
           </a:xfrm>
           <a:prstGeom prst="roundRect">
@@ -21450,7 +21436,7 @@
         </p:blipFill>
         <p:spPr>
           <a:xfrm>
-            <a:off x="702627" y="3332162"/>
+            <a:off x="813815" y="2968976"/>
             <a:ext cx="365760" cy="365760"/>
           </a:xfrm>
           <a:prstGeom prst="rect">
@@ -21466,7 +21452,7 @@
         </p:nvSpPr>
         <p:spPr>
           <a:xfrm>
-            <a:off x="1159827" y="3332162"/>
+            <a:off x="1271015" y="2968976"/>
             <a:ext cx="1856232" cy="153247"/>
           </a:xfrm>
           <a:prstGeom prst="rect">
@@ -21505,7 +21491,7 @@
         </p:nvSpPr>
         <p:spPr>
           <a:xfrm>
-            <a:off x="1159827" y="3515042"/>
+            <a:off x="1271015" y="3151856"/>
             <a:ext cx="1856232" cy="144976"/>
           </a:xfrm>
           <a:prstGeom prst="rect">
@@ -21544,7 +21530,7 @@
         </p:nvSpPr>
         <p:spPr>
           <a:xfrm>
-            <a:off x="3308667" y="3259010"/>
+            <a:off x="3419855" y="2895824"/>
             <a:ext cx="2514600" cy="512064"/>
           </a:xfrm>
           <a:prstGeom prst="roundRect">
@@ -21599,7 +21585,7 @@
         </p:blipFill>
         <p:spPr>
           <a:xfrm>
-            <a:off x="3400107" y="3332162"/>
+            <a:off x="3511295" y="2968976"/>
             <a:ext cx="365760" cy="365760"/>
           </a:xfrm>
           <a:prstGeom prst="rect">
@@ -21615,7 +21601,7 @@
         </p:nvSpPr>
         <p:spPr>
           <a:xfrm>
-            <a:off x="3857307" y="3332162"/>
+            <a:off x="3968495" y="2968976"/>
             <a:ext cx="1856232" cy="155107"/>
           </a:xfrm>
           <a:prstGeom prst="rect">
@@ -21654,7 +21640,7 @@
         </p:nvSpPr>
         <p:spPr>
           <a:xfrm>
-            <a:off x="3857307" y="3515042"/>
+            <a:off x="3968495" y="3151856"/>
             <a:ext cx="1856232" cy="144976"/>
           </a:xfrm>
           <a:prstGeom prst="rect">
@@ -21708,7 +21694,7 @@
         </p:nvSpPr>
         <p:spPr>
           <a:xfrm>
-            <a:off x="6006147" y="3259010"/>
+            <a:off x="6117335" y="2895824"/>
             <a:ext cx="2514600" cy="512064"/>
           </a:xfrm>
           <a:prstGeom prst="roundRect">
@@ -21763,7 +21749,7 @@
         </p:blipFill>
         <p:spPr>
           <a:xfrm>
-            <a:off x="6097587" y="3332162"/>
+            <a:off x="6208775" y="2968976"/>
             <a:ext cx="365760" cy="365760"/>
           </a:xfrm>
           <a:prstGeom prst="rect">
@@ -21779,7 +21765,7 @@
         </p:nvSpPr>
         <p:spPr>
           <a:xfrm>
-            <a:off x="6554787" y="3332162"/>
+            <a:off x="6665975" y="2968976"/>
             <a:ext cx="1856232" cy="155107"/>
           </a:xfrm>
           <a:prstGeom prst="rect">
@@ -21854,7 +21840,7 @@
         </p:nvSpPr>
         <p:spPr>
           <a:xfrm>
-            <a:off x="6554787" y="3515042"/>
+            <a:off x="6665975" y="3151856"/>
             <a:ext cx="1856232" cy="144976"/>
           </a:xfrm>
           <a:prstGeom prst="rect">
@@ -21893,7 +21879,7 @@
         </p:nvSpPr>
         <p:spPr>
           <a:xfrm>
-            <a:off x="611187" y="3844226"/>
+            <a:off x="722375" y="3481040"/>
             <a:ext cx="2514600" cy="770636"/>
           </a:xfrm>
           <a:prstGeom prst="roundRect">
@@ -21948,7 +21934,7 @@
         </p:blipFill>
         <p:spPr>
           <a:xfrm>
-            <a:off x="702627" y="3917378"/>
+            <a:off x="813815" y="3554192"/>
             <a:ext cx="365760" cy="365760"/>
           </a:xfrm>
           <a:prstGeom prst="rect">
@@ -21964,7 +21950,7 @@
         </p:nvSpPr>
         <p:spPr>
           <a:xfrm>
-            <a:off x="1159827" y="3896753"/>
+            <a:off x="1271015" y="3533567"/>
             <a:ext cx="1856232" cy="319446"/>
           </a:xfrm>
           <a:prstGeom prst="rect">
@@ -22036,7 +22022,7 @@
         </p:nvSpPr>
         <p:spPr>
           <a:xfrm>
-            <a:off x="1178115" y="4268726"/>
+            <a:off x="1289303" y="3905540"/>
             <a:ext cx="1856232" cy="300082"/>
           </a:xfrm>
           <a:prstGeom prst="rect">
@@ -22093,7 +22079,7 @@
         </p:nvSpPr>
         <p:spPr>
           <a:xfrm>
-            <a:off x="3308667" y="3844225"/>
+            <a:off x="3419855" y="3481039"/>
             <a:ext cx="2514600" cy="770637"/>
           </a:xfrm>
           <a:prstGeom prst="roundRect">
@@ -22148,7 +22134,7 @@
         </p:blipFill>
         <p:spPr>
           <a:xfrm>
-            <a:off x="3400107" y="3917378"/>
+            <a:off x="3511295" y="3554192"/>
             <a:ext cx="365760" cy="365760"/>
           </a:xfrm>
           <a:prstGeom prst="rect">
@@ -22164,7 +22150,7 @@
         </p:nvSpPr>
         <p:spPr>
           <a:xfrm>
-            <a:off x="3857307" y="3917378"/>
+            <a:off x="3968495" y="3554192"/>
             <a:ext cx="1856232" cy="155107"/>
           </a:xfrm>
           <a:prstGeom prst="rect">
@@ -22203,7 +22189,7 @@
         </p:nvSpPr>
         <p:spPr>
           <a:xfrm>
-            <a:off x="3857307" y="4100258"/>
+            <a:off x="3968495" y="3737072"/>
             <a:ext cx="1856232" cy="300082"/>
           </a:xfrm>
           <a:prstGeom prst="rect">
@@ -22242,7 +22228,7 @@
         </p:nvSpPr>
         <p:spPr>
           <a:xfrm>
-            <a:off x="6006147" y="3844225"/>
+            <a:off x="6117335" y="3481039"/>
             <a:ext cx="2514600" cy="770637"/>
           </a:xfrm>
           <a:prstGeom prst="roundRect">
@@ -22297,7 +22283,7 @@
         </p:blipFill>
         <p:spPr>
           <a:xfrm>
-            <a:off x="6097587" y="3917378"/>
+            <a:off x="6208775" y="3554192"/>
             <a:ext cx="365760" cy="365760"/>
           </a:xfrm>
           <a:prstGeom prst="rect">
@@ -22313,8 +22299,8 @@
         </p:nvSpPr>
         <p:spPr>
           <a:xfrm>
-            <a:off x="6554787" y="3870644"/>
-            <a:ext cx="1856232" cy="485646"/>
+            <a:off x="6665975" y="3507458"/>
+            <a:ext cx="1856232" cy="651845"/>
           </a:xfrm>
           <a:prstGeom prst="rect">
             <a:avLst/>
@@ -22378,69 +22364,31 @@
               <a:t>chiller · U</a:t>
             </a:r>
             <a:r>
-              <a:rPr lang="en-HK" sz="900" b="1" dirty="0" err="1">
+              <a:rPr lang="en-HK" sz="900" b="1" dirty="0">
                 <a:solidFill>
                   <a:srgbClr val="191919"/>
                 </a:solidFill>
                 <a:latin typeface="Outfit" pitchFamily="2" charset="0"/>
               </a:rPr>
-              <a:t>ninterruptible</a:t>
-            </a:r>
-            <a:r>
-              <a:rPr lang="en-HK" sz="900" b="1" dirty="0">
+              <a:t>PS</a:t>
+            </a:r>
+          </a:p>
+          <a:p>
+            <a:pPr algn="l">
+              <a:lnSpc>
+                <a:spcPct val="120000"/>
+              </a:lnSpc>
+            </a:pPr>
+            <a:r>
+              <a:rPr lang="en-HK" sz="900" dirty="0">
                 <a:solidFill>
                   <a:srgbClr val="191919"/>
                 </a:solidFill>
                 <a:latin typeface="Outfit" pitchFamily="2" charset="0"/>
               </a:rPr>
-              <a:t> </a:t>
-            </a:r>
-            <a:r>
-              <a:rPr sz="900" b="1" dirty="0">
-                <a:solidFill>
-                  <a:srgbClr val="191919"/>
-                </a:solidFill>
-                <a:latin typeface="Outfit" pitchFamily="2" charset="0"/>
-              </a:rPr>
-              <a:t>P</a:t>
-            </a:r>
-            <a:r>
-              <a:rPr lang="en-HK" sz="900" b="1" dirty="0" err="1">
-                <a:solidFill>
-                  <a:srgbClr val="191919"/>
-                </a:solidFill>
-                <a:latin typeface="Outfit" pitchFamily="2" charset="0"/>
-              </a:rPr>
-              <a:t>ower</a:t>
-            </a:r>
-            <a:r>
-              <a:rPr lang="en-HK" sz="900" b="1" dirty="0">
-                <a:solidFill>
-                  <a:srgbClr val="191919"/>
-                </a:solidFill>
-                <a:latin typeface="Outfit" pitchFamily="2" charset="0"/>
-              </a:rPr>
-              <a:t> </a:t>
-            </a:r>
-            <a:r>
-              <a:rPr sz="900" b="1" dirty="0">
-                <a:solidFill>
-                  <a:srgbClr val="191919"/>
-                </a:solidFill>
-                <a:latin typeface="Outfit" pitchFamily="2" charset="0"/>
-              </a:rPr>
-              <a:t>S</a:t>
-            </a:r>
-            <a:r>
-              <a:rPr lang="en-HK" sz="900" b="1" dirty="0" err="1">
-                <a:solidFill>
-                  <a:srgbClr val="191919"/>
-                </a:solidFill>
-                <a:latin typeface="Outfit" pitchFamily="2" charset="0"/>
-              </a:rPr>
-              <a:t>upply</a:t>
-            </a:r>
-            <a:endParaRPr sz="900" b="1" dirty="0">
+              <a:t>Maintenance &amp; regulatory equipment</a:t>
+            </a:r>
+            <a:endParaRPr sz="900" dirty="0">
               <a:solidFill>
                 <a:srgbClr val="191919"/>
               </a:solidFill>
@@ -22496,7 +22444,7 @@
                 </a:solidFill>
                 <a:latin typeface="AvenirNext LT Pro Light"/>
               </a:rPr>
-              <a:t>Cost Estimate</a:t>
+              <a:t>What the machine needs around it</a:t>
             </a:r>
             <a:endParaRPr sz="2200" spc="20" dirty="0">
               <a:solidFill>
@@ -22529,7 +22477,7 @@
                 </a:solidFill>
                 <a:latin typeface="AvenirNext LT Pro Medium"/>
               </a:rPr>
-              <a:t>NITRIDE MBE PROPOSAL · BUDGET</a:t>
+              <a:t>NITRIDE MBE PROPOSAL · SUPPORTING PARTS</a:t>
             </a:r>
           </a:p>
         </p:txBody>
@@ -22542,12 +22490,12 @@
         </p:nvSpPr>
         <p:spPr>
           <a:xfrm>
-            <a:off x="612648" y="1298448"/>
-            <a:ext cx="7918704" cy="347472"/>
+            <a:off x="612648" y="1481328"/>
+            <a:ext cx="2514600" cy="658368"/>
           </a:xfrm>
           <a:prstGeom prst="roundRect">
             <a:avLst>
-              <a:gd name="adj" fmla="val 16000"/>
+              <a:gd name="adj" fmla="val 10000"/>
             </a:avLst>
           </a:prstGeom>
           <a:solidFill>
@@ -22577,25 +22525,130 @@
           <a:lstStyle/>
           <a:p>
             <a:pPr algn="ctr"/>
-          </a:p>
-        </p:txBody>
-      </p:sp>
-      <p:sp>
-        <p:nvSpPr>
-          <p:cNvPr id="5" name="Oval 4"/>
+            <a:endParaRPr/>
+          </a:p>
+        </p:txBody>
+      </p:sp>
+      <p:pic>
+        <p:nvPicPr>
+          <p:cNvPr id="5" name="Picture 4" descr="pc.png"/>
+          <p:cNvPicPr>
+            <a:picLocks noChangeAspect="1"/>
+          </p:cNvPicPr>
+          <p:nvPr/>
+        </p:nvPicPr>
+        <p:blipFill>
+          <a:blip r:embed="rId2"/>
+          <a:stretch>
+            <a:fillRect/>
+          </a:stretch>
+        </p:blipFill>
+        <p:spPr>
+          <a:xfrm>
+            <a:off x="704088" y="1627632"/>
+            <a:ext cx="365760" cy="365760"/>
+          </a:xfrm>
+          <a:prstGeom prst="rect">
+            <a:avLst/>
+          </a:prstGeom>
+        </p:spPr>
+      </p:pic>
+      <p:sp>
+        <p:nvSpPr>
+          <p:cNvPr id="6" name="TextBox 5"/>
+          <p:cNvSpPr txBox="1"/>
+          <p:nvPr/>
+        </p:nvSpPr>
+        <p:spPr>
+          <a:xfrm>
+            <a:off x="1161288" y="1572768"/>
+            <a:ext cx="1856232" cy="182880"/>
+          </a:xfrm>
+          <a:prstGeom prst="rect">
+            <a:avLst/>
+          </a:prstGeom>
+          <a:noFill/>
+        </p:spPr>
+        <p:txBody>
+          <a:bodyPr wrap="square" lIns="0" tIns="0" rIns="0" bIns="0" anchor="t">
+            <a:spAutoFit/>
+          </a:bodyPr>
+          <a:lstStyle/>
+          <a:p>
+            <a:pPr algn="l">
+              <a:lnSpc>
+                <a:spcPct val="120000"/>
+              </a:lnSpc>
+            </a:pPr>
+            <a:r>
+              <a:rPr sz="780">
+                <a:solidFill>
+                  <a:srgbClr val="191919"/>
+                </a:solidFill>
+                <a:latin typeface="AvenirNext LT Pro Medium"/>
+              </a:rPr>
+              <a:t>Control PC + DAQ hardware</a:t>
+            </a:r>
+          </a:p>
+        </p:txBody>
+      </p:sp>
+      <p:sp>
+        <p:nvSpPr>
+          <p:cNvPr id="7" name="TextBox 6"/>
+          <p:cNvSpPr txBox="1"/>
+          <p:nvPr/>
+        </p:nvSpPr>
+        <p:spPr>
+          <a:xfrm>
+            <a:off x="1161288" y="1755648"/>
+            <a:ext cx="1856232" cy="329184"/>
+          </a:xfrm>
+          <a:prstGeom prst="rect">
+            <a:avLst/>
+          </a:prstGeom>
+          <a:noFill/>
+        </p:spPr>
+        <p:txBody>
+          <a:bodyPr wrap="square" lIns="0" tIns="0" rIns="0" bIns="0" anchor="t">
+            <a:spAutoFit/>
+          </a:bodyPr>
+          <a:lstStyle/>
+          <a:p>
+            <a:pPr algn="l">
+              <a:lnSpc>
+                <a:spcPct val="112000"/>
+              </a:lnSpc>
+            </a:pPr>
+            <a:r>
+              <a:rPr sz="660">
+                <a:solidFill>
+                  <a:srgbClr val="666666"/>
+                </a:solidFill>
+                <a:latin typeface="Outfit"/>
+              </a:rPr>
+              <a:t>computer · DAQ cards · RHEED frame grabber</a:t>
+            </a:r>
+          </a:p>
+        </p:txBody>
+      </p:sp>
+      <p:sp>
+        <p:nvSpPr>
+          <p:cNvPr id="8" name="Rounded Rectangle 7"/>
           <p:cNvSpPr/>
           <p:nvPr/>
         </p:nvSpPr>
         <p:spPr>
           <a:xfrm>
-            <a:off x="740664" y="1344168"/>
-            <a:ext cx="256032" cy="256032"/>
-          </a:xfrm>
-          <a:prstGeom prst="ellipse">
-            <a:avLst/>
+            <a:off x="3310128" y="1481328"/>
+            <a:ext cx="2514600" cy="658368"/>
+          </a:xfrm>
+          <a:prstGeom prst="roundRect">
+            <a:avLst>
+              <a:gd name="adj" fmla="val 10000"/>
+            </a:avLst>
           </a:prstGeom>
           <a:solidFill>
-            <a:srgbClr val="00B388"/>
+            <a:srgbClr val="F5F5F5"/>
           </a:solidFill>
           <a:ln>
             <a:noFill/>
@@ -22617,32 +22670,48 @@
           </a:fontRef>
         </p:style>
         <p:txBody>
-          <a:bodyPr rtlCol="0" anchor="ctr" lIns="0" rIns="0" tIns="0" bIns="0"/>
+          <a:bodyPr rtlCol="0" anchor="ctr"/>
           <a:lstStyle/>
           <a:p>
             <a:pPr algn="ctr"/>
-            <a:r>
-              <a:rPr sz="800">
-                <a:solidFill>
-                  <a:srgbClr val="FFFFFF"/>
-                </a:solidFill>
-                <a:latin typeface="AvenirNext LT Pro Medium"/>
-              </a:rPr>
-              <a:t>01</a:t>
-            </a:r>
-          </a:p>
-        </p:txBody>
-      </p:sp>
-      <p:sp>
-        <p:nvSpPr>
-          <p:cNvPr id="6" name="TextBox 5"/>
+            <a:endParaRPr/>
+          </a:p>
+        </p:txBody>
+      </p:sp>
+      <p:pic>
+        <p:nvPicPr>
+          <p:cNvPr id="9" name="Picture 8" descr="wafer.png"/>
+          <p:cNvPicPr>
+            <a:picLocks noChangeAspect="1"/>
+          </p:cNvPicPr>
+          <p:nvPr/>
+        </p:nvPicPr>
+        <p:blipFill>
+          <a:blip r:embed="rId3"/>
+          <a:stretch>
+            <a:fillRect/>
+          </a:stretch>
+        </p:blipFill>
+        <p:spPr>
+          <a:xfrm>
+            <a:off x="3401568" y="1627632"/>
+            <a:ext cx="365760" cy="365760"/>
+          </a:xfrm>
+          <a:prstGeom prst="rect">
+            <a:avLst/>
+          </a:prstGeom>
+        </p:spPr>
+      </p:pic>
+      <p:sp>
+        <p:nvSpPr>
+          <p:cNvPr id="10" name="TextBox 9"/>
           <p:cNvSpPr txBox="1"/>
           <p:nvPr/>
         </p:nvSpPr>
         <p:spPr>
           <a:xfrm>
-            <a:off x="1143000" y="1298448"/>
-            <a:ext cx="4434840" cy="347472"/>
+            <a:off x="3858768" y="1572768"/>
+            <a:ext cx="1856232" cy="182880"/>
           </a:xfrm>
           <a:prstGeom prst="rect">
             <a:avLst/>
@@ -22650,7 +22719,7 @@
           <a:noFill/>
         </p:spPr>
         <p:txBody>
-          <a:bodyPr wrap="square" anchor="ctr" lIns="0" rIns="0" tIns="0" bIns="0">
+          <a:bodyPr wrap="square" lIns="0" tIns="0" rIns="0" bIns="0" anchor="t">
             <a:spAutoFit/>
           </a:bodyPr>
           <a:lstStyle/>
@@ -22661,27 +22730,27 @@
               </a:lnSpc>
             </a:pPr>
             <a:r>
-              <a:rPr sz="819">
+              <a:rPr sz="780">
                 <a:solidFill>
                   <a:srgbClr val="191919"/>
                 </a:solidFill>
                 <a:latin typeface="AvenirNext LT Pro Medium"/>
               </a:rPr>
-              <a:t>GEN II / Riber 32 class, refurbished</a:t>
-            </a:r>
-          </a:p>
-        </p:txBody>
-      </p:sp>
-      <p:sp>
-        <p:nvSpPr>
-          <p:cNvPr id="7" name="TextBox 6"/>
+              <a:t>Substrate holders + platens</a:t>
+            </a:r>
+          </a:p>
+        </p:txBody>
+      </p:sp>
+      <p:sp>
+        <p:nvSpPr>
+          <p:cNvPr id="11" name="TextBox 10"/>
           <p:cNvSpPr txBox="1"/>
           <p:nvPr/>
         </p:nvSpPr>
         <p:spPr>
           <a:xfrm>
-            <a:off x="5669280" y="1298448"/>
-            <a:ext cx="1417320" cy="347472"/>
+            <a:off x="3858768" y="1755648"/>
+            <a:ext cx="1856232" cy="329184"/>
           </a:xfrm>
           <a:prstGeom prst="rect">
             <a:avLst/>
@@ -22689,81 +22758,42 @@
           <a:noFill/>
         </p:spPr>
         <p:txBody>
-          <a:bodyPr wrap="square" anchor="ctr" lIns="0" rIns="0" tIns="0" bIns="0">
+          <a:bodyPr wrap="square" lIns="0" tIns="0" rIns="0" bIns="0" anchor="t">
             <a:spAutoFit/>
           </a:bodyPr>
           <a:lstStyle/>
           <a:p>
             <a:pPr algn="l">
               <a:lnSpc>
-                <a:spcPct val="120000"/>
+                <a:spcPct val="112000"/>
               </a:lnSpc>
             </a:pPr>
             <a:r>
-              <a:rPr sz="700">
+              <a:rPr sz="660">
                 <a:solidFill>
                   <a:srgbClr val="666666"/>
                 </a:solidFill>
                 <a:latin typeface="Outfit"/>
               </a:rPr>
-              <a:t>used chassis</a:t>
-            </a:r>
-          </a:p>
-        </p:txBody>
-      </p:sp>
-      <p:sp>
-        <p:nvSpPr>
-          <p:cNvPr id="8" name="TextBox 7"/>
-          <p:cNvSpPr txBox="1"/>
-          <p:nvPr/>
-        </p:nvSpPr>
-        <p:spPr>
-          <a:xfrm>
-            <a:off x="7178040" y="1298448"/>
-            <a:ext cx="1225296" cy="347472"/>
-          </a:xfrm>
-          <a:prstGeom prst="rect">
-            <a:avLst/>
-          </a:prstGeom>
-          <a:noFill/>
-        </p:spPr>
-        <p:txBody>
-          <a:bodyPr wrap="square" anchor="ctr" lIns="0" rIns="0" tIns="0" bIns="0">
-            <a:spAutoFit/>
-          </a:bodyPr>
-          <a:lstStyle/>
-          <a:p>
-            <a:pPr algn="r">
-              <a:lnSpc>
-                <a:spcPct val="120000"/>
-              </a:lnSpc>
-            </a:pPr>
-            <a:r>
-              <a:rPr sz="880">
-                <a:solidFill>
-                  <a:srgbClr val="191919"/>
-                </a:solidFill>
-                <a:latin typeface="AvenirNext LT Pro Medium"/>
-              </a:rPr>
-              <a:t>0.20–0.50</a:t>
-            </a:r>
-          </a:p>
-        </p:txBody>
-      </p:sp>
-      <p:sp>
-        <p:nvSpPr>
-          <p:cNvPr id="9" name="Rounded Rectangle 8"/>
+              <a:t>per-wafer hardware · matching transfer forks</a:t>
+            </a:r>
+          </a:p>
+        </p:txBody>
+      </p:sp>
+      <p:sp>
+        <p:nvSpPr>
+          <p:cNvPr id="12" name="Rounded Rectangle 11"/>
           <p:cNvSpPr/>
           <p:nvPr/>
         </p:nvSpPr>
         <p:spPr>
           <a:xfrm>
-            <a:off x="612648" y="1682495"/>
-            <a:ext cx="7918704" cy="347472"/>
+            <a:off x="6007608" y="1481328"/>
+            <a:ext cx="2514600" cy="658368"/>
           </a:xfrm>
           <a:prstGeom prst="roundRect">
             <a:avLst>
-              <a:gd name="adj" fmla="val 16000"/>
+              <a:gd name="adj" fmla="val 10000"/>
             </a:avLst>
           </a:prstGeom>
           <a:solidFill>
@@ -22793,25 +22823,130 @@
           <a:lstStyle/>
           <a:p>
             <a:pPr algn="ctr"/>
-          </a:p>
-        </p:txBody>
-      </p:sp>
-      <p:sp>
-        <p:nvSpPr>
-          <p:cNvPr id="10" name="Oval 9"/>
+            <a:endParaRPr/>
+          </a:p>
+        </p:txBody>
+      </p:sp>
+      <p:pic>
+        <p:nvPicPr>
+          <p:cNvPr id="13" name="Picture 12" descr="window.png"/>
+          <p:cNvPicPr>
+            <a:picLocks noChangeAspect="1"/>
+          </p:cNvPicPr>
+          <p:nvPr/>
+        </p:nvPicPr>
+        <p:blipFill>
+          <a:blip r:embed="rId4"/>
+          <a:stretch>
+            <a:fillRect/>
+          </a:stretch>
+        </p:blipFill>
+        <p:spPr>
+          <a:xfrm>
+            <a:off x="6099048" y="1627632"/>
+            <a:ext cx="365760" cy="365760"/>
+          </a:xfrm>
+          <a:prstGeom prst="rect">
+            <a:avLst/>
+          </a:prstGeom>
+        </p:spPr>
+      </p:pic>
+      <p:sp>
+        <p:nvSpPr>
+          <p:cNvPr id="14" name="TextBox 13"/>
+          <p:cNvSpPr txBox="1"/>
+          <p:nvPr/>
+        </p:nvSpPr>
+        <p:spPr>
+          <a:xfrm>
+            <a:off x="6556248" y="1572768"/>
+            <a:ext cx="1856232" cy="182880"/>
+          </a:xfrm>
+          <a:prstGeom prst="rect">
+            <a:avLst/>
+          </a:prstGeom>
+          <a:noFill/>
+        </p:spPr>
+        <p:txBody>
+          <a:bodyPr wrap="square" lIns="0" tIns="0" rIns="0" bIns="0" anchor="t">
+            <a:spAutoFit/>
+          </a:bodyPr>
+          <a:lstStyle/>
+          <a:p>
+            <a:pPr algn="l">
+              <a:lnSpc>
+                <a:spcPct val="120000"/>
+              </a:lnSpc>
+            </a:pPr>
+            <a:r>
+              <a:rPr sz="780">
+                <a:solidFill>
+                  <a:srgbClr val="191919"/>
+                </a:solidFill>
+                <a:latin typeface="AvenirNext LT Pro Medium"/>
+              </a:rPr>
+              <a:t>Heated viewport</a:t>
+            </a:r>
+          </a:p>
+        </p:txBody>
+      </p:sp>
+      <p:sp>
+        <p:nvSpPr>
+          <p:cNvPr id="15" name="TextBox 14"/>
+          <p:cNvSpPr txBox="1"/>
+          <p:nvPr/>
+        </p:nvSpPr>
+        <p:spPr>
+          <a:xfrm>
+            <a:off x="6556248" y="1755648"/>
+            <a:ext cx="1856232" cy="329184"/>
+          </a:xfrm>
+          <a:prstGeom prst="rect">
+            <a:avLst/>
+          </a:prstGeom>
+          <a:noFill/>
+        </p:spPr>
+        <p:txBody>
+          <a:bodyPr wrap="square" lIns="0" tIns="0" rIns="0" bIns="0" anchor="t">
+            <a:spAutoFit/>
+          </a:bodyPr>
+          <a:lstStyle/>
+          <a:p>
+            <a:pPr algn="l">
+              <a:lnSpc>
+                <a:spcPct val="112000"/>
+              </a:lnSpc>
+            </a:pPr>
+            <a:r>
+              <a:rPr sz="660">
+                <a:solidFill>
+                  <a:srgbClr val="666666"/>
+                </a:solidFill>
+                <a:latin typeface="Outfit"/>
+              </a:rPr>
+              <a:t>keeps the pyrometer window free of Ga coating</a:t>
+            </a:r>
+          </a:p>
+        </p:txBody>
+      </p:sp>
+      <p:sp>
+        <p:nvSpPr>
+          <p:cNvPr id="16" name="Rounded Rectangle 15"/>
           <p:cNvSpPr/>
           <p:nvPr/>
         </p:nvSpPr>
         <p:spPr>
           <a:xfrm>
-            <a:off x="740664" y="1728216"/>
-            <a:ext cx="256032" cy="256032"/>
-          </a:xfrm>
-          <a:prstGeom prst="ellipse">
-            <a:avLst/>
+            <a:off x="612648" y="2249424"/>
+            <a:ext cx="2514600" cy="658368"/>
+          </a:xfrm>
+          <a:prstGeom prst="roundRect">
+            <a:avLst>
+              <a:gd name="adj" fmla="val 10000"/>
+            </a:avLst>
           </a:prstGeom>
           <a:solidFill>
-            <a:srgbClr val="00B388"/>
+            <a:srgbClr val="F5F5F5"/>
           </a:solidFill>
           <a:ln>
             <a:noFill/>
@@ -22833,32 +22968,48 @@
           </a:fontRef>
         </p:style>
         <p:txBody>
-          <a:bodyPr rtlCol="0" anchor="ctr" lIns="0" rIns="0" tIns="0" bIns="0"/>
+          <a:bodyPr rtlCol="0" anchor="ctr"/>
           <a:lstStyle/>
           <a:p>
             <a:pPr algn="ctr"/>
-            <a:r>
-              <a:rPr sz="800">
-                <a:solidFill>
-                  <a:srgbClr val="FFFFFF"/>
-                </a:solidFill>
-                <a:latin typeface="AvenirNext LT Pro Medium"/>
-              </a:rPr>
-              <a:t>02</a:t>
-            </a:r>
-          </a:p>
-        </p:txBody>
-      </p:sp>
-      <p:sp>
-        <p:nvSpPr>
-          <p:cNvPr id="11" name="TextBox 10"/>
+            <a:endParaRPr/>
+          </a:p>
+        </p:txBody>
+      </p:sp>
+      <p:pic>
+        <p:nvPicPr>
+          <p:cNvPr id="17" name="Picture 16" descr="leak.png"/>
+          <p:cNvPicPr>
+            <a:picLocks noChangeAspect="1"/>
+          </p:cNvPicPr>
+          <p:nvPr/>
+        </p:nvPicPr>
+        <p:blipFill>
+          <a:blip r:embed="rId5"/>
+          <a:stretch>
+            <a:fillRect/>
+          </a:stretch>
+        </p:blipFill>
+        <p:spPr>
+          <a:xfrm>
+            <a:off x="704088" y="2395728"/>
+            <a:ext cx="365760" cy="365760"/>
+          </a:xfrm>
+          <a:prstGeom prst="rect">
+            <a:avLst/>
+          </a:prstGeom>
+        </p:spPr>
+      </p:pic>
+      <p:sp>
+        <p:nvSpPr>
+          <p:cNvPr id="18" name="TextBox 17"/>
           <p:cNvSpPr txBox="1"/>
           <p:nvPr/>
         </p:nvSpPr>
         <p:spPr>
           <a:xfrm>
-            <a:off x="1143000" y="1682495"/>
-            <a:ext cx="4434840" cy="347472"/>
+            <a:off x="1161288" y="2340864"/>
+            <a:ext cx="1856232" cy="182880"/>
           </a:xfrm>
           <a:prstGeom prst="rect">
             <a:avLst/>
@@ -22866,7 +23017,7 @@
           <a:noFill/>
         </p:spPr>
         <p:txBody>
-          <a:bodyPr wrap="square" anchor="ctr" lIns="0" rIns="0" tIns="0" bIns="0">
+          <a:bodyPr wrap="square" lIns="0" tIns="0" rIns="0" bIns="0" anchor="t">
             <a:spAutoFit/>
           </a:bodyPr>
           <a:lstStyle/>
@@ -22877,27 +23028,27 @@
               </a:lnSpc>
             </a:pPr>
             <a:r>
-              <a:rPr sz="819">
+              <a:rPr sz="780">
                 <a:solidFill>
                   <a:srgbClr val="191919"/>
                 </a:solidFill>
                 <a:latin typeface="AvenirNext LT Pro Medium"/>
               </a:rPr>
-              <a:t>Plasma source · 1200 °C manipulator · effusion cells</a:t>
-            </a:r>
-          </a:p>
-        </p:txBody>
-      </p:sp>
-      <p:sp>
-        <p:nvSpPr>
-          <p:cNvPr id="12" name="TextBox 11"/>
+              <a:t>Helium leak detector</a:t>
+            </a:r>
+          </a:p>
+        </p:txBody>
+      </p:sp>
+      <p:sp>
+        <p:nvSpPr>
+          <p:cNvPr id="19" name="TextBox 18"/>
           <p:cNvSpPr txBox="1"/>
           <p:nvPr/>
         </p:nvSpPr>
         <p:spPr>
           <a:xfrm>
-            <a:off x="5669280" y="1682495"/>
-            <a:ext cx="1417320" cy="347472"/>
+            <a:off x="1161288" y="2523744"/>
+            <a:ext cx="1856232" cy="329184"/>
           </a:xfrm>
           <a:prstGeom prst="rect">
             <a:avLst/>
@@ -22905,81 +23056,42 @@
           <a:noFill/>
         </p:spPr>
         <p:txBody>
-          <a:bodyPr wrap="square" anchor="ctr" lIns="0" rIns="0" tIns="0" bIns="0">
+          <a:bodyPr wrap="square" lIns="0" tIns="0" rIns="0" bIns="0" anchor="t">
             <a:spAutoFit/>
           </a:bodyPr>
           <a:lstStyle/>
           <a:p>
             <a:pPr algn="l">
               <a:lnSpc>
-                <a:spcPct val="120000"/>
+                <a:spcPct val="112000"/>
               </a:lnSpc>
             </a:pPr>
             <a:r>
-              <a:rPr sz="700">
+              <a:rPr sz="660">
                 <a:solidFill>
                   <a:srgbClr val="666666"/>
                 </a:solidFill>
                 <a:latin typeface="Outfit"/>
               </a:rPr>
-              <a:t>nitride core</a:t>
-            </a:r>
-          </a:p>
-        </p:txBody>
-      </p:sp>
-      <p:sp>
-        <p:nvSpPr>
-          <p:cNvPr id="13" name="TextBox 12"/>
-          <p:cNvSpPr txBox="1"/>
-          <p:nvPr/>
-        </p:nvSpPr>
-        <p:spPr>
-          <a:xfrm>
-            <a:off x="7178040" y="1682495"/>
-            <a:ext cx="1225296" cy="347472"/>
-          </a:xfrm>
-          <a:prstGeom prst="rect">
-            <a:avLst/>
-          </a:prstGeom>
-          <a:noFill/>
-        </p:spPr>
-        <p:txBody>
-          <a:bodyPr wrap="square" anchor="ctr" lIns="0" rIns="0" tIns="0" bIns="0">
-            <a:spAutoFit/>
-          </a:bodyPr>
-          <a:lstStyle/>
-          <a:p>
-            <a:pPr algn="r">
-              <a:lnSpc>
-                <a:spcPct val="120000"/>
-              </a:lnSpc>
-            </a:pPr>
-            <a:r>
-              <a:rPr sz="880">
-                <a:solidFill>
-                  <a:srgbClr val="191919"/>
-                </a:solidFill>
-                <a:latin typeface="AvenirNext LT Pro Medium"/>
-              </a:rPr>
-              <a:t>0.21–0.42</a:t>
-            </a:r>
-          </a:p>
-        </p:txBody>
-      </p:sp>
-      <p:sp>
-        <p:nvSpPr>
-          <p:cNvPr id="14" name="Rounded Rectangle 13"/>
+              <a:t>commissioning leak-hunt — buy or rent</a:t>
+            </a:r>
+          </a:p>
+        </p:txBody>
+      </p:sp>
+      <p:sp>
+        <p:nvSpPr>
+          <p:cNvPr id="20" name="Rounded Rectangle 19"/>
           <p:cNvSpPr/>
           <p:nvPr/>
         </p:nvSpPr>
         <p:spPr>
           <a:xfrm>
-            <a:off x="612648" y="2066543"/>
-            <a:ext cx="7918704" cy="347472"/>
+            <a:off x="3310128" y="2249424"/>
+            <a:ext cx="2514600" cy="658368"/>
           </a:xfrm>
           <a:prstGeom prst="roundRect">
             <a:avLst>
-              <a:gd name="adj" fmla="val 16000"/>
+              <a:gd name="adj" fmla="val 10000"/>
             </a:avLst>
           </a:prstGeom>
           <a:solidFill>
@@ -23009,25 +23121,130 @@
           <a:lstStyle/>
           <a:p>
             <a:pPr algn="ctr"/>
-          </a:p>
-        </p:txBody>
-      </p:sp>
-      <p:sp>
-        <p:nvSpPr>
-          <p:cNvPr id="15" name="Oval 14"/>
+            <a:endParaRPr/>
+          </a:p>
+        </p:txBody>
+      </p:sp>
+      <p:pic>
+        <p:nvPicPr>
+          <p:cNvPr id="21" name="Picture 20" descr="alarm.png"/>
+          <p:cNvPicPr>
+            <a:picLocks noChangeAspect="1"/>
+          </p:cNvPicPr>
+          <p:nvPr/>
+        </p:nvPicPr>
+        <p:blipFill>
+          <a:blip r:embed="rId6"/>
+          <a:stretch>
+            <a:fillRect/>
+          </a:stretch>
+        </p:blipFill>
+        <p:spPr>
+          <a:xfrm>
+            <a:off x="3401568" y="2395728"/>
+            <a:ext cx="365760" cy="365760"/>
+          </a:xfrm>
+          <a:prstGeom prst="rect">
+            <a:avLst/>
+          </a:prstGeom>
+        </p:spPr>
+      </p:pic>
+      <p:sp>
+        <p:nvSpPr>
+          <p:cNvPr id="22" name="TextBox 21"/>
+          <p:cNvSpPr txBox="1"/>
+          <p:nvPr/>
+        </p:nvSpPr>
+        <p:spPr>
+          <a:xfrm>
+            <a:off x="3858768" y="2340864"/>
+            <a:ext cx="1856232" cy="182880"/>
+          </a:xfrm>
+          <a:prstGeom prst="rect">
+            <a:avLst/>
+          </a:prstGeom>
+          <a:noFill/>
+        </p:spPr>
+        <p:txBody>
+          <a:bodyPr wrap="square" lIns="0" tIns="0" rIns="0" bIns="0" anchor="t">
+            <a:spAutoFit/>
+          </a:bodyPr>
+          <a:lstStyle/>
+          <a:p>
+            <a:pPr algn="l">
+              <a:lnSpc>
+                <a:spcPct val="120000"/>
+              </a:lnSpc>
+            </a:pPr>
+            <a:r>
+              <a:rPr sz="780">
+                <a:solidFill>
+                  <a:srgbClr val="191919"/>
+                </a:solidFill>
+                <a:latin typeface="AvenirNext LT Pro Medium"/>
+              </a:rPr>
+              <a:t>O₂ depletion alarm</a:t>
+            </a:r>
+          </a:p>
+        </p:txBody>
+      </p:sp>
+      <p:sp>
+        <p:nvSpPr>
+          <p:cNvPr id="23" name="TextBox 22"/>
+          <p:cNvSpPr txBox="1"/>
+          <p:nvPr/>
+        </p:nvSpPr>
+        <p:spPr>
+          <a:xfrm>
+            <a:off x="3858768" y="2523744"/>
+            <a:ext cx="1856232" cy="329184"/>
+          </a:xfrm>
+          <a:prstGeom prst="rect">
+            <a:avLst/>
+          </a:prstGeom>
+          <a:noFill/>
+        </p:spPr>
+        <p:txBody>
+          <a:bodyPr wrap="square" lIns="0" tIns="0" rIns="0" bIns="0" anchor="t">
+            <a:spAutoFit/>
+          </a:bodyPr>
+          <a:lstStyle/>
+          <a:p>
+            <a:pPr algn="l">
+              <a:lnSpc>
+                <a:spcPct val="112000"/>
+              </a:lnSpc>
+            </a:pPr>
+            <a:r>
+              <a:rPr sz="660">
+                <a:solidFill>
+                  <a:srgbClr val="666666"/>
+                </a:solidFill>
+                <a:latin typeface="Outfit"/>
+              </a:rPr>
+              <a:t>LN₂ asphyxiation safety — code requirement</a:t>
+            </a:r>
+          </a:p>
+        </p:txBody>
+      </p:sp>
+      <p:sp>
+        <p:nvSpPr>
+          <p:cNvPr id="24" name="Rounded Rectangle 23"/>
           <p:cNvSpPr/>
           <p:nvPr/>
         </p:nvSpPr>
         <p:spPr>
           <a:xfrm>
-            <a:off x="740664" y="2112263"/>
-            <a:ext cx="256032" cy="256032"/>
-          </a:xfrm>
-          <a:prstGeom prst="ellipse">
-            <a:avLst/>
+            <a:off x="6007608" y="2249424"/>
+            <a:ext cx="2514600" cy="658368"/>
+          </a:xfrm>
+          <a:prstGeom prst="roundRect">
+            <a:avLst>
+              <a:gd name="adj" fmla="val 10000"/>
+            </a:avLst>
           </a:prstGeom>
           <a:solidFill>
-            <a:srgbClr val="00B388"/>
+            <a:srgbClr val="F5F5F5"/>
           </a:solidFill>
           <a:ln>
             <a:noFill/>
@@ -23049,32 +23266,48 @@
           </a:fontRef>
         </p:style>
         <p:txBody>
-          <a:bodyPr rtlCol="0" anchor="ctr" lIns="0" rIns="0" tIns="0" bIns="0"/>
+          <a:bodyPr rtlCol="0" anchor="ctr"/>
           <a:lstStyle/>
           <a:p>
             <a:pPr algn="ctr"/>
-            <a:r>
-              <a:rPr sz="800">
-                <a:solidFill>
-                  <a:srgbClr val="FFFFFF"/>
-                </a:solidFill>
-                <a:latin typeface="AvenirNext LT Pro Medium"/>
-              </a:rPr>
-              <a:t>03</a:t>
-            </a:r>
-          </a:p>
-        </p:txBody>
-      </p:sp>
-      <p:sp>
-        <p:nvSpPr>
-          <p:cNvPr id="16" name="TextBox 15"/>
+            <a:endParaRPr/>
+          </a:p>
+        </p:txBody>
+      </p:sp>
+      <p:pic>
+        <p:nvPicPr>
+          <p:cNvPr id="25" name="Picture 24" descr="ingot.png"/>
+          <p:cNvPicPr>
+            <a:picLocks noChangeAspect="1"/>
+          </p:cNvPicPr>
+          <p:nvPr/>
+        </p:nvPicPr>
+        <p:blipFill>
+          <a:blip r:embed="rId7"/>
+          <a:stretch>
+            <a:fillRect/>
+          </a:stretch>
+        </p:blipFill>
+        <p:spPr>
+          <a:xfrm>
+            <a:off x="6099048" y="2395728"/>
+            <a:ext cx="365760" cy="365760"/>
+          </a:xfrm>
+          <a:prstGeom prst="rect">
+            <a:avLst/>
+          </a:prstGeom>
+        </p:spPr>
+      </p:pic>
+      <p:sp>
+        <p:nvSpPr>
+          <p:cNvPr id="26" name="TextBox 25"/>
           <p:cNvSpPr txBox="1"/>
           <p:nvPr/>
         </p:nvSpPr>
         <p:spPr>
           <a:xfrm>
-            <a:off x="1143000" y="2066543"/>
-            <a:ext cx="4434840" cy="347472"/>
+            <a:off x="6556248" y="2340864"/>
+            <a:ext cx="1856232" cy="182880"/>
           </a:xfrm>
           <a:prstGeom prst="rect">
             <a:avLst/>
@@ -23082,7 +23315,7 @@
           <a:noFill/>
         </p:spPr>
         <p:txBody>
-          <a:bodyPr wrap="square" anchor="ctr" lIns="0" rIns="0" tIns="0" bIns="0">
+          <a:bodyPr wrap="square" lIns="0" tIns="0" rIns="0" bIns="0" anchor="t">
             <a:spAutoFit/>
           </a:bodyPr>
           <a:lstStyle/>
@@ -23093,27 +23326,27 @@
               </a:lnSpc>
             </a:pPr>
             <a:r>
-              <a:rPr sz="819">
+              <a:rPr sz="780">
                 <a:solidFill>
                   <a:srgbClr val="191919"/>
                 </a:solidFill>
                 <a:latin typeface="AvenirNext LT Pro Medium"/>
               </a:rPr>
-              <a:t>Maglev turbo · RHEED 30 keV · band-edge pyrometry · RGA</a:t>
-            </a:r>
-          </a:p>
-        </p:txBody>
-      </p:sp>
-      <p:sp>
-        <p:nvSpPr>
-          <p:cNvPr id="17" name="TextBox 16"/>
+              <a:t>Initial source charges</a:t>
+            </a:r>
+          </a:p>
+        </p:txBody>
+      </p:sp>
+      <p:sp>
+        <p:nvSpPr>
+          <p:cNvPr id="27" name="TextBox 26"/>
           <p:cNvSpPr txBox="1"/>
           <p:nvPr/>
         </p:nvSpPr>
         <p:spPr>
           <a:xfrm>
-            <a:off x="5669280" y="2066543"/>
-            <a:ext cx="1417320" cy="347472"/>
+            <a:off x="6556248" y="2523744"/>
+            <a:ext cx="1856232" cy="329184"/>
           </a:xfrm>
           <a:prstGeom prst="rect">
             <a:avLst/>
@@ -23121,81 +23354,42 @@
           <a:noFill/>
         </p:spPr>
         <p:txBody>
-          <a:bodyPr wrap="square" anchor="ctr" lIns="0" rIns="0" tIns="0" bIns="0">
+          <a:bodyPr wrap="square" lIns="0" tIns="0" rIns="0" bIns="0" anchor="t">
             <a:spAutoFit/>
           </a:bodyPr>
           <a:lstStyle/>
           <a:p>
             <a:pPr algn="l">
               <a:lnSpc>
-                <a:spcPct val="120000"/>
+                <a:spcPct val="112000"/>
               </a:lnSpc>
             </a:pPr>
             <a:r>
-              <a:rPr sz="700">
+              <a:rPr sz="660">
                 <a:solidFill>
                   <a:srgbClr val="666666"/>
                 </a:solidFill>
                 <a:latin typeface="Outfit"/>
               </a:rPr>
-              <a:t>vacuum + diagnostics</a:t>
-            </a:r>
-          </a:p>
-        </p:txBody>
-      </p:sp>
-      <p:sp>
-        <p:nvSpPr>
-          <p:cNvPr id="18" name="TextBox 17"/>
-          <p:cNvSpPr txBox="1"/>
-          <p:nvPr/>
-        </p:nvSpPr>
-        <p:spPr>
-          <a:xfrm>
-            <a:off x="7178040" y="2066543"/>
-            <a:ext cx="1225296" cy="347472"/>
-          </a:xfrm>
-          <a:prstGeom prst="rect">
-            <a:avLst/>
-          </a:prstGeom>
-          <a:noFill/>
-        </p:spPr>
-        <p:txBody>
-          <a:bodyPr wrap="square" anchor="ctr" lIns="0" rIns="0" tIns="0" bIns="0">
-            <a:spAutoFit/>
-          </a:bodyPr>
-          <a:lstStyle/>
-          <a:p>
-            <a:pPr algn="r">
-              <a:lnSpc>
-                <a:spcPct val="120000"/>
-              </a:lnSpc>
-            </a:pPr>
-            <a:r>
-              <a:rPr sz="880">
-                <a:solidFill>
-                  <a:srgbClr val="191919"/>
-                </a:solidFill>
-                <a:latin typeface="AvenirNext LT Pro Medium"/>
-              </a:rPr>
-              <a:t>0.19–0.32</a:t>
-            </a:r>
-          </a:p>
-        </p:txBody>
-      </p:sp>
-      <p:sp>
-        <p:nvSpPr>
-          <p:cNvPr id="19" name="Rounded Rectangle 18"/>
+              <a:t>first Ga · Al · Cu · Si · Mg fill + spare PBN crucibles</a:t>
+            </a:r>
+          </a:p>
+        </p:txBody>
+      </p:sp>
+      <p:sp>
+        <p:nvSpPr>
+          <p:cNvPr id="28" name="Rounded Rectangle 27"/>
           <p:cNvSpPr/>
           <p:nvPr/>
         </p:nvSpPr>
         <p:spPr>
           <a:xfrm>
-            <a:off x="612648" y="2450591"/>
-            <a:ext cx="7918704" cy="347472"/>
+            <a:off x="612648" y="3017520"/>
+            <a:ext cx="2514600" cy="658368"/>
           </a:xfrm>
           <a:prstGeom prst="roundRect">
             <a:avLst>
-              <a:gd name="adj" fmla="val 16000"/>
+              <a:gd name="adj" fmla="val 10000"/>
             </a:avLst>
           </a:prstGeom>
           <a:solidFill>
@@ -23225,25 +23419,130 @@
           <a:lstStyle/>
           <a:p>
             <a:pPr algn="ctr"/>
-          </a:p>
-        </p:txBody>
-      </p:sp>
-      <p:sp>
-        <p:nvSpPr>
-          <p:cNvPr id="20" name="Oval 19"/>
+            <a:endParaRPr/>
+          </a:p>
+        </p:txBody>
+      </p:sp>
+      <p:pic>
+        <p:nvPicPr>
+          <p:cNvPr id="29" name="Picture 28" descr="ring.png"/>
+          <p:cNvPicPr>
+            <a:picLocks noChangeAspect="1"/>
+          </p:cNvPicPr>
+          <p:nvPr/>
+        </p:nvPicPr>
+        <p:blipFill>
+          <a:blip r:embed="rId8"/>
+          <a:stretch>
+            <a:fillRect/>
+          </a:stretch>
+        </p:blipFill>
+        <p:spPr>
+          <a:xfrm>
+            <a:off x="704088" y="3163824"/>
+            <a:ext cx="365760" cy="365760"/>
+          </a:xfrm>
+          <a:prstGeom prst="rect">
+            <a:avLst/>
+          </a:prstGeom>
+        </p:spPr>
+      </p:pic>
+      <p:sp>
+        <p:nvSpPr>
+          <p:cNvPr id="30" name="TextBox 29"/>
+          <p:cNvSpPr txBox="1"/>
+          <p:nvPr/>
+        </p:nvSpPr>
+        <p:spPr>
+          <a:xfrm>
+            <a:off x="1161288" y="3108960"/>
+            <a:ext cx="1856232" cy="182880"/>
+          </a:xfrm>
+          <a:prstGeom prst="rect">
+            <a:avLst/>
+          </a:prstGeom>
+          <a:noFill/>
+        </p:spPr>
+        <p:txBody>
+          <a:bodyPr wrap="square" lIns="0" tIns="0" rIns="0" bIns="0" anchor="t">
+            <a:spAutoFit/>
+          </a:bodyPr>
+          <a:lstStyle/>
+          <a:p>
+            <a:pPr algn="l">
+              <a:lnSpc>
+                <a:spcPct val="120000"/>
+              </a:lnSpc>
+            </a:pPr>
+            <a:r>
+              <a:rPr sz="780">
+                <a:solidFill>
+                  <a:srgbClr val="191919"/>
+                </a:solidFill>
+                <a:latin typeface="AvenirNext LT Pro Medium"/>
+              </a:rPr>
+              <a:t>Copper gaskets + spares kit</a:t>
+            </a:r>
+          </a:p>
+        </p:txBody>
+      </p:sp>
+      <p:sp>
+        <p:nvSpPr>
+          <p:cNvPr id="31" name="TextBox 30"/>
+          <p:cNvSpPr txBox="1"/>
+          <p:nvPr/>
+        </p:nvSpPr>
+        <p:spPr>
+          <a:xfrm>
+            <a:off x="1161288" y="3291839"/>
+            <a:ext cx="1856232" cy="329184"/>
+          </a:xfrm>
+          <a:prstGeom prst="rect">
+            <a:avLst/>
+          </a:prstGeom>
+          <a:noFill/>
+        </p:spPr>
+        <p:txBody>
+          <a:bodyPr wrap="square" lIns="0" tIns="0" rIns="0" bIns="0" anchor="t">
+            <a:spAutoFit/>
+          </a:bodyPr>
+          <a:lstStyle/>
+          <a:p>
+            <a:pPr algn="l">
+              <a:lnSpc>
+                <a:spcPct val="112000"/>
+              </a:lnSpc>
+            </a:pPr>
+            <a:r>
+              <a:rPr sz="660">
+                <a:solidFill>
+                  <a:srgbClr val="666666"/>
+                </a:solidFill>
+                <a:latin typeface="Outfit"/>
+              </a:rPr>
+              <a:t>every flange opening consumes one</a:t>
+            </a:r>
+          </a:p>
+        </p:txBody>
+      </p:sp>
+      <p:sp>
+        <p:nvSpPr>
+          <p:cNvPr id="32" name="Rounded Rectangle 31"/>
           <p:cNvSpPr/>
           <p:nvPr/>
         </p:nvSpPr>
         <p:spPr>
           <a:xfrm>
-            <a:off x="740664" y="2496311"/>
-            <a:ext cx="256032" cy="256032"/>
-          </a:xfrm>
-          <a:prstGeom prst="ellipse">
-            <a:avLst/>
+            <a:off x="3310128" y="3017520"/>
+            <a:ext cx="2514600" cy="658368"/>
+          </a:xfrm>
+          <a:prstGeom prst="roundRect">
+            <a:avLst>
+              <a:gd name="adj" fmla="val 10000"/>
+            </a:avLst>
           </a:prstGeom>
           <a:solidFill>
-            <a:srgbClr val="00B388"/>
+            <a:srgbClr val="F5F5F5"/>
           </a:solidFill>
           <a:ln>
             <a:noFill/>
@@ -23265,32 +23564,48 @@
           </a:fontRef>
         </p:style>
         <p:txBody>
-          <a:bodyPr rtlCol="0" anchor="ctr" lIns="0" rIns="0" tIns="0" bIns="0"/>
+          <a:bodyPr rtlCol="0" anchor="ctr"/>
           <a:lstStyle/>
           <a:p>
             <a:pPr algn="ctr"/>
-            <a:r>
-              <a:rPr sz="800">
-                <a:solidFill>
-                  <a:srgbClr val="FFFFFF"/>
-                </a:solidFill>
-                <a:latin typeface="AvenirNext LT Pro Medium"/>
-              </a:rPr>
-              <a:t>04</a:t>
-            </a:r>
-          </a:p>
-        </p:txBody>
-      </p:sp>
-      <p:sp>
-        <p:nvSpPr>
-          <p:cNvPr id="21" name="TextBox 20"/>
+            <a:endParaRPr/>
+          </a:p>
+        </p:txBody>
+      </p:sp>
+      <p:pic>
+        <p:nvPicPr>
+          <p:cNvPr id="33" name="Picture 32" descr="mask.png"/>
+          <p:cNvPicPr>
+            <a:picLocks noChangeAspect="1"/>
+          </p:cNvPicPr>
+          <p:nvPr/>
+        </p:nvPicPr>
+        <p:blipFill>
+          <a:blip r:embed="rId9"/>
+          <a:stretch>
+            <a:fillRect/>
+          </a:stretch>
+        </p:blipFill>
+        <p:spPr>
+          <a:xfrm>
+            <a:off x="3401568" y="3163824"/>
+            <a:ext cx="365760" cy="365760"/>
+          </a:xfrm>
+          <a:prstGeom prst="rect">
+            <a:avLst/>
+          </a:prstGeom>
+        </p:spPr>
+      </p:pic>
+      <p:sp>
+        <p:nvSpPr>
+          <p:cNvPr id="34" name="TextBox 33"/>
           <p:cNvSpPr txBox="1"/>
           <p:nvPr/>
         </p:nvSpPr>
         <p:spPr>
           <a:xfrm>
-            <a:off x="1143000" y="2450591"/>
-            <a:ext cx="4434840" cy="347472"/>
+            <a:off x="3858768" y="3108960"/>
+            <a:ext cx="1856232" cy="182880"/>
           </a:xfrm>
           <a:prstGeom prst="rect">
             <a:avLst/>
@@ -23298,7 +23613,7 @@
           <a:noFill/>
         </p:spPr>
         <p:txBody>
-          <a:bodyPr wrap="square" anchor="ctr" lIns="0" rIns="0" tIns="0" bIns="0">
+          <a:bodyPr wrap="square" lIns="0" tIns="0" rIns="0" bIns="0" anchor="t">
             <a:spAutoFit/>
           </a:bodyPr>
           <a:lstStyle/>
@@ -23309,27 +23624,27 @@
               </a:lnSpc>
             </a:pPr>
             <a:r>
-              <a:rPr sz="819">
+              <a:rPr sz="780">
                 <a:solidFill>
                   <a:srgbClr val="191919"/>
                 </a:solidFill>
                 <a:latin typeface="AvenirNext LT Pro Medium"/>
               </a:rPr>
-              <a:t>Control PC · DAQ · software built in-house on commercial interlocks</a:t>
-            </a:r>
-          </a:p>
-        </p:txBody>
-      </p:sp>
-      <p:sp>
-        <p:nvSpPr>
-          <p:cNvPr id="22" name="TextBox 21"/>
+              <a:t>Mask patterning access</a:t>
+            </a:r>
+          </a:p>
+        </p:txBody>
+      </p:sp>
+      <p:sp>
+        <p:nvSpPr>
+          <p:cNvPr id="35" name="TextBox 34"/>
           <p:cNvSpPr txBox="1"/>
           <p:nvPr/>
         </p:nvSpPr>
         <p:spPr>
           <a:xfrm>
-            <a:off x="5669280" y="2450591"/>
-            <a:ext cx="1417320" cy="347472"/>
+            <a:off x="3858768" y="3291839"/>
+            <a:ext cx="1856232" cy="329184"/>
           </a:xfrm>
           <a:prstGeom prst="rect">
             <a:avLst/>
@@ -23337,922 +23652,24 @@
           <a:noFill/>
         </p:spPr>
         <p:txBody>
-          <a:bodyPr wrap="square" anchor="ctr" lIns="0" rIns="0" tIns="0" bIns="0">
+          <a:bodyPr wrap="square" lIns="0" tIns="0" rIns="0" bIns="0" anchor="t">
             <a:spAutoFit/>
           </a:bodyPr>
           <a:lstStyle/>
           <a:p>
             <a:pPr algn="l">
               <a:lnSpc>
-                <a:spcPct val="120000"/>
+                <a:spcPct val="112000"/>
               </a:lnSpc>
             </a:pPr>
             <a:r>
-              <a:rPr sz="700">
+              <a:rPr sz="660">
                 <a:solidFill>
                   <a:srgbClr val="666666"/>
                 </a:solidFill>
                 <a:latin typeface="Outfit"/>
               </a:rPr>
-              <a:t>controls + DAQ</a:t>
-            </a:r>
-          </a:p>
-        </p:txBody>
-      </p:sp>
-      <p:sp>
-        <p:nvSpPr>
-          <p:cNvPr id="23" name="TextBox 22"/>
-          <p:cNvSpPr txBox="1"/>
-          <p:nvPr/>
-        </p:nvSpPr>
-        <p:spPr>
-          <a:xfrm>
-            <a:off x="7178040" y="2450591"/>
-            <a:ext cx="1225296" cy="347472"/>
-          </a:xfrm>
-          <a:prstGeom prst="rect">
-            <a:avLst/>
-          </a:prstGeom>
-          <a:noFill/>
-        </p:spPr>
-        <p:txBody>
-          <a:bodyPr wrap="square" anchor="ctr" lIns="0" rIns="0" tIns="0" bIns="0">
-            <a:spAutoFit/>
-          </a:bodyPr>
-          <a:lstStyle/>
-          <a:p>
-            <a:pPr algn="r">
-              <a:lnSpc>
-                <a:spcPct val="120000"/>
-              </a:lnSpc>
-            </a:pPr>
-            <a:r>
-              <a:rPr sz="880">
-                <a:solidFill>
-                  <a:srgbClr val="191919"/>
-                </a:solidFill>
-                <a:latin typeface="AvenirNext LT Pro Medium"/>
-              </a:rPr>
-              <a:t>0.05–0.10</a:t>
-            </a:r>
-          </a:p>
-        </p:txBody>
-      </p:sp>
-      <p:sp>
-        <p:nvSpPr>
-          <p:cNvPr id="24" name="Rounded Rectangle 23"/>
-          <p:cNvSpPr/>
-          <p:nvPr/>
-        </p:nvSpPr>
-        <p:spPr>
-          <a:xfrm>
-            <a:off x="612648" y="2834639"/>
-            <a:ext cx="7918704" cy="347472"/>
-          </a:xfrm>
-          <a:prstGeom prst="roundRect">
-            <a:avLst>
-              <a:gd name="adj" fmla="val 16000"/>
-            </a:avLst>
-          </a:prstGeom>
-          <a:solidFill>
-            <a:srgbClr val="F5F5F5"/>
-          </a:solidFill>
-          <a:ln>
-            <a:noFill/>
-          </a:ln>
-          <a:effectLst/>
-        </p:spPr>
-        <p:style>
-          <a:lnRef idx="1">
-            <a:schemeClr val="accent1"/>
-          </a:lnRef>
-          <a:fillRef idx="3">
-            <a:schemeClr val="accent1"/>
-          </a:fillRef>
-          <a:effectRef idx="2">
-            <a:schemeClr val="accent1"/>
-          </a:effectRef>
-          <a:fontRef idx="minor">
-            <a:schemeClr val="lt1"/>
-          </a:fontRef>
-        </p:style>
-        <p:txBody>
-          <a:bodyPr rtlCol="0" anchor="ctr"/>
-          <a:lstStyle/>
-          <a:p>
-            <a:pPr algn="ctr"/>
-          </a:p>
-        </p:txBody>
-      </p:sp>
-      <p:sp>
-        <p:nvSpPr>
-          <p:cNvPr id="25" name="Oval 24"/>
-          <p:cNvSpPr/>
-          <p:nvPr/>
-        </p:nvSpPr>
-        <p:spPr>
-          <a:xfrm>
-            <a:off x="740664" y="2880359"/>
-            <a:ext cx="256032" cy="256032"/>
-          </a:xfrm>
-          <a:prstGeom prst="ellipse">
-            <a:avLst/>
-          </a:prstGeom>
-          <a:solidFill>
-            <a:srgbClr val="00B388"/>
-          </a:solidFill>
-          <a:ln>
-            <a:noFill/>
-          </a:ln>
-          <a:effectLst/>
-        </p:spPr>
-        <p:style>
-          <a:lnRef idx="1">
-            <a:schemeClr val="accent1"/>
-          </a:lnRef>
-          <a:fillRef idx="3">
-            <a:schemeClr val="accent1"/>
-          </a:fillRef>
-          <a:effectRef idx="2">
-            <a:schemeClr val="accent1"/>
-          </a:effectRef>
-          <a:fontRef idx="minor">
-            <a:schemeClr val="lt1"/>
-          </a:fontRef>
-        </p:style>
-        <p:txBody>
-          <a:bodyPr rtlCol="0" anchor="ctr" lIns="0" rIns="0" tIns="0" bIns="0"/>
-          <a:lstStyle/>
-          <a:p>
-            <a:pPr algn="ctr"/>
-            <a:r>
-              <a:rPr sz="800">
-                <a:solidFill>
-                  <a:srgbClr val="FFFFFF"/>
-                </a:solidFill>
-                <a:latin typeface="AvenirNext LT Pro Medium"/>
-              </a:rPr>
-              <a:t>05</a:t>
-            </a:r>
-          </a:p>
-        </p:txBody>
-      </p:sp>
-      <p:sp>
-        <p:nvSpPr>
-          <p:cNvPr id="26" name="TextBox 25"/>
-          <p:cNvSpPr txBox="1"/>
-          <p:nvPr/>
-        </p:nvSpPr>
-        <p:spPr>
-          <a:xfrm>
-            <a:off x="1143000" y="2834639"/>
-            <a:ext cx="4434840" cy="347472"/>
-          </a:xfrm>
-          <a:prstGeom prst="rect">
-            <a:avLst/>
-          </a:prstGeom>
-          <a:noFill/>
-        </p:spPr>
-        <p:txBody>
-          <a:bodyPr wrap="square" anchor="ctr" lIns="0" rIns="0" tIns="0" bIns="0">
-            <a:spAutoFit/>
-          </a:bodyPr>
-          <a:lstStyle/>
-          <a:p>
-            <a:pPr algn="l">
-              <a:lnSpc>
-                <a:spcPct val="120000"/>
-              </a:lnSpc>
-            </a:pPr>
-            <a:r>
-              <a:rPr sz="819">
-                <a:solidFill>
-                  <a:srgbClr val="191919"/>
-                </a:solidFill>
-                <a:latin typeface="AvenirNext LT Pro Medium"/>
-              </a:rPr>
-              <a:t>Holders · heated viewport · leak detector · O₂ alarm · source charges · gaskets</a:t>
-            </a:r>
-          </a:p>
-        </p:txBody>
-      </p:sp>
-      <p:sp>
-        <p:nvSpPr>
-          <p:cNvPr id="27" name="TextBox 26"/>
-          <p:cNvSpPr txBox="1"/>
-          <p:nvPr/>
-        </p:nvSpPr>
-        <p:spPr>
-          <a:xfrm>
-            <a:off x="5669280" y="2834639"/>
-            <a:ext cx="1417320" cy="347472"/>
-          </a:xfrm>
-          <a:prstGeom prst="rect">
-            <a:avLst/>
-          </a:prstGeom>
-          <a:noFill/>
-        </p:spPr>
-        <p:txBody>
-          <a:bodyPr wrap="square" anchor="ctr" lIns="0" rIns="0" tIns="0" bIns="0">
-            <a:spAutoFit/>
-          </a:bodyPr>
-          <a:lstStyle/>
-          <a:p>
-            <a:pPr algn="l">
-              <a:lnSpc>
-                <a:spcPct val="120000"/>
-              </a:lnSpc>
-            </a:pPr>
-            <a:r>
-              <a:rPr sz="700">
-                <a:solidFill>
-                  <a:srgbClr val="666666"/>
-                </a:solidFill>
-                <a:latin typeface="Outfit"/>
-              </a:rPr>
-              <a:t>supporting parts</a:t>
-            </a:r>
-          </a:p>
-        </p:txBody>
-      </p:sp>
-      <p:sp>
-        <p:nvSpPr>
-          <p:cNvPr id="28" name="TextBox 27"/>
-          <p:cNvSpPr txBox="1"/>
-          <p:nvPr/>
-        </p:nvSpPr>
-        <p:spPr>
-          <a:xfrm>
-            <a:off x="7178040" y="2834639"/>
-            <a:ext cx="1225296" cy="347472"/>
-          </a:xfrm>
-          <a:prstGeom prst="rect">
-            <a:avLst/>
-          </a:prstGeom>
-          <a:noFill/>
-        </p:spPr>
-        <p:txBody>
-          <a:bodyPr wrap="square" anchor="ctr" lIns="0" rIns="0" tIns="0" bIns="0">
-            <a:spAutoFit/>
-          </a:bodyPr>
-          <a:lstStyle/>
-          <a:p>
-            <a:pPr algn="r">
-              <a:lnSpc>
-                <a:spcPct val="120000"/>
-              </a:lnSpc>
-            </a:pPr>
-            <a:r>
-              <a:rPr sz="880">
-                <a:solidFill>
-                  <a:srgbClr val="191919"/>
-                </a:solidFill>
-                <a:latin typeface="AvenirNext LT Pro Medium"/>
-              </a:rPr>
-              <a:t>0.05–0.12</a:t>
-            </a:r>
-          </a:p>
-        </p:txBody>
-      </p:sp>
-      <p:sp>
-        <p:nvSpPr>
-          <p:cNvPr id="29" name="Rounded Rectangle 28"/>
-          <p:cNvSpPr/>
-          <p:nvPr/>
-        </p:nvSpPr>
-        <p:spPr>
-          <a:xfrm>
-            <a:off x="612648" y="3218687"/>
-            <a:ext cx="7918704" cy="347472"/>
-          </a:xfrm>
-          <a:prstGeom prst="roundRect">
-            <a:avLst>
-              <a:gd name="adj" fmla="val 16000"/>
-            </a:avLst>
-          </a:prstGeom>
-          <a:solidFill>
-            <a:srgbClr val="F5F5F5"/>
-          </a:solidFill>
-          <a:ln>
-            <a:noFill/>
-          </a:ln>
-          <a:effectLst/>
-        </p:spPr>
-        <p:style>
-          <a:lnRef idx="1">
-            <a:schemeClr val="accent1"/>
-          </a:lnRef>
-          <a:fillRef idx="3">
-            <a:schemeClr val="accent1"/>
-          </a:fillRef>
-          <a:effectRef idx="2">
-            <a:schemeClr val="accent1"/>
-          </a:effectRef>
-          <a:fontRef idx="minor">
-            <a:schemeClr val="lt1"/>
-          </a:fontRef>
-        </p:style>
-        <p:txBody>
-          <a:bodyPr rtlCol="0" anchor="ctr"/>
-          <a:lstStyle/>
-          <a:p>
-            <a:pPr algn="ctr"/>
-          </a:p>
-        </p:txBody>
-      </p:sp>
-      <p:sp>
-        <p:nvSpPr>
-          <p:cNvPr id="30" name="Oval 29"/>
-          <p:cNvSpPr/>
-          <p:nvPr/>
-        </p:nvSpPr>
-        <p:spPr>
-          <a:xfrm>
-            <a:off x="740664" y="3264407"/>
-            <a:ext cx="256032" cy="256032"/>
-          </a:xfrm>
-          <a:prstGeom prst="ellipse">
-            <a:avLst/>
-          </a:prstGeom>
-          <a:solidFill>
-            <a:srgbClr val="00B388"/>
-          </a:solidFill>
-          <a:ln>
-            <a:noFill/>
-          </a:ln>
-          <a:effectLst/>
-        </p:spPr>
-        <p:style>
-          <a:lnRef idx="1">
-            <a:schemeClr val="accent1"/>
-          </a:lnRef>
-          <a:fillRef idx="3">
-            <a:schemeClr val="accent1"/>
-          </a:fillRef>
-          <a:effectRef idx="2">
-            <a:schemeClr val="accent1"/>
-          </a:effectRef>
-          <a:fontRef idx="minor">
-            <a:schemeClr val="lt1"/>
-          </a:fontRef>
-        </p:style>
-        <p:txBody>
-          <a:bodyPr rtlCol="0" anchor="ctr" lIns="0" rIns="0" tIns="0" bIns="0"/>
-          <a:lstStyle/>
-          <a:p>
-            <a:pPr algn="ctr"/>
-            <a:r>
-              <a:rPr sz="800">
-                <a:solidFill>
-                  <a:srgbClr val="FFFFFF"/>
-                </a:solidFill>
-                <a:latin typeface="AvenirNext LT Pro Medium"/>
-              </a:rPr>
-              <a:t>06</a:t>
-            </a:r>
-          </a:p>
-        </p:txBody>
-      </p:sp>
-      <p:sp>
-        <p:nvSpPr>
-          <p:cNvPr id="31" name="TextBox 30"/>
-          <p:cNvSpPr txBox="1"/>
-          <p:nvPr/>
-        </p:nvSpPr>
-        <p:spPr>
-          <a:xfrm>
-            <a:off x="1143000" y="3218687"/>
-            <a:ext cx="4434840" cy="347472"/>
-          </a:xfrm>
-          <a:prstGeom prst="rect">
-            <a:avLst/>
-          </a:prstGeom>
-          <a:noFill/>
-        </p:spPr>
-        <p:txBody>
-          <a:bodyPr wrap="square" anchor="ctr" lIns="0" rIns="0" tIns="0" bIns="0">
-            <a:spAutoFit/>
-          </a:bodyPr>
-          <a:lstStyle/>
-          <a:p>
-            <a:pPr algn="l">
-              <a:lnSpc>
-                <a:spcPct val="120000"/>
-              </a:lnSpc>
-            </a:pPr>
-            <a:r>
-              <a:rPr sz="819">
-                <a:solidFill>
-                  <a:srgbClr val="191919"/>
-                </a:solidFill>
-                <a:latin typeface="AvenirNext LT Pro Medium"/>
-              </a:rPr>
-              <a:t>LN₂ · 3-phase power + UPS · water · bake-out</a:t>
-            </a:r>
-          </a:p>
-        </p:txBody>
-      </p:sp>
-      <p:sp>
-        <p:nvSpPr>
-          <p:cNvPr id="32" name="TextBox 31"/>
-          <p:cNvSpPr txBox="1"/>
-          <p:nvPr/>
-        </p:nvSpPr>
-        <p:spPr>
-          <a:xfrm>
-            <a:off x="5669280" y="3218687"/>
-            <a:ext cx="1417320" cy="347472"/>
-          </a:xfrm>
-          <a:prstGeom prst="rect">
-            <a:avLst/>
-          </a:prstGeom>
-          <a:noFill/>
-        </p:spPr>
-        <p:txBody>
-          <a:bodyPr wrap="square" anchor="ctr" lIns="0" rIns="0" tIns="0" bIns="0">
-            <a:spAutoFit/>
-          </a:bodyPr>
-          <a:lstStyle/>
-          <a:p>
-            <a:pPr algn="l">
-              <a:lnSpc>
-                <a:spcPct val="120000"/>
-              </a:lnSpc>
-            </a:pPr>
-            <a:r>
-              <a:rPr sz="700">
-                <a:solidFill>
-                  <a:srgbClr val="666666"/>
-                </a:solidFill>
-                <a:latin typeface="Outfit"/>
-              </a:rPr>
-              <a:t>facility</a:t>
-            </a:r>
-          </a:p>
-        </p:txBody>
-      </p:sp>
-      <p:sp>
-        <p:nvSpPr>
-          <p:cNvPr id="33" name="TextBox 32"/>
-          <p:cNvSpPr txBox="1"/>
-          <p:nvPr/>
-        </p:nvSpPr>
-        <p:spPr>
-          <a:xfrm>
-            <a:off x="7178040" y="3218687"/>
-            <a:ext cx="1225296" cy="347472"/>
-          </a:xfrm>
-          <a:prstGeom prst="rect">
-            <a:avLst/>
-          </a:prstGeom>
-          <a:noFill/>
-        </p:spPr>
-        <p:txBody>
-          <a:bodyPr wrap="square" anchor="ctr" lIns="0" rIns="0" tIns="0" bIns="0">
-            <a:spAutoFit/>
-          </a:bodyPr>
-          <a:lstStyle/>
-          <a:p>
-            <a:pPr algn="r">
-              <a:lnSpc>
-                <a:spcPct val="120000"/>
-              </a:lnSpc>
-            </a:pPr>
-            <a:r>
-              <a:rPr sz="880">
-                <a:solidFill>
-                  <a:srgbClr val="191919"/>
-                </a:solidFill>
-                <a:latin typeface="AvenirNext LT Pro Medium"/>
-              </a:rPr>
-              <a:t>0.15–0.26</a:t>
-            </a:r>
-          </a:p>
-        </p:txBody>
-      </p:sp>
-      <p:sp>
-        <p:nvSpPr>
-          <p:cNvPr id="34" name="Rounded Rectangle 33"/>
-          <p:cNvSpPr/>
-          <p:nvPr/>
-        </p:nvSpPr>
-        <p:spPr>
-          <a:xfrm>
-            <a:off x="612648" y="3602735"/>
-            <a:ext cx="7918704" cy="347472"/>
-          </a:xfrm>
-          <a:prstGeom prst="roundRect">
-            <a:avLst>
-              <a:gd name="adj" fmla="val 16000"/>
-            </a:avLst>
-          </a:prstGeom>
-          <a:solidFill>
-            <a:srgbClr val="F5F5F5"/>
-          </a:solidFill>
-          <a:ln>
-            <a:noFill/>
-          </a:ln>
-          <a:effectLst/>
-        </p:spPr>
-        <p:style>
-          <a:lnRef idx="1">
-            <a:schemeClr val="accent1"/>
-          </a:lnRef>
-          <a:fillRef idx="3">
-            <a:schemeClr val="accent1"/>
-          </a:fillRef>
-          <a:effectRef idx="2">
-            <a:schemeClr val="accent1"/>
-          </a:effectRef>
-          <a:fontRef idx="minor">
-            <a:schemeClr val="lt1"/>
-          </a:fontRef>
-        </p:style>
-        <p:txBody>
-          <a:bodyPr rtlCol="0" anchor="ctr"/>
-          <a:lstStyle/>
-          <a:p>
-            <a:pPr algn="ctr"/>
-          </a:p>
-        </p:txBody>
-      </p:sp>
-      <p:sp>
-        <p:nvSpPr>
-          <p:cNvPr id="35" name="Oval 34"/>
-          <p:cNvSpPr/>
-          <p:nvPr/>
-        </p:nvSpPr>
-        <p:spPr>
-          <a:xfrm>
-            <a:off x="740664" y="3648455"/>
-            <a:ext cx="256032" cy="256032"/>
-          </a:xfrm>
-          <a:prstGeom prst="ellipse">
-            <a:avLst/>
-          </a:prstGeom>
-          <a:solidFill>
-            <a:srgbClr val="00B388"/>
-          </a:solidFill>
-          <a:ln>
-            <a:noFill/>
-          </a:ln>
-          <a:effectLst/>
-        </p:spPr>
-        <p:style>
-          <a:lnRef idx="1">
-            <a:schemeClr val="accent1"/>
-          </a:lnRef>
-          <a:fillRef idx="3">
-            <a:schemeClr val="accent1"/>
-          </a:fillRef>
-          <a:effectRef idx="2">
-            <a:schemeClr val="accent1"/>
-          </a:effectRef>
-          <a:fontRef idx="minor">
-            <a:schemeClr val="lt1"/>
-          </a:fontRef>
-        </p:style>
-        <p:txBody>
-          <a:bodyPr rtlCol="0" anchor="ctr" lIns="0" rIns="0" tIns="0" bIns="0"/>
-          <a:lstStyle/>
-          <a:p>
-            <a:pPr algn="ctr"/>
-            <a:r>
-              <a:rPr sz="800">
-                <a:solidFill>
-                  <a:srgbClr val="FFFFFF"/>
-                </a:solidFill>
-                <a:latin typeface="AvenirNext LT Pro Medium"/>
-              </a:rPr>
-              <a:t>07</a:t>
-            </a:r>
-          </a:p>
-        </p:txBody>
-      </p:sp>
-      <p:sp>
-        <p:nvSpPr>
-          <p:cNvPr id="36" name="TextBox 35"/>
-          <p:cNvSpPr txBox="1"/>
-          <p:nvPr/>
-        </p:nvSpPr>
-        <p:spPr>
-          <a:xfrm>
-            <a:off x="1143000" y="3602735"/>
-            <a:ext cx="4434840" cy="347472"/>
-          </a:xfrm>
-          <a:prstGeom prst="rect">
-            <a:avLst/>
-          </a:prstGeom>
-          <a:noFill/>
-        </p:spPr>
-        <p:txBody>
-          <a:bodyPr wrap="square" anchor="ctr" lIns="0" rIns="0" tIns="0" bIns="0">
-            <a:spAutoFit/>
-          </a:bodyPr>
-          <a:lstStyle/>
-          <a:p>
-            <a:pPr algn="l">
-              <a:lnSpc>
-                <a:spcPct val="120000"/>
-              </a:lnSpc>
-            </a:pPr>
-            <a:r>
-              <a:rPr sz="819">
-                <a:solidFill>
-                  <a:srgbClr val="191919"/>
-                </a:solidFill>
-                <a:latin typeface="AvenirNext LT Pro Medium"/>
-              </a:rPr>
-              <a:t>Leak-chase · calibration · spares</a:t>
-            </a:r>
-          </a:p>
-        </p:txBody>
-      </p:sp>
-      <p:sp>
-        <p:nvSpPr>
-          <p:cNvPr id="37" name="TextBox 36"/>
-          <p:cNvSpPr txBox="1"/>
-          <p:nvPr/>
-        </p:nvSpPr>
-        <p:spPr>
-          <a:xfrm>
-            <a:off x="5669280" y="3602735"/>
-            <a:ext cx="1417320" cy="347472"/>
-          </a:xfrm>
-          <a:prstGeom prst="rect">
-            <a:avLst/>
-          </a:prstGeom>
-          <a:noFill/>
-        </p:spPr>
-        <p:txBody>
-          <a:bodyPr wrap="square" anchor="ctr" lIns="0" rIns="0" tIns="0" bIns="0">
-            <a:spAutoFit/>
-          </a:bodyPr>
-          <a:lstStyle/>
-          <a:p>
-            <a:pPr algn="l">
-              <a:lnSpc>
-                <a:spcPct val="120000"/>
-              </a:lnSpc>
-            </a:pPr>
-            <a:r>
-              <a:rPr sz="700">
-                <a:solidFill>
-                  <a:srgbClr val="666666"/>
-                </a:solidFill>
-                <a:latin typeface="Outfit"/>
-              </a:rPr>
-              <a:t>install + contingency</a:t>
-            </a:r>
-          </a:p>
-        </p:txBody>
-      </p:sp>
-      <p:sp>
-        <p:nvSpPr>
-          <p:cNvPr id="38" name="TextBox 37"/>
-          <p:cNvSpPr txBox="1"/>
-          <p:nvPr/>
-        </p:nvSpPr>
-        <p:spPr>
-          <a:xfrm>
-            <a:off x="7178040" y="3602735"/>
-            <a:ext cx="1225296" cy="347472"/>
-          </a:xfrm>
-          <a:prstGeom prst="rect">
-            <a:avLst/>
-          </a:prstGeom>
-          <a:noFill/>
-        </p:spPr>
-        <p:txBody>
-          <a:bodyPr wrap="square" anchor="ctr" lIns="0" rIns="0" tIns="0" bIns="0">
-            <a:spAutoFit/>
-          </a:bodyPr>
-          <a:lstStyle/>
-          <a:p>
-            <a:pPr algn="r">
-              <a:lnSpc>
-                <a:spcPct val="120000"/>
-              </a:lnSpc>
-            </a:pPr>
-            <a:r>
-              <a:rPr sz="880">
-                <a:solidFill>
-                  <a:srgbClr val="191919"/>
-                </a:solidFill>
-                <a:latin typeface="AvenirNext LT Pro Medium"/>
-              </a:rPr>
-              <a:t>0.10–0.25</a:t>
-            </a:r>
-          </a:p>
-        </p:txBody>
-      </p:sp>
-      <p:sp>
-        <p:nvSpPr>
-          <p:cNvPr id="39" name="TextBox 38"/>
-          <p:cNvSpPr txBox="1"/>
-          <p:nvPr/>
-        </p:nvSpPr>
-        <p:spPr>
-          <a:xfrm>
-            <a:off x="7178040" y="1115568"/>
-            <a:ext cx="1225296" cy="164592"/>
-          </a:xfrm>
-          <a:prstGeom prst="rect">
-            <a:avLst/>
-          </a:prstGeom>
-          <a:noFill/>
-        </p:spPr>
-        <p:txBody>
-          <a:bodyPr wrap="square" anchor="t" lIns="0" rIns="0" tIns="0" bIns="0">
-            <a:spAutoFit/>
-          </a:bodyPr>
-          <a:lstStyle/>
-          <a:p>
-            <a:pPr algn="r">
-              <a:lnSpc>
-                <a:spcPct val="120000"/>
-              </a:lnSpc>
-            </a:pPr>
-            <a:r>
-              <a:rPr sz="700" spc="60">
-                <a:solidFill>
-                  <a:srgbClr val="666666"/>
-                </a:solidFill>
-                <a:latin typeface="AvenirNext LT Pro Medium"/>
-              </a:rPr>
-              <a:t>US$M</a:t>
-            </a:r>
-          </a:p>
-        </p:txBody>
-      </p:sp>
-      <p:sp>
-        <p:nvSpPr>
-          <p:cNvPr id="40" name="Rounded Rectangle 39"/>
-          <p:cNvSpPr/>
-          <p:nvPr/>
-        </p:nvSpPr>
-        <p:spPr>
-          <a:xfrm>
-            <a:off x="612648" y="4023359"/>
-            <a:ext cx="7918704" cy="438912"/>
-          </a:xfrm>
-          <a:prstGeom prst="roundRect">
-            <a:avLst>
-              <a:gd name="adj" fmla="val 18000"/>
-            </a:avLst>
-          </a:prstGeom>
-          <a:solidFill>
-            <a:srgbClr val="191919"/>
-          </a:solidFill>
-          <a:ln>
-            <a:noFill/>
-          </a:ln>
-          <a:effectLst/>
-        </p:spPr>
-        <p:style>
-          <a:lnRef idx="1">
-            <a:schemeClr val="accent1"/>
-          </a:lnRef>
-          <a:fillRef idx="3">
-            <a:schemeClr val="accent1"/>
-          </a:fillRef>
-          <a:effectRef idx="2">
-            <a:schemeClr val="accent1"/>
-          </a:effectRef>
-          <a:fontRef idx="minor">
-            <a:schemeClr val="lt1"/>
-          </a:fontRef>
-        </p:style>
-        <p:txBody>
-          <a:bodyPr rtlCol="0" anchor="ctr"/>
-          <a:lstStyle/>
-          <a:p>
-            <a:pPr algn="ctr"/>
-          </a:p>
-        </p:txBody>
-      </p:sp>
-      <p:sp>
-        <p:nvSpPr>
-          <p:cNvPr id="41" name="TextBox 40"/>
-          <p:cNvSpPr txBox="1"/>
-          <p:nvPr/>
-        </p:nvSpPr>
-        <p:spPr>
-          <a:xfrm>
-            <a:off x="841248" y="4023359"/>
-            <a:ext cx="1005840" cy="438912"/>
-          </a:xfrm>
-          <a:prstGeom prst="rect">
-            <a:avLst/>
-          </a:prstGeom>
-          <a:noFill/>
-        </p:spPr>
-        <p:txBody>
-          <a:bodyPr wrap="square" anchor="ctr" lIns="0" rIns="0" tIns="0" bIns="0">
-            <a:spAutoFit/>
-          </a:bodyPr>
-          <a:lstStyle/>
-          <a:p>
-            <a:pPr algn="l">
-              <a:lnSpc>
-                <a:spcPct val="120000"/>
-              </a:lnSpc>
-            </a:pPr>
-            <a:r>
-              <a:rPr sz="750" spc="60">
-                <a:solidFill>
-                  <a:srgbClr val="00B388"/>
-                </a:solidFill>
-                <a:latin typeface="AvenirNext LT Pro Medium"/>
-              </a:rPr>
-              <a:t>TOTAL</a:t>
-            </a:r>
-          </a:p>
-        </p:txBody>
-      </p:sp>
-      <p:sp>
-        <p:nvSpPr>
-          <p:cNvPr id="42" name="TextBox 41"/>
-          <p:cNvSpPr txBox="1"/>
-          <p:nvPr/>
-        </p:nvSpPr>
-        <p:spPr>
-          <a:xfrm>
-            <a:off x="1920240" y="4023359"/>
-            <a:ext cx="6400800" cy="438912"/>
-          </a:xfrm>
-          <a:prstGeom prst="rect">
-            <a:avLst/>
-          </a:prstGeom>
-          <a:noFill/>
-        </p:spPr>
-        <p:txBody>
-          <a:bodyPr wrap="square" anchor="ctr" lIns="0" rIns="0" tIns="0" bIns="0">
-            <a:spAutoFit/>
-          </a:bodyPr>
-          <a:lstStyle/>
-          <a:p>
-            <a:pPr algn="l">
-              <a:lnSpc>
-                <a:spcPct val="120000"/>
-              </a:lnSpc>
-            </a:pPr>
-            <a:r>
-              <a:rPr sz="950">
-                <a:solidFill>
-                  <a:srgbClr val="FFFFFF"/>
-                </a:solidFill>
-                <a:latin typeface="AvenirNext LT Pro Medium"/>
-              </a:rPr>
-              <a:t>US$1.0–1.6M</a:t>
-            </a:r>
-            <a:r>
-              <a:rPr sz="800">
-                <a:solidFill>
-                  <a:srgbClr val="FFFFFF"/>
-                </a:solidFill>
-                <a:latin typeface="AvenirNext LT Pro Medium"/>
-              </a:rPr>
-              <a:t>    ·    run cost ~US$60–120k / yr</a:t>
-            </a:r>
-          </a:p>
-        </p:txBody>
-      </p:sp>
-      <p:sp>
-        <p:nvSpPr>
-          <p:cNvPr id="43" name="TextBox 42"/>
-          <p:cNvSpPr txBox="1"/>
-          <p:nvPr/>
-        </p:nvSpPr>
-        <p:spPr>
-          <a:xfrm>
-            <a:off x="612648" y="4498848"/>
-            <a:ext cx="7918704" cy="109728"/>
-          </a:xfrm>
-          <a:prstGeom prst="rect">
-            <a:avLst/>
-          </a:prstGeom>
-          <a:noFill/>
-        </p:spPr>
-        <p:txBody>
-          <a:bodyPr wrap="square" anchor="t" lIns="0" rIns="0" tIns="0" bIns="0">
-            <a:spAutoFit/>
-          </a:bodyPr>
-          <a:lstStyle/>
-          <a:p>
-            <a:pPr algn="l">
-              <a:lnSpc>
-                <a:spcPct val="120000"/>
-              </a:lnSpc>
-            </a:pPr>
-            <a:r>
-              <a:rPr sz="680">
-                <a:solidFill>
-                  <a:srgbClr val="666666"/>
-                </a:solidFill>
-                <a:latin typeface="Outfit"/>
-              </a:rPr>
-              <a:t>SAG mask patterning (cleanroom access or service) and ex-situ metrology are not budgeted here.</a:t>
+              <a:t>SiO₂ / Ti deposition · litho · etch — for SAG wafers</a:t>
             </a:r>
           </a:p>
         </p:txBody>
@@ -24304,8 +23721,14 @@
                 </a:solidFill>
                 <a:latin typeface="AvenirNext LT Pro Light"/>
               </a:rPr>
-              <a:t>Three risks we manage from day one</a:t>
-            </a:r>
+              <a:t>Cost Estimate</a:t>
+            </a:r>
+            <a:endParaRPr sz="2200" spc="20" dirty="0">
+              <a:solidFill>
+                <a:srgbClr val="00B388"/>
+              </a:solidFill>
+              <a:latin typeface="AvenirNext LT Pro Light"/>
+            </a:endParaRPr>
           </a:p>
         </p:txBody>
       </p:sp>
@@ -24331,7 +23754,7 @@
                 </a:solidFill>
                 <a:latin typeface="AvenirNext LT Pro Medium"/>
               </a:rPr>
-              <a:t>NITRIDE MBE PROPOSAL · RISKS</a:t>
+              <a:t>NITRIDE MBE PROPOSAL · BUDGET</a:t>
             </a:r>
           </a:p>
         </p:txBody>
@@ -24344,12 +23767,12 @@
         </p:nvSpPr>
         <p:spPr>
           <a:xfrm>
-            <a:off x="612648" y="1389888"/>
-            <a:ext cx="2514600" cy="3090672"/>
+            <a:off x="612648" y="1298448"/>
+            <a:ext cx="7918704" cy="347472"/>
           </a:xfrm>
           <a:prstGeom prst="roundRect">
             <a:avLst>
-              <a:gd name="adj" fmla="val 5500"/>
+              <a:gd name="adj" fmla="val 16000"/>
             </a:avLst>
           </a:prstGeom>
           <a:solidFill>
@@ -24391,8 +23814,8 @@
         </p:nvSpPr>
         <p:spPr>
           <a:xfrm>
-            <a:off x="740664" y="1517904"/>
-            <a:ext cx="274320" cy="274320"/>
+            <a:off x="740664" y="1344168"/>
+            <a:ext cx="256032" cy="256032"/>
           </a:xfrm>
           <a:prstGeom prst="ellipse">
             <a:avLst/>
@@ -24425,7 +23848,7 @@
           <a:p>
             <a:pPr algn="ctr"/>
             <a:r>
-              <a:rPr sz="900">
+              <a:rPr sz="800">
                 <a:solidFill>
                   <a:srgbClr val="FFFFFF"/>
                 </a:solidFill>
@@ -24444,8 +23867,8 @@
         </p:nvSpPr>
         <p:spPr>
           <a:xfrm>
-            <a:off x="1124712" y="1554480"/>
-            <a:ext cx="1856232" cy="228600"/>
+            <a:off x="1143000" y="1298448"/>
+            <a:ext cx="4434840" cy="347472"/>
           </a:xfrm>
           <a:prstGeom prst="rect">
             <a:avLst/>
@@ -24453,7 +23876,7 @@
           <a:noFill/>
         </p:spPr>
         <p:txBody>
-          <a:bodyPr wrap="square" lIns="0" tIns="0" rIns="0" bIns="0" anchor="t">
+          <a:bodyPr wrap="square" lIns="0" tIns="0" rIns="0" bIns="0" anchor="ctr">
             <a:spAutoFit/>
           </a:bodyPr>
           <a:lstStyle/>
@@ -24464,13 +23887,13 @@
               </a:lnSpc>
             </a:pPr>
             <a:r>
-              <a:rPr sz="1000">
+              <a:rPr sz="819">
                 <a:solidFill>
                   <a:srgbClr val="191919"/>
                 </a:solidFill>
                 <a:latin typeface="AvenirNext LT Pro Medium"/>
               </a:rPr>
-              <a:t>Export control</a:t>
+              <a:t>GEN II / Riber 32 class, refurbished</a:t>
             </a:r>
           </a:p>
         </p:txBody>
@@ -24483,8 +23906,8 @@
         </p:nvSpPr>
         <p:spPr>
           <a:xfrm>
-            <a:off x="740664" y="1956816"/>
-            <a:ext cx="2240280" cy="1417320"/>
+            <a:off x="5669280" y="1298448"/>
+            <a:ext cx="1417320" cy="347472"/>
           </a:xfrm>
           <a:prstGeom prst="rect">
             <a:avLst/>
@@ -24492,46 +23915,7 @@
           <a:noFill/>
         </p:spPr>
         <p:txBody>
-          <a:bodyPr wrap="square" lIns="0" tIns="0" rIns="0" bIns="0" anchor="t">
-            <a:spAutoFit/>
-          </a:bodyPr>
-          <a:lstStyle/>
-          <a:p>
-            <a:pPr algn="l">
-              <a:lnSpc>
-                <a:spcPct val="118000"/>
-              </a:lnSpc>
-            </a:pPr>
-            <a:r>
-              <a:rPr sz="720">
-                <a:solidFill>
-                  <a:srgbClr val="191919"/>
-                </a:solidFill>
-                <a:latin typeface="Outfit"/>
-              </a:rPr>
-              <a:t>MBE growth equipment is a listed strategic commodity — a Hong Kong import licence (3B001(a)(3)) is required whatever the origin. US-origin parts additionally need a BIS licence, since the US has treated HK as mainland China since Dec 2020, and approval is not assured.</a:t>
-            </a:r>
-          </a:p>
-        </p:txBody>
-      </p:sp>
-      <p:sp>
-        <p:nvSpPr>
-          <p:cNvPr id="8" name="TextBox 7"/>
-          <p:cNvSpPr txBox="1"/>
-          <p:nvPr/>
-        </p:nvSpPr>
-        <p:spPr>
-          <a:xfrm>
-            <a:off x="740664" y="3438144"/>
-            <a:ext cx="2240280" cy="164592"/>
-          </a:xfrm>
-          <a:prstGeom prst="rect">
-            <a:avLst/>
-          </a:prstGeom>
-          <a:noFill/>
-        </p:spPr>
-        <p:txBody>
-          <a:bodyPr wrap="square" lIns="0" tIns="0" rIns="0" bIns="0" anchor="t">
+          <a:bodyPr wrap="square" lIns="0" tIns="0" rIns="0" bIns="0" anchor="ctr">
             <a:spAutoFit/>
           </a:bodyPr>
           <a:lstStyle/>
@@ -24542,27 +23926,27 @@
               </a:lnSpc>
             </a:pPr>
             <a:r>
-              <a:rPr sz="700" spc="60">
-                <a:solidFill>
-                  <a:srgbClr val="00B388"/>
-                </a:solidFill>
-                <a:latin typeface="AvenirNext LT Pro Medium"/>
+              <a:rPr sz="700">
+                <a:solidFill>
+                  <a:srgbClr val="666666"/>
+                </a:solidFill>
+                <a:latin typeface="Outfit"/>
               </a:rPr>
-              <a:t>MITIGATION</a:t>
-            </a:r>
-          </a:p>
-        </p:txBody>
-      </p:sp>
-      <p:sp>
-        <p:nvSpPr>
-          <p:cNvPr id="9" name="TextBox 8"/>
+              <a:t>used chassis</a:t>
+            </a:r>
+          </a:p>
+        </p:txBody>
+      </p:sp>
+      <p:sp>
+        <p:nvSpPr>
+          <p:cNvPr id="8" name="TextBox 7"/>
           <p:cNvSpPr txBox="1"/>
           <p:nvPr/>
         </p:nvSpPr>
         <p:spPr>
           <a:xfrm>
-            <a:off x="740664" y="3639312"/>
-            <a:ext cx="2240280" cy="777240"/>
+            <a:off x="7178040" y="1298448"/>
+            <a:ext cx="1225296" cy="347472"/>
           </a:xfrm>
           <a:prstGeom prst="rect">
             <a:avLst/>
@@ -24570,42 +23954,42 @@
           <a:noFill/>
         </p:spPr>
         <p:txBody>
-          <a:bodyPr wrap="square" lIns="0" tIns="0" rIns="0" bIns="0" anchor="t">
+          <a:bodyPr wrap="square" lIns="0" tIns="0" rIns="0" bIns="0" anchor="ctr">
             <a:spAutoFit/>
           </a:bodyPr>
           <a:lstStyle/>
           <a:p>
-            <a:pPr algn="l">
+            <a:pPr algn="r">
               <a:lnSpc>
-                <a:spcPct val="118000"/>
+                <a:spcPct val="120000"/>
               </a:lnSpc>
             </a:pPr>
             <a:r>
-              <a:rPr sz="700">
-                <a:solidFill>
-                  <a:srgbClr val="666666"/>
-                </a:solidFill>
-                <a:latin typeface="Outfit"/>
+              <a:rPr sz="880">
+                <a:solidFill>
+                  <a:srgbClr val="191919"/>
+                </a:solidFill>
+                <a:latin typeface="AvenirNext LT Pro Medium"/>
               </a:rPr>
-              <a:t>classify every candidate part's ECCN before any PO; prefer EU sources (Riber, MBE-Komponenten, STAIB) or domestic builders as fallback; licence path confirmed = go / no-go gate P0</a:t>
-            </a:r>
-          </a:p>
-        </p:txBody>
-      </p:sp>
-      <p:sp>
-        <p:nvSpPr>
-          <p:cNvPr id="10" name="Rounded Rectangle 9"/>
+              <a:t>0.20–0.50</a:t>
+            </a:r>
+          </a:p>
+        </p:txBody>
+      </p:sp>
+      <p:sp>
+        <p:nvSpPr>
+          <p:cNvPr id="9" name="Rounded Rectangle 8"/>
           <p:cNvSpPr/>
           <p:nvPr/>
         </p:nvSpPr>
         <p:spPr>
           <a:xfrm>
-            <a:off x="3310128" y="1389888"/>
-            <a:ext cx="2514600" cy="3090672"/>
+            <a:off x="612648" y="1682495"/>
+            <a:ext cx="7918704" cy="347472"/>
           </a:xfrm>
           <a:prstGeom prst="roundRect">
             <a:avLst>
-              <a:gd name="adj" fmla="val 5500"/>
+              <a:gd name="adj" fmla="val 16000"/>
             </a:avLst>
           </a:prstGeom>
           <a:solidFill>
@@ -24641,14 +24025,14 @@
       </p:sp>
       <p:sp>
         <p:nvSpPr>
-          <p:cNvPr id="11" name="Oval 10"/>
+          <p:cNvPr id="10" name="Oval 9"/>
           <p:cNvSpPr/>
           <p:nvPr/>
         </p:nvSpPr>
         <p:spPr>
           <a:xfrm>
-            <a:off x="3438144" y="1517904"/>
-            <a:ext cx="274320" cy="274320"/>
+            <a:off x="740664" y="1728216"/>
+            <a:ext cx="256032" cy="256032"/>
           </a:xfrm>
           <a:prstGeom prst="ellipse">
             <a:avLst/>
@@ -24681,7 +24065,7 @@
           <a:p>
             <a:pPr algn="ctr"/>
             <a:r>
-              <a:rPr sz="900">
+              <a:rPr sz="800">
                 <a:solidFill>
                   <a:srgbClr val="FFFFFF"/>
                 </a:solidFill>
@@ -24694,14 +24078,14 @@
       </p:sp>
       <p:sp>
         <p:nvSpPr>
-          <p:cNvPr id="12" name="TextBox 11"/>
+          <p:cNvPr id="11" name="TextBox 10"/>
           <p:cNvSpPr txBox="1"/>
           <p:nvPr/>
         </p:nvSpPr>
         <p:spPr>
           <a:xfrm>
-            <a:off x="3822191" y="1554480"/>
-            <a:ext cx="1856232" cy="228600"/>
+            <a:off x="1143000" y="1682495"/>
+            <a:ext cx="4434840" cy="347472"/>
           </a:xfrm>
           <a:prstGeom prst="rect">
             <a:avLst/>
@@ -24709,7 +24093,7 @@
           <a:noFill/>
         </p:spPr>
         <p:txBody>
-          <a:bodyPr wrap="square" lIns="0" tIns="0" rIns="0" bIns="0" anchor="t">
+          <a:bodyPr wrap="square" lIns="0" tIns="0" rIns="0" bIns="0" anchor="ctr">
             <a:spAutoFit/>
           </a:bodyPr>
           <a:lstStyle/>
@@ -24720,27 +24104,27 @@
               </a:lnSpc>
             </a:pPr>
             <a:r>
-              <a:rPr sz="1000">
+              <a:rPr sz="819">
                 <a:solidFill>
                   <a:srgbClr val="191919"/>
                 </a:solidFill>
                 <a:latin typeface="AvenirNext LT Pro Medium"/>
               </a:rPr>
-              <a:t>Temperature spec</a:t>
-            </a:r>
-          </a:p>
-        </p:txBody>
-      </p:sp>
-      <p:sp>
-        <p:nvSpPr>
-          <p:cNvPr id="13" name="TextBox 12"/>
+              <a:t>Plasma source · 1200 °C manipulator · effusion cells</a:t>
+            </a:r>
+          </a:p>
+        </p:txBody>
+      </p:sp>
+      <p:sp>
+        <p:nvSpPr>
+          <p:cNvPr id="12" name="TextBox 11"/>
           <p:cNvSpPr txBox="1"/>
           <p:nvPr/>
         </p:nvSpPr>
         <p:spPr>
           <a:xfrm>
-            <a:off x="3438144" y="1956816"/>
-            <a:ext cx="2240280" cy="1417320"/>
+            <a:off x="5669280" y="1682495"/>
+            <a:ext cx="1417320" cy="347472"/>
           </a:xfrm>
           <a:prstGeom prst="rect">
             <a:avLst/>
@@ -24748,46 +24132,7 @@
           <a:noFill/>
         </p:spPr>
         <p:txBody>
-          <a:bodyPr wrap="square" lIns="0" tIns="0" rIns="0" bIns="0" anchor="t">
-            <a:spAutoFit/>
-          </a:bodyPr>
-          <a:lstStyle/>
-          <a:p>
-            <a:pPr algn="l">
-              <a:lnSpc>
-                <a:spcPct val="118000"/>
-              </a:lnSpc>
-            </a:pPr>
-            <a:r>
-              <a:rPr sz="720">
-                <a:solidFill>
-                  <a:srgbClr val="191919"/>
-                </a:solidFill>
-                <a:latin typeface="Outfit"/>
-              </a:rPr>
-              <a:t>Selective-area growth only turns on above ~930–940 °C on-wafer, and AlN wants more. Used chassis come with ~900 °C GaAs manipulators — unusable — and retrofitting later means re-opening the chamber. Heater filaments also degrade in nitrogen plasma.</a:t>
-            </a:r>
-          </a:p>
-        </p:txBody>
-      </p:sp>
-      <p:sp>
-        <p:nvSpPr>
-          <p:cNvPr id="14" name="TextBox 13"/>
-          <p:cNvSpPr txBox="1"/>
-          <p:nvPr/>
-        </p:nvSpPr>
-        <p:spPr>
-          <a:xfrm>
-            <a:off x="3438144" y="3438144"/>
-            <a:ext cx="2240280" cy="164592"/>
-          </a:xfrm>
-          <a:prstGeom prst="rect">
-            <a:avLst/>
-          </a:prstGeom>
-          <a:noFill/>
-        </p:spPr>
-        <p:txBody>
-          <a:bodyPr wrap="square" lIns="0" tIns="0" rIns="0" bIns="0" anchor="t">
+          <a:bodyPr wrap="square" lIns="0" tIns="0" rIns="0" bIns="0" anchor="ctr">
             <a:spAutoFit/>
           </a:bodyPr>
           <a:lstStyle/>
@@ -24798,27 +24143,27 @@
               </a:lnSpc>
             </a:pPr>
             <a:r>
-              <a:rPr sz="700" spc="60">
-                <a:solidFill>
-                  <a:srgbClr val="00B388"/>
-                </a:solidFill>
-                <a:latin typeface="AvenirNext LT Pro Medium"/>
+              <a:rPr sz="700">
+                <a:solidFill>
+                  <a:srgbClr val="666666"/>
+                </a:solidFill>
+                <a:latin typeface="Outfit"/>
               </a:rPr>
-              <a:t>MITIGATION</a:t>
-            </a:r>
-          </a:p>
-        </p:txBody>
-      </p:sp>
-      <p:sp>
-        <p:nvSpPr>
-          <p:cNvPr id="15" name="TextBox 14"/>
+              <a:t>nitride core</a:t>
+            </a:r>
+          </a:p>
+        </p:txBody>
+      </p:sp>
+      <p:sp>
+        <p:nvSpPr>
+          <p:cNvPr id="13" name="TextBox 12"/>
           <p:cNvSpPr txBox="1"/>
           <p:nvPr/>
         </p:nvSpPr>
         <p:spPr>
           <a:xfrm>
-            <a:off x="3438144" y="3639312"/>
-            <a:ext cx="2240280" cy="777240"/>
+            <a:off x="7178040" y="1682495"/>
+            <a:ext cx="1225296" cy="347472"/>
           </a:xfrm>
           <a:prstGeom prst="rect">
             <a:avLst/>
@@ -24826,42 +24171,42 @@
           <a:noFill/>
         </p:spPr>
         <p:txBody>
-          <a:bodyPr wrap="square" lIns="0" tIns="0" rIns="0" bIns="0" anchor="t">
+          <a:bodyPr wrap="square" lIns="0" tIns="0" rIns="0" bIns="0" anchor="ctr">
             <a:spAutoFit/>
           </a:bodyPr>
           <a:lstStyle/>
           <a:p>
-            <a:pPr algn="l">
+            <a:pPr algn="r">
               <a:lnSpc>
-                <a:spcPct val="118000"/>
+                <a:spcPct val="120000"/>
               </a:lnSpc>
             </a:pPr>
             <a:r>
-              <a:rPr sz="700">
-                <a:solidFill>
-                  <a:srgbClr val="666666"/>
-                </a:solidFill>
-                <a:latin typeface="Outfit"/>
+              <a:rPr sz="880">
+                <a:solidFill>
+                  <a:srgbClr val="191919"/>
+                </a:solidFill>
+                <a:latin typeface="AvenirNext LT Pro Medium"/>
               </a:rPr>
-              <a:t>order the 1200 °C manipulator as the first long-lead item; specify a W or PBN/PG heater for the N-plasma environment; treat filaments as consumables and stock spares</a:t>
-            </a:r>
-          </a:p>
-        </p:txBody>
-      </p:sp>
-      <p:sp>
-        <p:nvSpPr>
-          <p:cNvPr id="16" name="Rounded Rectangle 15"/>
+              <a:t>0.21–0.42</a:t>
+            </a:r>
+          </a:p>
+        </p:txBody>
+      </p:sp>
+      <p:sp>
+        <p:nvSpPr>
+          <p:cNvPr id="14" name="Rounded Rectangle 13"/>
           <p:cNvSpPr/>
           <p:nvPr/>
         </p:nvSpPr>
         <p:spPr>
           <a:xfrm>
-            <a:off x="6007608" y="1389888"/>
-            <a:ext cx="2514600" cy="3090672"/>
+            <a:off x="612648" y="2066543"/>
+            <a:ext cx="7918704" cy="347472"/>
           </a:xfrm>
           <a:prstGeom prst="roundRect">
             <a:avLst>
-              <a:gd name="adj" fmla="val 5500"/>
+              <a:gd name="adj" fmla="val 16000"/>
             </a:avLst>
           </a:prstGeom>
           <a:solidFill>
@@ -24897,14 +24242,14 @@
       </p:sp>
       <p:sp>
         <p:nvSpPr>
-          <p:cNvPr id="17" name="Oval 16"/>
+          <p:cNvPr id="15" name="Oval 14"/>
           <p:cNvSpPr/>
           <p:nvPr/>
         </p:nvSpPr>
         <p:spPr>
           <a:xfrm>
-            <a:off x="6135624" y="1517904"/>
-            <a:ext cx="274320" cy="274320"/>
+            <a:off x="740664" y="2112263"/>
+            <a:ext cx="256032" cy="256032"/>
           </a:xfrm>
           <a:prstGeom prst="ellipse">
             <a:avLst/>
@@ -24937,7 +24282,7 @@
           <a:p>
             <a:pPr algn="ctr"/>
             <a:r>
-              <a:rPr sz="900">
+              <a:rPr sz="800">
                 <a:solidFill>
                   <a:srgbClr val="FFFFFF"/>
                 </a:solidFill>
@@ -24950,14 +24295,14 @@
       </p:sp>
       <p:sp>
         <p:nvSpPr>
-          <p:cNvPr id="18" name="TextBox 17"/>
+          <p:cNvPr id="16" name="TextBox 15"/>
           <p:cNvSpPr txBox="1"/>
           <p:nvPr/>
         </p:nvSpPr>
         <p:spPr>
           <a:xfrm>
-            <a:off x="6519672" y="1554480"/>
-            <a:ext cx="1856232" cy="228600"/>
+            <a:off x="1143000" y="2066543"/>
+            <a:ext cx="4434840" cy="347472"/>
           </a:xfrm>
           <a:prstGeom prst="rect">
             <a:avLst/>
@@ -24965,7 +24310,7 @@
           <a:noFill/>
         </p:spPr>
         <p:txBody>
-          <a:bodyPr wrap="square" lIns="0" tIns="0" rIns="0" bIns="0" anchor="t">
+          <a:bodyPr wrap="square" lIns="0" tIns="0" rIns="0" bIns="0" anchor="ctr">
             <a:spAutoFit/>
           </a:bodyPr>
           <a:lstStyle/>
@@ -24976,27 +24321,27 @@
               </a:lnSpc>
             </a:pPr>
             <a:r>
-              <a:rPr sz="1000">
+              <a:rPr sz="819">
                 <a:solidFill>
                   <a:srgbClr val="191919"/>
                 </a:solidFill>
                 <a:latin typeface="AvenirNext LT Pro Medium"/>
               </a:rPr>
-              <a:t>N₂ gas load</a:t>
-            </a:r>
-          </a:p>
-        </p:txBody>
-      </p:sp>
-      <p:sp>
-        <p:nvSpPr>
-          <p:cNvPr id="19" name="TextBox 18"/>
+              <a:t>Maglev turbo · RHEED 30 keV · band-edge pyrometry · RGA</a:t>
+            </a:r>
+          </a:p>
+        </p:txBody>
+      </p:sp>
+      <p:sp>
+        <p:nvSpPr>
+          <p:cNvPr id="17" name="TextBox 16"/>
           <p:cNvSpPr txBox="1"/>
           <p:nvPr/>
         </p:nvSpPr>
         <p:spPr>
           <a:xfrm>
-            <a:off x="6135624" y="1956816"/>
-            <a:ext cx="2240280" cy="1417320"/>
+            <a:off x="5669280" y="2066543"/>
+            <a:ext cx="1417320" cy="347472"/>
           </a:xfrm>
           <a:prstGeom prst="rect">
             <a:avLst/>
@@ -25004,46 +24349,7 @@
           <a:noFill/>
         </p:spPr>
         <p:txBody>
-          <a:bodyPr wrap="square" lIns="0" tIns="0" rIns="0" bIns="0" anchor="t">
-            <a:spAutoFit/>
-          </a:bodyPr>
-          <a:lstStyle/>
-          <a:p>
-            <a:pPr algn="l">
-              <a:lnSpc>
-                <a:spcPct val="118000"/>
-              </a:lnSpc>
-            </a:pPr>
-            <a:r>
-              <a:rPr sz="720">
-                <a:solidFill>
-                  <a:srgbClr val="191919"/>
-                </a:solidFill>
-                <a:latin typeface="Outfit"/>
-              </a:rPr>
-              <a:t>Nitride growth runs at ~10⁻⁵ Torr of continuous N₂. Ion pumps saturate and cryopumps need constant regeneration at this load — a mis-sized vacuum stack is usually discovered only at first plasma, after the rebuild is finished.</a:t>
-            </a:r>
-          </a:p>
-        </p:txBody>
-      </p:sp>
-      <p:sp>
-        <p:nvSpPr>
-          <p:cNvPr id="20" name="TextBox 19"/>
-          <p:cNvSpPr txBox="1"/>
-          <p:nvPr/>
-        </p:nvSpPr>
-        <p:spPr>
-          <a:xfrm>
-            <a:off x="6135624" y="3438144"/>
-            <a:ext cx="2240280" cy="164592"/>
-          </a:xfrm>
-          <a:prstGeom prst="rect">
-            <a:avLst/>
-          </a:prstGeom>
-          <a:noFill/>
-        </p:spPr>
-        <p:txBody>
-          <a:bodyPr wrap="square" lIns="0" tIns="0" rIns="0" bIns="0" anchor="t">
+          <a:bodyPr wrap="square" lIns="0" tIns="0" rIns="0" bIns="0" anchor="ctr">
             <a:spAutoFit/>
           </a:bodyPr>
           <a:lstStyle/>
@@ -25054,13 +24360,152 @@
               </a:lnSpc>
             </a:pPr>
             <a:r>
-              <a:rPr sz="700" spc="60">
-                <a:solidFill>
-                  <a:srgbClr val="00B388"/>
+              <a:rPr sz="700">
+                <a:solidFill>
+                  <a:srgbClr val="666666"/>
+                </a:solidFill>
+                <a:latin typeface="Outfit"/>
+              </a:rPr>
+              <a:t>vacuum + diagnostics</a:t>
+            </a:r>
+          </a:p>
+        </p:txBody>
+      </p:sp>
+      <p:sp>
+        <p:nvSpPr>
+          <p:cNvPr id="18" name="TextBox 17"/>
+          <p:cNvSpPr txBox="1"/>
+          <p:nvPr/>
+        </p:nvSpPr>
+        <p:spPr>
+          <a:xfrm>
+            <a:off x="7178040" y="2066543"/>
+            <a:ext cx="1225296" cy="347472"/>
+          </a:xfrm>
+          <a:prstGeom prst="rect">
+            <a:avLst/>
+          </a:prstGeom>
+          <a:noFill/>
+        </p:spPr>
+        <p:txBody>
+          <a:bodyPr wrap="square" lIns="0" tIns="0" rIns="0" bIns="0" anchor="ctr">
+            <a:spAutoFit/>
+          </a:bodyPr>
+          <a:lstStyle/>
+          <a:p>
+            <a:pPr algn="r">
+              <a:lnSpc>
+                <a:spcPct val="120000"/>
+              </a:lnSpc>
+            </a:pPr>
+            <a:r>
+              <a:rPr sz="880">
+                <a:solidFill>
+                  <a:srgbClr val="191919"/>
                 </a:solidFill>
                 <a:latin typeface="AvenirNext LT Pro Medium"/>
               </a:rPr>
-              <a:t>MITIGATION</a:t>
+              <a:t>0.19–0.32</a:t>
+            </a:r>
+          </a:p>
+        </p:txBody>
+      </p:sp>
+      <p:sp>
+        <p:nvSpPr>
+          <p:cNvPr id="19" name="Rounded Rectangle 18"/>
+          <p:cNvSpPr/>
+          <p:nvPr/>
+        </p:nvSpPr>
+        <p:spPr>
+          <a:xfrm>
+            <a:off x="612648" y="2450591"/>
+            <a:ext cx="7918704" cy="347472"/>
+          </a:xfrm>
+          <a:prstGeom prst="roundRect">
+            <a:avLst>
+              <a:gd name="adj" fmla="val 16000"/>
+            </a:avLst>
+          </a:prstGeom>
+          <a:solidFill>
+            <a:srgbClr val="F5F5F5"/>
+          </a:solidFill>
+          <a:ln>
+            <a:noFill/>
+          </a:ln>
+          <a:effectLst/>
+        </p:spPr>
+        <p:style>
+          <a:lnRef idx="1">
+            <a:schemeClr val="accent1"/>
+          </a:lnRef>
+          <a:fillRef idx="3">
+            <a:schemeClr val="accent1"/>
+          </a:fillRef>
+          <a:effectRef idx="2">
+            <a:schemeClr val="accent1"/>
+          </a:effectRef>
+          <a:fontRef idx="minor">
+            <a:schemeClr val="lt1"/>
+          </a:fontRef>
+        </p:style>
+        <p:txBody>
+          <a:bodyPr rtlCol="0" anchor="ctr"/>
+          <a:lstStyle/>
+          <a:p>
+            <a:pPr algn="ctr"/>
+            <a:endParaRPr/>
+          </a:p>
+        </p:txBody>
+      </p:sp>
+      <p:sp>
+        <p:nvSpPr>
+          <p:cNvPr id="20" name="Oval 19"/>
+          <p:cNvSpPr/>
+          <p:nvPr/>
+        </p:nvSpPr>
+        <p:spPr>
+          <a:xfrm>
+            <a:off x="740664" y="2496311"/>
+            <a:ext cx="256032" cy="256032"/>
+          </a:xfrm>
+          <a:prstGeom prst="ellipse">
+            <a:avLst/>
+          </a:prstGeom>
+          <a:solidFill>
+            <a:srgbClr val="00B388"/>
+          </a:solidFill>
+          <a:ln>
+            <a:noFill/>
+          </a:ln>
+          <a:effectLst/>
+        </p:spPr>
+        <p:style>
+          <a:lnRef idx="1">
+            <a:schemeClr val="accent1"/>
+          </a:lnRef>
+          <a:fillRef idx="3">
+            <a:schemeClr val="accent1"/>
+          </a:fillRef>
+          <a:effectRef idx="2">
+            <a:schemeClr val="accent1"/>
+          </a:effectRef>
+          <a:fontRef idx="minor">
+            <a:schemeClr val="lt1"/>
+          </a:fontRef>
+        </p:style>
+        <p:txBody>
+          <a:bodyPr lIns="0" tIns="0" rIns="0" bIns="0" rtlCol="0" anchor="ctr"/>
+          <a:lstStyle/>
+          <a:p>
+            <a:pPr algn="ctr"/>
+            <a:r>
+              <a:rPr sz="800">
+                <a:solidFill>
+                  <a:srgbClr val="FFFFFF"/>
+                </a:solidFill>
+                <a:latin typeface="AvenirNext LT Pro Medium"/>
+              </a:rPr>
+              <a:t>04</a:t>
             </a:r>
           </a:p>
         </p:txBody>
@@ -25073,8 +24518,776 @@
         </p:nvSpPr>
         <p:spPr>
           <a:xfrm>
-            <a:off x="6135624" y="3639312"/>
-            <a:ext cx="2240280" cy="777240"/>
+            <a:off x="1143000" y="2450591"/>
+            <a:ext cx="4434840" cy="347472"/>
+          </a:xfrm>
+          <a:prstGeom prst="rect">
+            <a:avLst/>
+          </a:prstGeom>
+          <a:noFill/>
+        </p:spPr>
+        <p:txBody>
+          <a:bodyPr wrap="square" lIns="0" tIns="0" rIns="0" bIns="0" anchor="ctr">
+            <a:spAutoFit/>
+          </a:bodyPr>
+          <a:lstStyle/>
+          <a:p>
+            <a:pPr algn="l">
+              <a:lnSpc>
+                <a:spcPct val="120000"/>
+              </a:lnSpc>
+            </a:pPr>
+            <a:r>
+              <a:rPr sz="819">
+                <a:solidFill>
+                  <a:srgbClr val="191919"/>
+                </a:solidFill>
+                <a:latin typeface="AvenirNext LT Pro Medium"/>
+              </a:rPr>
+              <a:t>Control PC · DAQ · software built in-house on commercial interlocks</a:t>
+            </a:r>
+          </a:p>
+        </p:txBody>
+      </p:sp>
+      <p:sp>
+        <p:nvSpPr>
+          <p:cNvPr id="22" name="TextBox 21"/>
+          <p:cNvSpPr txBox="1"/>
+          <p:nvPr/>
+        </p:nvSpPr>
+        <p:spPr>
+          <a:xfrm>
+            <a:off x="5669280" y="2450591"/>
+            <a:ext cx="1417320" cy="347472"/>
+          </a:xfrm>
+          <a:prstGeom prst="rect">
+            <a:avLst/>
+          </a:prstGeom>
+          <a:noFill/>
+        </p:spPr>
+        <p:txBody>
+          <a:bodyPr wrap="square" lIns="0" tIns="0" rIns="0" bIns="0" anchor="ctr">
+            <a:spAutoFit/>
+          </a:bodyPr>
+          <a:lstStyle/>
+          <a:p>
+            <a:pPr algn="l">
+              <a:lnSpc>
+                <a:spcPct val="120000"/>
+              </a:lnSpc>
+            </a:pPr>
+            <a:r>
+              <a:rPr sz="700">
+                <a:solidFill>
+                  <a:srgbClr val="666666"/>
+                </a:solidFill>
+                <a:latin typeface="Outfit"/>
+              </a:rPr>
+              <a:t>controls + DAQ</a:t>
+            </a:r>
+          </a:p>
+        </p:txBody>
+      </p:sp>
+      <p:sp>
+        <p:nvSpPr>
+          <p:cNvPr id="23" name="TextBox 22"/>
+          <p:cNvSpPr txBox="1"/>
+          <p:nvPr/>
+        </p:nvSpPr>
+        <p:spPr>
+          <a:xfrm>
+            <a:off x="7178040" y="2450591"/>
+            <a:ext cx="1225296" cy="347472"/>
+          </a:xfrm>
+          <a:prstGeom prst="rect">
+            <a:avLst/>
+          </a:prstGeom>
+          <a:noFill/>
+        </p:spPr>
+        <p:txBody>
+          <a:bodyPr wrap="square" lIns="0" tIns="0" rIns="0" bIns="0" anchor="ctr">
+            <a:spAutoFit/>
+          </a:bodyPr>
+          <a:lstStyle/>
+          <a:p>
+            <a:pPr algn="r">
+              <a:lnSpc>
+                <a:spcPct val="120000"/>
+              </a:lnSpc>
+            </a:pPr>
+            <a:r>
+              <a:rPr sz="880">
+                <a:solidFill>
+                  <a:srgbClr val="191919"/>
+                </a:solidFill>
+                <a:latin typeface="AvenirNext LT Pro Medium"/>
+              </a:rPr>
+              <a:t>0.05–0.10</a:t>
+            </a:r>
+          </a:p>
+        </p:txBody>
+      </p:sp>
+      <p:sp>
+        <p:nvSpPr>
+          <p:cNvPr id="24" name="Rounded Rectangle 23"/>
+          <p:cNvSpPr/>
+          <p:nvPr/>
+        </p:nvSpPr>
+        <p:spPr>
+          <a:xfrm>
+            <a:off x="612648" y="2834639"/>
+            <a:ext cx="7918704" cy="347472"/>
+          </a:xfrm>
+          <a:prstGeom prst="roundRect">
+            <a:avLst>
+              <a:gd name="adj" fmla="val 16000"/>
+            </a:avLst>
+          </a:prstGeom>
+          <a:solidFill>
+            <a:srgbClr val="F5F5F5"/>
+          </a:solidFill>
+          <a:ln>
+            <a:noFill/>
+          </a:ln>
+          <a:effectLst/>
+        </p:spPr>
+        <p:style>
+          <a:lnRef idx="1">
+            <a:schemeClr val="accent1"/>
+          </a:lnRef>
+          <a:fillRef idx="3">
+            <a:schemeClr val="accent1"/>
+          </a:fillRef>
+          <a:effectRef idx="2">
+            <a:schemeClr val="accent1"/>
+          </a:effectRef>
+          <a:fontRef idx="minor">
+            <a:schemeClr val="lt1"/>
+          </a:fontRef>
+        </p:style>
+        <p:txBody>
+          <a:bodyPr rtlCol="0" anchor="ctr"/>
+          <a:lstStyle/>
+          <a:p>
+            <a:pPr algn="ctr"/>
+            <a:endParaRPr/>
+          </a:p>
+        </p:txBody>
+      </p:sp>
+      <p:sp>
+        <p:nvSpPr>
+          <p:cNvPr id="25" name="Oval 24"/>
+          <p:cNvSpPr/>
+          <p:nvPr/>
+        </p:nvSpPr>
+        <p:spPr>
+          <a:xfrm>
+            <a:off x="740664" y="2880359"/>
+            <a:ext cx="256032" cy="256032"/>
+          </a:xfrm>
+          <a:prstGeom prst="ellipse">
+            <a:avLst/>
+          </a:prstGeom>
+          <a:solidFill>
+            <a:srgbClr val="00B388"/>
+          </a:solidFill>
+          <a:ln>
+            <a:noFill/>
+          </a:ln>
+          <a:effectLst/>
+        </p:spPr>
+        <p:style>
+          <a:lnRef idx="1">
+            <a:schemeClr val="accent1"/>
+          </a:lnRef>
+          <a:fillRef idx="3">
+            <a:schemeClr val="accent1"/>
+          </a:fillRef>
+          <a:effectRef idx="2">
+            <a:schemeClr val="accent1"/>
+          </a:effectRef>
+          <a:fontRef idx="minor">
+            <a:schemeClr val="lt1"/>
+          </a:fontRef>
+        </p:style>
+        <p:txBody>
+          <a:bodyPr lIns="0" tIns="0" rIns="0" bIns="0" rtlCol="0" anchor="ctr"/>
+          <a:lstStyle/>
+          <a:p>
+            <a:pPr algn="ctr"/>
+            <a:r>
+              <a:rPr sz="800">
+                <a:solidFill>
+                  <a:srgbClr val="FFFFFF"/>
+                </a:solidFill>
+                <a:latin typeface="AvenirNext LT Pro Medium"/>
+              </a:rPr>
+              <a:t>05</a:t>
+            </a:r>
+          </a:p>
+        </p:txBody>
+      </p:sp>
+      <p:sp>
+        <p:nvSpPr>
+          <p:cNvPr id="26" name="TextBox 25"/>
+          <p:cNvSpPr txBox="1"/>
+          <p:nvPr/>
+        </p:nvSpPr>
+        <p:spPr>
+          <a:xfrm>
+            <a:off x="1143000" y="2834639"/>
+            <a:ext cx="4434840" cy="347472"/>
+          </a:xfrm>
+          <a:prstGeom prst="rect">
+            <a:avLst/>
+          </a:prstGeom>
+          <a:noFill/>
+        </p:spPr>
+        <p:txBody>
+          <a:bodyPr wrap="square" lIns="0" tIns="0" rIns="0" bIns="0" anchor="ctr">
+            <a:spAutoFit/>
+          </a:bodyPr>
+          <a:lstStyle/>
+          <a:p>
+            <a:pPr algn="l">
+              <a:lnSpc>
+                <a:spcPct val="120000"/>
+              </a:lnSpc>
+            </a:pPr>
+            <a:r>
+              <a:rPr sz="819">
+                <a:solidFill>
+                  <a:srgbClr val="191919"/>
+                </a:solidFill>
+                <a:latin typeface="AvenirNext LT Pro Medium"/>
+              </a:rPr>
+              <a:t>Holders · heated viewport · leak detector · O₂ alarm · source charges · gaskets</a:t>
+            </a:r>
+          </a:p>
+        </p:txBody>
+      </p:sp>
+      <p:sp>
+        <p:nvSpPr>
+          <p:cNvPr id="27" name="TextBox 26"/>
+          <p:cNvSpPr txBox="1"/>
+          <p:nvPr/>
+        </p:nvSpPr>
+        <p:spPr>
+          <a:xfrm>
+            <a:off x="5669280" y="2834639"/>
+            <a:ext cx="1417320" cy="347472"/>
+          </a:xfrm>
+          <a:prstGeom prst="rect">
+            <a:avLst/>
+          </a:prstGeom>
+          <a:noFill/>
+        </p:spPr>
+        <p:txBody>
+          <a:bodyPr wrap="square" lIns="0" tIns="0" rIns="0" bIns="0" anchor="ctr">
+            <a:spAutoFit/>
+          </a:bodyPr>
+          <a:lstStyle/>
+          <a:p>
+            <a:pPr algn="l">
+              <a:lnSpc>
+                <a:spcPct val="120000"/>
+              </a:lnSpc>
+            </a:pPr>
+            <a:r>
+              <a:rPr sz="700">
+                <a:solidFill>
+                  <a:srgbClr val="666666"/>
+                </a:solidFill>
+                <a:latin typeface="Outfit"/>
+              </a:rPr>
+              <a:t>supporting parts</a:t>
+            </a:r>
+          </a:p>
+        </p:txBody>
+      </p:sp>
+      <p:sp>
+        <p:nvSpPr>
+          <p:cNvPr id="28" name="TextBox 27"/>
+          <p:cNvSpPr txBox="1"/>
+          <p:nvPr/>
+        </p:nvSpPr>
+        <p:spPr>
+          <a:xfrm>
+            <a:off x="7178040" y="2834639"/>
+            <a:ext cx="1225296" cy="347472"/>
+          </a:xfrm>
+          <a:prstGeom prst="rect">
+            <a:avLst/>
+          </a:prstGeom>
+          <a:noFill/>
+        </p:spPr>
+        <p:txBody>
+          <a:bodyPr wrap="square" lIns="0" tIns="0" rIns="0" bIns="0" anchor="ctr">
+            <a:spAutoFit/>
+          </a:bodyPr>
+          <a:lstStyle/>
+          <a:p>
+            <a:pPr algn="r">
+              <a:lnSpc>
+                <a:spcPct val="120000"/>
+              </a:lnSpc>
+            </a:pPr>
+            <a:r>
+              <a:rPr sz="880">
+                <a:solidFill>
+                  <a:srgbClr val="191919"/>
+                </a:solidFill>
+                <a:latin typeface="AvenirNext LT Pro Medium"/>
+              </a:rPr>
+              <a:t>0.05–0.12</a:t>
+            </a:r>
+          </a:p>
+        </p:txBody>
+      </p:sp>
+      <p:sp>
+        <p:nvSpPr>
+          <p:cNvPr id="29" name="Rounded Rectangle 28"/>
+          <p:cNvSpPr/>
+          <p:nvPr/>
+        </p:nvSpPr>
+        <p:spPr>
+          <a:xfrm>
+            <a:off x="612648" y="3218687"/>
+            <a:ext cx="7918704" cy="347472"/>
+          </a:xfrm>
+          <a:prstGeom prst="roundRect">
+            <a:avLst>
+              <a:gd name="adj" fmla="val 16000"/>
+            </a:avLst>
+          </a:prstGeom>
+          <a:solidFill>
+            <a:srgbClr val="F5F5F5"/>
+          </a:solidFill>
+          <a:ln>
+            <a:noFill/>
+          </a:ln>
+          <a:effectLst/>
+        </p:spPr>
+        <p:style>
+          <a:lnRef idx="1">
+            <a:schemeClr val="accent1"/>
+          </a:lnRef>
+          <a:fillRef idx="3">
+            <a:schemeClr val="accent1"/>
+          </a:fillRef>
+          <a:effectRef idx="2">
+            <a:schemeClr val="accent1"/>
+          </a:effectRef>
+          <a:fontRef idx="minor">
+            <a:schemeClr val="lt1"/>
+          </a:fontRef>
+        </p:style>
+        <p:txBody>
+          <a:bodyPr rtlCol="0" anchor="ctr"/>
+          <a:lstStyle/>
+          <a:p>
+            <a:pPr algn="ctr"/>
+            <a:endParaRPr/>
+          </a:p>
+        </p:txBody>
+      </p:sp>
+      <p:sp>
+        <p:nvSpPr>
+          <p:cNvPr id="30" name="Oval 29"/>
+          <p:cNvSpPr/>
+          <p:nvPr/>
+        </p:nvSpPr>
+        <p:spPr>
+          <a:xfrm>
+            <a:off x="740664" y="3264407"/>
+            <a:ext cx="256032" cy="256032"/>
+          </a:xfrm>
+          <a:prstGeom prst="ellipse">
+            <a:avLst/>
+          </a:prstGeom>
+          <a:solidFill>
+            <a:srgbClr val="00B388"/>
+          </a:solidFill>
+          <a:ln>
+            <a:noFill/>
+          </a:ln>
+          <a:effectLst/>
+        </p:spPr>
+        <p:style>
+          <a:lnRef idx="1">
+            <a:schemeClr val="accent1"/>
+          </a:lnRef>
+          <a:fillRef idx="3">
+            <a:schemeClr val="accent1"/>
+          </a:fillRef>
+          <a:effectRef idx="2">
+            <a:schemeClr val="accent1"/>
+          </a:effectRef>
+          <a:fontRef idx="minor">
+            <a:schemeClr val="lt1"/>
+          </a:fontRef>
+        </p:style>
+        <p:txBody>
+          <a:bodyPr lIns="0" tIns="0" rIns="0" bIns="0" rtlCol="0" anchor="ctr"/>
+          <a:lstStyle/>
+          <a:p>
+            <a:pPr algn="ctr"/>
+            <a:r>
+              <a:rPr sz="800">
+                <a:solidFill>
+                  <a:srgbClr val="FFFFFF"/>
+                </a:solidFill>
+                <a:latin typeface="AvenirNext LT Pro Medium"/>
+              </a:rPr>
+              <a:t>06</a:t>
+            </a:r>
+          </a:p>
+        </p:txBody>
+      </p:sp>
+      <p:sp>
+        <p:nvSpPr>
+          <p:cNvPr id="31" name="TextBox 30"/>
+          <p:cNvSpPr txBox="1"/>
+          <p:nvPr/>
+        </p:nvSpPr>
+        <p:spPr>
+          <a:xfrm>
+            <a:off x="1143000" y="3218687"/>
+            <a:ext cx="4434840" cy="347472"/>
+          </a:xfrm>
+          <a:prstGeom prst="rect">
+            <a:avLst/>
+          </a:prstGeom>
+          <a:noFill/>
+        </p:spPr>
+        <p:txBody>
+          <a:bodyPr wrap="square" lIns="0" tIns="0" rIns="0" bIns="0" anchor="ctr">
+            <a:spAutoFit/>
+          </a:bodyPr>
+          <a:lstStyle/>
+          <a:p>
+            <a:pPr algn="l">
+              <a:lnSpc>
+                <a:spcPct val="120000"/>
+              </a:lnSpc>
+            </a:pPr>
+            <a:r>
+              <a:rPr sz="819">
+                <a:solidFill>
+                  <a:srgbClr val="191919"/>
+                </a:solidFill>
+                <a:latin typeface="AvenirNext LT Pro Medium"/>
+              </a:rPr>
+              <a:t>LN₂ · 3-phase power + UPS · water · bake-out</a:t>
+            </a:r>
+          </a:p>
+        </p:txBody>
+      </p:sp>
+      <p:sp>
+        <p:nvSpPr>
+          <p:cNvPr id="32" name="TextBox 31"/>
+          <p:cNvSpPr txBox="1"/>
+          <p:nvPr/>
+        </p:nvSpPr>
+        <p:spPr>
+          <a:xfrm>
+            <a:off x="5669280" y="3218687"/>
+            <a:ext cx="1417320" cy="347472"/>
+          </a:xfrm>
+          <a:prstGeom prst="rect">
+            <a:avLst/>
+          </a:prstGeom>
+          <a:noFill/>
+        </p:spPr>
+        <p:txBody>
+          <a:bodyPr wrap="square" lIns="0" tIns="0" rIns="0" bIns="0" anchor="ctr">
+            <a:spAutoFit/>
+          </a:bodyPr>
+          <a:lstStyle/>
+          <a:p>
+            <a:pPr algn="l">
+              <a:lnSpc>
+                <a:spcPct val="120000"/>
+              </a:lnSpc>
+            </a:pPr>
+            <a:r>
+              <a:rPr sz="700">
+                <a:solidFill>
+                  <a:srgbClr val="666666"/>
+                </a:solidFill>
+                <a:latin typeface="Outfit"/>
+              </a:rPr>
+              <a:t>facility</a:t>
+            </a:r>
+          </a:p>
+        </p:txBody>
+      </p:sp>
+      <p:sp>
+        <p:nvSpPr>
+          <p:cNvPr id="33" name="TextBox 32"/>
+          <p:cNvSpPr txBox="1"/>
+          <p:nvPr/>
+        </p:nvSpPr>
+        <p:spPr>
+          <a:xfrm>
+            <a:off x="7178040" y="3218687"/>
+            <a:ext cx="1225296" cy="347472"/>
+          </a:xfrm>
+          <a:prstGeom prst="rect">
+            <a:avLst/>
+          </a:prstGeom>
+          <a:noFill/>
+        </p:spPr>
+        <p:txBody>
+          <a:bodyPr wrap="square" lIns="0" tIns="0" rIns="0" bIns="0" anchor="ctr">
+            <a:spAutoFit/>
+          </a:bodyPr>
+          <a:lstStyle/>
+          <a:p>
+            <a:pPr algn="r">
+              <a:lnSpc>
+                <a:spcPct val="120000"/>
+              </a:lnSpc>
+            </a:pPr>
+            <a:r>
+              <a:rPr sz="880">
+                <a:solidFill>
+                  <a:srgbClr val="191919"/>
+                </a:solidFill>
+                <a:latin typeface="AvenirNext LT Pro Medium"/>
+              </a:rPr>
+              <a:t>0.15–0.26</a:t>
+            </a:r>
+          </a:p>
+        </p:txBody>
+      </p:sp>
+      <p:sp>
+        <p:nvSpPr>
+          <p:cNvPr id="34" name="Rounded Rectangle 33"/>
+          <p:cNvSpPr/>
+          <p:nvPr/>
+        </p:nvSpPr>
+        <p:spPr>
+          <a:xfrm>
+            <a:off x="612648" y="3602735"/>
+            <a:ext cx="7918704" cy="347472"/>
+          </a:xfrm>
+          <a:prstGeom prst="roundRect">
+            <a:avLst>
+              <a:gd name="adj" fmla="val 16000"/>
+            </a:avLst>
+          </a:prstGeom>
+          <a:solidFill>
+            <a:srgbClr val="F5F5F5"/>
+          </a:solidFill>
+          <a:ln>
+            <a:noFill/>
+          </a:ln>
+          <a:effectLst/>
+        </p:spPr>
+        <p:style>
+          <a:lnRef idx="1">
+            <a:schemeClr val="accent1"/>
+          </a:lnRef>
+          <a:fillRef idx="3">
+            <a:schemeClr val="accent1"/>
+          </a:fillRef>
+          <a:effectRef idx="2">
+            <a:schemeClr val="accent1"/>
+          </a:effectRef>
+          <a:fontRef idx="minor">
+            <a:schemeClr val="lt1"/>
+          </a:fontRef>
+        </p:style>
+        <p:txBody>
+          <a:bodyPr rtlCol="0" anchor="ctr"/>
+          <a:lstStyle/>
+          <a:p>
+            <a:pPr algn="ctr"/>
+            <a:endParaRPr/>
+          </a:p>
+        </p:txBody>
+      </p:sp>
+      <p:sp>
+        <p:nvSpPr>
+          <p:cNvPr id="35" name="Oval 34"/>
+          <p:cNvSpPr/>
+          <p:nvPr/>
+        </p:nvSpPr>
+        <p:spPr>
+          <a:xfrm>
+            <a:off x="740664" y="3648455"/>
+            <a:ext cx="256032" cy="256032"/>
+          </a:xfrm>
+          <a:prstGeom prst="ellipse">
+            <a:avLst/>
+          </a:prstGeom>
+          <a:solidFill>
+            <a:srgbClr val="00B388"/>
+          </a:solidFill>
+          <a:ln>
+            <a:noFill/>
+          </a:ln>
+          <a:effectLst/>
+        </p:spPr>
+        <p:style>
+          <a:lnRef idx="1">
+            <a:schemeClr val="accent1"/>
+          </a:lnRef>
+          <a:fillRef idx="3">
+            <a:schemeClr val="accent1"/>
+          </a:fillRef>
+          <a:effectRef idx="2">
+            <a:schemeClr val="accent1"/>
+          </a:effectRef>
+          <a:fontRef idx="minor">
+            <a:schemeClr val="lt1"/>
+          </a:fontRef>
+        </p:style>
+        <p:txBody>
+          <a:bodyPr lIns="0" tIns="0" rIns="0" bIns="0" rtlCol="0" anchor="ctr"/>
+          <a:lstStyle/>
+          <a:p>
+            <a:pPr algn="ctr"/>
+            <a:r>
+              <a:rPr sz="800">
+                <a:solidFill>
+                  <a:srgbClr val="FFFFFF"/>
+                </a:solidFill>
+                <a:latin typeface="AvenirNext LT Pro Medium"/>
+              </a:rPr>
+              <a:t>07</a:t>
+            </a:r>
+          </a:p>
+        </p:txBody>
+      </p:sp>
+      <p:sp>
+        <p:nvSpPr>
+          <p:cNvPr id="36" name="TextBox 35"/>
+          <p:cNvSpPr txBox="1"/>
+          <p:nvPr/>
+        </p:nvSpPr>
+        <p:spPr>
+          <a:xfrm>
+            <a:off x="1143000" y="3602735"/>
+            <a:ext cx="4434840" cy="347472"/>
+          </a:xfrm>
+          <a:prstGeom prst="rect">
+            <a:avLst/>
+          </a:prstGeom>
+          <a:noFill/>
+        </p:spPr>
+        <p:txBody>
+          <a:bodyPr wrap="square" lIns="0" tIns="0" rIns="0" bIns="0" anchor="ctr">
+            <a:spAutoFit/>
+          </a:bodyPr>
+          <a:lstStyle/>
+          <a:p>
+            <a:pPr algn="l">
+              <a:lnSpc>
+                <a:spcPct val="120000"/>
+              </a:lnSpc>
+            </a:pPr>
+            <a:r>
+              <a:rPr sz="819">
+                <a:solidFill>
+                  <a:srgbClr val="191919"/>
+                </a:solidFill>
+                <a:latin typeface="AvenirNext LT Pro Medium"/>
+              </a:rPr>
+              <a:t>Leak-chase · calibration · spares</a:t>
+            </a:r>
+          </a:p>
+        </p:txBody>
+      </p:sp>
+      <p:sp>
+        <p:nvSpPr>
+          <p:cNvPr id="37" name="TextBox 36"/>
+          <p:cNvSpPr txBox="1"/>
+          <p:nvPr/>
+        </p:nvSpPr>
+        <p:spPr>
+          <a:xfrm>
+            <a:off x="5669280" y="3602735"/>
+            <a:ext cx="1417320" cy="347472"/>
+          </a:xfrm>
+          <a:prstGeom prst="rect">
+            <a:avLst/>
+          </a:prstGeom>
+          <a:noFill/>
+        </p:spPr>
+        <p:txBody>
+          <a:bodyPr wrap="square" lIns="0" tIns="0" rIns="0" bIns="0" anchor="ctr">
+            <a:spAutoFit/>
+          </a:bodyPr>
+          <a:lstStyle/>
+          <a:p>
+            <a:pPr algn="l">
+              <a:lnSpc>
+                <a:spcPct val="120000"/>
+              </a:lnSpc>
+            </a:pPr>
+            <a:r>
+              <a:rPr sz="700">
+                <a:solidFill>
+                  <a:srgbClr val="666666"/>
+                </a:solidFill>
+                <a:latin typeface="Outfit"/>
+              </a:rPr>
+              <a:t>install + contingency</a:t>
+            </a:r>
+          </a:p>
+        </p:txBody>
+      </p:sp>
+      <p:sp>
+        <p:nvSpPr>
+          <p:cNvPr id="38" name="TextBox 37"/>
+          <p:cNvSpPr txBox="1"/>
+          <p:nvPr/>
+        </p:nvSpPr>
+        <p:spPr>
+          <a:xfrm>
+            <a:off x="7178040" y="3602735"/>
+            <a:ext cx="1225296" cy="347472"/>
+          </a:xfrm>
+          <a:prstGeom prst="rect">
+            <a:avLst/>
+          </a:prstGeom>
+          <a:noFill/>
+        </p:spPr>
+        <p:txBody>
+          <a:bodyPr wrap="square" lIns="0" tIns="0" rIns="0" bIns="0" anchor="ctr">
+            <a:spAutoFit/>
+          </a:bodyPr>
+          <a:lstStyle/>
+          <a:p>
+            <a:pPr algn="r">
+              <a:lnSpc>
+                <a:spcPct val="120000"/>
+              </a:lnSpc>
+            </a:pPr>
+            <a:r>
+              <a:rPr sz="880">
+                <a:solidFill>
+                  <a:srgbClr val="191919"/>
+                </a:solidFill>
+                <a:latin typeface="AvenirNext LT Pro Medium"/>
+              </a:rPr>
+              <a:t>0.10–0.25</a:t>
+            </a:r>
+          </a:p>
+        </p:txBody>
+      </p:sp>
+      <p:sp>
+        <p:nvSpPr>
+          <p:cNvPr id="39" name="TextBox 38"/>
+          <p:cNvSpPr txBox="1"/>
+          <p:nvPr/>
+        </p:nvSpPr>
+        <p:spPr>
+          <a:xfrm>
+            <a:off x="7178040" y="1115568"/>
+            <a:ext cx="1225296" cy="164592"/>
           </a:xfrm>
           <a:prstGeom prst="rect">
             <a:avLst/>
@@ -25087,19 +25300,192 @@
           </a:bodyPr>
           <a:lstStyle/>
           <a:p>
+            <a:pPr algn="r">
+              <a:lnSpc>
+                <a:spcPct val="120000"/>
+              </a:lnSpc>
+            </a:pPr>
+            <a:r>
+              <a:rPr sz="700" spc="60">
+                <a:solidFill>
+                  <a:srgbClr val="666666"/>
+                </a:solidFill>
+                <a:latin typeface="AvenirNext LT Pro Medium"/>
+              </a:rPr>
+              <a:t>US$M</a:t>
+            </a:r>
+          </a:p>
+        </p:txBody>
+      </p:sp>
+      <p:sp>
+        <p:nvSpPr>
+          <p:cNvPr id="40" name="Rounded Rectangle 39"/>
+          <p:cNvSpPr/>
+          <p:nvPr/>
+        </p:nvSpPr>
+        <p:spPr>
+          <a:xfrm>
+            <a:off x="612648" y="4023359"/>
+            <a:ext cx="7918704" cy="438912"/>
+          </a:xfrm>
+          <a:prstGeom prst="roundRect">
+            <a:avLst>
+              <a:gd name="adj" fmla="val 18000"/>
+            </a:avLst>
+          </a:prstGeom>
+          <a:solidFill>
+            <a:srgbClr val="191919"/>
+          </a:solidFill>
+          <a:ln>
+            <a:noFill/>
+          </a:ln>
+          <a:effectLst/>
+        </p:spPr>
+        <p:style>
+          <a:lnRef idx="1">
+            <a:schemeClr val="accent1"/>
+          </a:lnRef>
+          <a:fillRef idx="3">
+            <a:schemeClr val="accent1"/>
+          </a:fillRef>
+          <a:effectRef idx="2">
+            <a:schemeClr val="accent1"/>
+          </a:effectRef>
+          <a:fontRef idx="minor">
+            <a:schemeClr val="lt1"/>
+          </a:fontRef>
+        </p:style>
+        <p:txBody>
+          <a:bodyPr rtlCol="0" anchor="ctr"/>
+          <a:lstStyle/>
+          <a:p>
+            <a:pPr algn="ctr"/>
+            <a:endParaRPr/>
+          </a:p>
+        </p:txBody>
+      </p:sp>
+      <p:sp>
+        <p:nvSpPr>
+          <p:cNvPr id="41" name="TextBox 40"/>
+          <p:cNvSpPr txBox="1"/>
+          <p:nvPr/>
+        </p:nvSpPr>
+        <p:spPr>
+          <a:xfrm>
+            <a:off x="841248" y="4023359"/>
+            <a:ext cx="1005840" cy="438912"/>
+          </a:xfrm>
+          <a:prstGeom prst="rect">
+            <a:avLst/>
+          </a:prstGeom>
+          <a:noFill/>
+        </p:spPr>
+        <p:txBody>
+          <a:bodyPr wrap="square" lIns="0" tIns="0" rIns="0" bIns="0" anchor="ctr">
+            <a:spAutoFit/>
+          </a:bodyPr>
+          <a:lstStyle/>
+          <a:p>
             <a:pPr algn="l">
               <a:lnSpc>
-                <a:spcPct val="118000"/>
+                <a:spcPct val="120000"/>
               </a:lnSpc>
             </a:pPr>
             <a:r>
-              <a:rPr sz="700">
+              <a:rPr sz="750" spc="60">
+                <a:solidFill>
+                  <a:srgbClr val="00B388"/>
+                </a:solidFill>
+                <a:latin typeface="AvenirNext LT Pro Medium"/>
+              </a:rPr>
+              <a:t>TOTAL</a:t>
+            </a:r>
+          </a:p>
+        </p:txBody>
+      </p:sp>
+      <p:sp>
+        <p:nvSpPr>
+          <p:cNvPr id="42" name="TextBox 41"/>
+          <p:cNvSpPr txBox="1"/>
+          <p:nvPr/>
+        </p:nvSpPr>
+        <p:spPr>
+          <a:xfrm>
+            <a:off x="1920240" y="4023359"/>
+            <a:ext cx="6400800" cy="438912"/>
+          </a:xfrm>
+          <a:prstGeom prst="rect">
+            <a:avLst/>
+          </a:prstGeom>
+          <a:noFill/>
+        </p:spPr>
+        <p:txBody>
+          <a:bodyPr wrap="square" lIns="0" tIns="0" rIns="0" bIns="0" anchor="ctr">
+            <a:spAutoFit/>
+          </a:bodyPr>
+          <a:lstStyle/>
+          <a:p>
+            <a:pPr algn="l">
+              <a:lnSpc>
+                <a:spcPct val="120000"/>
+              </a:lnSpc>
+            </a:pPr>
+            <a:r>
+              <a:rPr sz="950">
+                <a:solidFill>
+                  <a:srgbClr val="FFFFFF"/>
+                </a:solidFill>
+                <a:latin typeface="AvenirNext LT Pro Medium"/>
+              </a:rPr>
+              <a:t>US$1.0–1.6M</a:t>
+            </a:r>
+            <a:r>
+              <a:rPr sz="800">
+                <a:solidFill>
+                  <a:srgbClr val="FFFFFF"/>
+                </a:solidFill>
+                <a:latin typeface="AvenirNext LT Pro Medium"/>
+              </a:rPr>
+              <a:t>    ·    run cost ~US$60–120k / yr</a:t>
+            </a:r>
+          </a:p>
+        </p:txBody>
+      </p:sp>
+      <p:sp>
+        <p:nvSpPr>
+          <p:cNvPr id="43" name="TextBox 42"/>
+          <p:cNvSpPr txBox="1"/>
+          <p:nvPr/>
+        </p:nvSpPr>
+        <p:spPr>
+          <a:xfrm>
+            <a:off x="612648" y="4498848"/>
+            <a:ext cx="7918704" cy="109728"/>
+          </a:xfrm>
+          <a:prstGeom prst="rect">
+            <a:avLst/>
+          </a:prstGeom>
+          <a:noFill/>
+        </p:spPr>
+        <p:txBody>
+          <a:bodyPr wrap="square" lIns="0" tIns="0" rIns="0" bIns="0" anchor="t">
+            <a:spAutoFit/>
+          </a:bodyPr>
+          <a:lstStyle/>
+          <a:p>
+            <a:pPr algn="l">
+              <a:lnSpc>
+                <a:spcPct val="120000"/>
+              </a:lnSpc>
+            </a:pPr>
+            <a:r>
+              <a:rPr sz="680">
                 <a:solidFill>
                   <a:srgbClr val="666666"/>
                 </a:solidFill>
                 <a:latin typeface="Outfit"/>
               </a:rPr>
-              <a:t>maglev turbo ≥2000 L/s as the primary growth pump, sized up front — never retrofitted; valved ion pump + TSP kept for idle / base pressure; getter-purified N₂ protects film purity</a:t>
+              <a:t>SAG mask patterning (cleanroom access or service) and ex-situ metrology are not budgeted here.</a:t>
             </a:r>
           </a:p>
         </p:txBody>
@@ -25151,14 +25537,8 @@
                 </a:solidFill>
                 <a:latin typeface="AvenirNext LT Pro Light"/>
               </a:rPr>
-              <a:t>What the machine needs around it</a:t>
-            </a:r>
-            <a:endParaRPr sz="2200" spc="20" dirty="0">
-              <a:solidFill>
-                <a:srgbClr val="00B388"/>
-              </a:solidFill>
-              <a:latin typeface="AvenirNext LT Pro Light"/>
-            </a:endParaRPr>
+              <a:t>Three risks we manage from day one</a:t>
+            </a:r>
           </a:p>
         </p:txBody>
       </p:sp>
@@ -25184,7 +25564,7 @@
                 </a:solidFill>
                 <a:latin typeface="AvenirNext LT Pro Medium"/>
               </a:rPr>
-              <a:t>NITRIDE MBE PROPOSAL · SUPPORTING PARTS</a:t>
+              <a:t>NITRIDE MBE PROPOSAL · RISKS</a:t>
             </a:r>
           </a:p>
         </p:txBody>
@@ -25197,12 +25577,12 @@
         </p:nvSpPr>
         <p:spPr>
           <a:xfrm>
-            <a:off x="612648" y="1481328"/>
-            <a:ext cx="2514600" cy="658368"/>
+            <a:off x="612648" y="1389888"/>
+            <a:ext cx="2514600" cy="3090672"/>
           </a:xfrm>
           <a:prstGeom prst="roundRect">
             <a:avLst>
-              <a:gd name="adj" fmla="val 10000"/>
+              <a:gd name="adj" fmla="val 5500"/>
             </a:avLst>
           </a:prstGeom>
           <a:solidFill>
@@ -25232,129 +25612,26 @@
           <a:lstStyle/>
           <a:p>
             <a:pPr algn="ctr"/>
-          </a:p>
-        </p:txBody>
-      </p:sp>
-      <p:pic>
-        <p:nvPicPr>
-          <p:cNvPr id="5" name="Picture 4" descr="pc.png"/>
-          <p:cNvPicPr>
-            <a:picLocks noChangeAspect="1"/>
-          </p:cNvPicPr>
-          <p:nvPr/>
-        </p:nvPicPr>
-        <p:blipFill>
-          <a:blip r:embed="rId2"/>
-          <a:stretch>
-            <a:fillRect/>
-          </a:stretch>
-        </p:blipFill>
-        <p:spPr>
-          <a:xfrm>
-            <a:off x="704088" y="1627632"/>
-            <a:ext cx="365760" cy="365760"/>
-          </a:xfrm>
-          <a:prstGeom prst="rect">
-            <a:avLst/>
-          </a:prstGeom>
-        </p:spPr>
-      </p:pic>
-      <p:sp>
-        <p:nvSpPr>
-          <p:cNvPr id="6" name="TextBox 5"/>
-          <p:cNvSpPr txBox="1"/>
-          <p:nvPr/>
-        </p:nvSpPr>
-        <p:spPr>
-          <a:xfrm>
-            <a:off x="1161288" y="1572768"/>
-            <a:ext cx="1856232" cy="182880"/>
-          </a:xfrm>
-          <a:prstGeom prst="rect">
-            <a:avLst/>
-          </a:prstGeom>
-          <a:noFill/>
-        </p:spPr>
-        <p:txBody>
-          <a:bodyPr wrap="square" anchor="t" lIns="0" rIns="0" tIns="0" bIns="0">
-            <a:spAutoFit/>
-          </a:bodyPr>
-          <a:lstStyle/>
-          <a:p>
-            <a:pPr algn="l">
-              <a:lnSpc>
-                <a:spcPct val="120000"/>
-              </a:lnSpc>
-            </a:pPr>
-            <a:r>
-              <a:rPr sz="780">
-                <a:solidFill>
-                  <a:srgbClr val="191919"/>
-                </a:solidFill>
-                <a:latin typeface="AvenirNext LT Pro Medium"/>
-              </a:rPr>
-              <a:t>Control PC + DAQ hardware</a:t>
-            </a:r>
-          </a:p>
-        </p:txBody>
-      </p:sp>
-      <p:sp>
-        <p:nvSpPr>
-          <p:cNvPr id="7" name="TextBox 6"/>
-          <p:cNvSpPr txBox="1"/>
-          <p:nvPr/>
-        </p:nvSpPr>
-        <p:spPr>
-          <a:xfrm>
-            <a:off x="1161288" y="1755648"/>
-            <a:ext cx="1856232" cy="329184"/>
-          </a:xfrm>
-          <a:prstGeom prst="rect">
-            <a:avLst/>
-          </a:prstGeom>
-          <a:noFill/>
-        </p:spPr>
-        <p:txBody>
-          <a:bodyPr wrap="square" anchor="t" lIns="0" rIns="0" tIns="0" bIns="0">
-            <a:spAutoFit/>
-          </a:bodyPr>
-          <a:lstStyle/>
-          <a:p>
-            <a:pPr algn="l">
-              <a:lnSpc>
-                <a:spcPct val="112000"/>
-              </a:lnSpc>
-            </a:pPr>
-            <a:r>
-              <a:rPr sz="660">
-                <a:solidFill>
-                  <a:srgbClr val="666666"/>
-                </a:solidFill>
-                <a:latin typeface="Outfit"/>
-              </a:rPr>
-              <a:t>computer · DAQ cards · RHEED frame grabber</a:t>
-            </a:r>
-          </a:p>
-        </p:txBody>
-      </p:sp>
-      <p:sp>
-        <p:nvSpPr>
-          <p:cNvPr id="8" name="Rounded Rectangle 7"/>
+            <a:endParaRPr/>
+          </a:p>
+        </p:txBody>
+      </p:sp>
+      <p:sp>
+        <p:nvSpPr>
+          <p:cNvPr id="5" name="Oval 4"/>
           <p:cNvSpPr/>
           <p:nvPr/>
         </p:nvSpPr>
         <p:spPr>
           <a:xfrm>
-            <a:off x="3310128" y="1481328"/>
-            <a:ext cx="2514600" cy="658368"/>
-          </a:xfrm>
-          <a:prstGeom prst="roundRect">
-            <a:avLst>
-              <a:gd name="adj" fmla="val 10000"/>
-            </a:avLst>
+            <a:off x="740664" y="1517904"/>
+            <a:ext cx="274320" cy="274320"/>
+          </a:xfrm>
+          <a:prstGeom prst="ellipse">
+            <a:avLst/>
           </a:prstGeom>
           <a:solidFill>
-            <a:srgbClr val="F5F5F5"/>
+            <a:srgbClr val="00B388"/>
           </a:solidFill>
           <a:ln>
             <a:noFill/>
@@ -25376,55 +25653,40 @@
           </a:fontRef>
         </p:style>
         <p:txBody>
-          <a:bodyPr rtlCol="0" anchor="ctr"/>
+          <a:bodyPr lIns="0" tIns="0" rIns="0" bIns="0" rtlCol="0" anchor="ctr"/>
           <a:lstStyle/>
           <a:p>
             <a:pPr algn="ctr"/>
-          </a:p>
-        </p:txBody>
-      </p:sp>
-      <p:pic>
-        <p:nvPicPr>
-          <p:cNvPr id="9" name="Picture 8" descr="wafer.png"/>
-          <p:cNvPicPr>
-            <a:picLocks noChangeAspect="1"/>
-          </p:cNvPicPr>
+            <a:r>
+              <a:rPr sz="900">
+                <a:solidFill>
+                  <a:srgbClr val="FFFFFF"/>
+                </a:solidFill>
+                <a:latin typeface="AvenirNext LT Pro Medium"/>
+              </a:rPr>
+              <a:t>01</a:t>
+            </a:r>
+          </a:p>
+        </p:txBody>
+      </p:sp>
+      <p:sp>
+        <p:nvSpPr>
+          <p:cNvPr id="6" name="TextBox 5"/>
+          <p:cNvSpPr txBox="1"/>
           <p:nvPr/>
-        </p:nvPicPr>
-        <p:blipFill>
-          <a:blip r:embed="rId16"/>
-          <a:stretch>
-            <a:fillRect/>
-          </a:stretch>
-        </p:blipFill>
-        <p:spPr>
-          <a:xfrm>
-            <a:off x="3401568" y="1627632"/>
-            <a:ext cx="365760" cy="365760"/>
+        </p:nvSpPr>
+        <p:spPr>
+          <a:xfrm>
+            <a:off x="1124712" y="1554480"/>
+            <a:ext cx="1856232" cy="228600"/>
           </a:xfrm>
           <a:prstGeom prst="rect">
             <a:avLst/>
           </a:prstGeom>
-        </p:spPr>
-      </p:pic>
-      <p:sp>
-        <p:nvSpPr>
-          <p:cNvPr id="10" name="TextBox 9"/>
-          <p:cNvSpPr txBox="1"/>
-          <p:nvPr/>
-        </p:nvSpPr>
-        <p:spPr>
-          <a:xfrm>
-            <a:off x="3858768" y="1572768"/>
-            <a:ext cx="1856232" cy="182880"/>
-          </a:xfrm>
-          <a:prstGeom prst="rect">
-            <a:avLst/>
-          </a:prstGeom>
           <a:noFill/>
         </p:spPr>
         <p:txBody>
-          <a:bodyPr wrap="square" anchor="t" lIns="0" rIns="0" tIns="0" bIns="0">
+          <a:bodyPr wrap="square" lIns="0" tIns="0" rIns="0" bIns="0" anchor="t">
             <a:spAutoFit/>
           </a:bodyPr>
           <a:lstStyle/>
@@ -25435,27 +25697,27 @@
               </a:lnSpc>
             </a:pPr>
             <a:r>
-              <a:rPr sz="780">
+              <a:rPr sz="1000">
                 <a:solidFill>
                   <a:srgbClr val="191919"/>
                 </a:solidFill>
                 <a:latin typeface="AvenirNext LT Pro Medium"/>
               </a:rPr>
-              <a:t>Substrate holders + platens</a:t>
-            </a:r>
-          </a:p>
-        </p:txBody>
-      </p:sp>
-      <p:sp>
-        <p:nvSpPr>
-          <p:cNvPr id="11" name="TextBox 10"/>
+              <a:t>Export control</a:t>
+            </a:r>
+          </a:p>
+        </p:txBody>
+      </p:sp>
+      <p:sp>
+        <p:nvSpPr>
+          <p:cNvPr id="7" name="TextBox 6"/>
           <p:cNvSpPr txBox="1"/>
           <p:nvPr/>
         </p:nvSpPr>
         <p:spPr>
           <a:xfrm>
-            <a:off x="3858768" y="1755648"/>
-            <a:ext cx="1856232" cy="329184"/>
+            <a:off x="740664" y="1956816"/>
+            <a:ext cx="2240280" cy="1417320"/>
           </a:xfrm>
           <a:prstGeom prst="rect">
             <a:avLst/>
@@ -25463,42 +25725,120 @@
           <a:noFill/>
         </p:spPr>
         <p:txBody>
-          <a:bodyPr wrap="square" anchor="t" lIns="0" rIns="0" tIns="0" bIns="0">
+          <a:bodyPr wrap="square" lIns="0" tIns="0" rIns="0" bIns="0" anchor="t">
             <a:spAutoFit/>
           </a:bodyPr>
           <a:lstStyle/>
           <a:p>
             <a:pPr algn="l">
               <a:lnSpc>
-                <a:spcPct val="112000"/>
+                <a:spcPct val="118000"/>
               </a:lnSpc>
             </a:pPr>
             <a:r>
-              <a:rPr sz="660">
-                <a:solidFill>
-                  <a:srgbClr val="666666"/>
+              <a:rPr sz="720">
+                <a:solidFill>
+                  <a:srgbClr val="191919"/>
                 </a:solidFill>
                 <a:latin typeface="Outfit"/>
               </a:rPr>
-              <a:t>per-wafer hardware · matching transfer forks</a:t>
-            </a:r>
-          </a:p>
-        </p:txBody>
-      </p:sp>
-      <p:sp>
-        <p:nvSpPr>
-          <p:cNvPr id="12" name="Rounded Rectangle 11"/>
+              <a:t>MBE growth equipment is a listed strategic commodity — a Hong Kong import licence (3B001(a)(3)) is required whatever the origin. US-origin parts additionally need a BIS licence, since the US has treated HK as mainland China since Dec 2020, and approval is not assured.</a:t>
+            </a:r>
+          </a:p>
+        </p:txBody>
+      </p:sp>
+      <p:sp>
+        <p:nvSpPr>
+          <p:cNvPr id="8" name="TextBox 7"/>
+          <p:cNvSpPr txBox="1"/>
+          <p:nvPr/>
+        </p:nvSpPr>
+        <p:spPr>
+          <a:xfrm>
+            <a:off x="740664" y="3438144"/>
+            <a:ext cx="2240280" cy="164592"/>
+          </a:xfrm>
+          <a:prstGeom prst="rect">
+            <a:avLst/>
+          </a:prstGeom>
+          <a:noFill/>
+        </p:spPr>
+        <p:txBody>
+          <a:bodyPr wrap="square" lIns="0" tIns="0" rIns="0" bIns="0" anchor="t">
+            <a:spAutoFit/>
+          </a:bodyPr>
+          <a:lstStyle/>
+          <a:p>
+            <a:pPr algn="l">
+              <a:lnSpc>
+                <a:spcPct val="120000"/>
+              </a:lnSpc>
+            </a:pPr>
+            <a:r>
+              <a:rPr sz="700" spc="60">
+                <a:solidFill>
+                  <a:srgbClr val="00B388"/>
+                </a:solidFill>
+                <a:latin typeface="AvenirNext LT Pro Medium"/>
+              </a:rPr>
+              <a:t>MITIGATION</a:t>
+            </a:r>
+          </a:p>
+        </p:txBody>
+      </p:sp>
+      <p:sp>
+        <p:nvSpPr>
+          <p:cNvPr id="9" name="TextBox 8"/>
+          <p:cNvSpPr txBox="1"/>
+          <p:nvPr/>
+        </p:nvSpPr>
+        <p:spPr>
+          <a:xfrm>
+            <a:off x="740664" y="3639312"/>
+            <a:ext cx="2240280" cy="777240"/>
+          </a:xfrm>
+          <a:prstGeom prst="rect">
+            <a:avLst/>
+          </a:prstGeom>
+          <a:noFill/>
+        </p:spPr>
+        <p:txBody>
+          <a:bodyPr wrap="square" lIns="0" tIns="0" rIns="0" bIns="0" anchor="t">
+            <a:spAutoFit/>
+          </a:bodyPr>
+          <a:lstStyle/>
+          <a:p>
+            <a:pPr algn="l">
+              <a:lnSpc>
+                <a:spcPct val="118000"/>
+              </a:lnSpc>
+            </a:pPr>
+            <a:r>
+              <a:rPr sz="700">
+                <a:solidFill>
+                  <a:srgbClr val="666666"/>
+                </a:solidFill>
+                <a:latin typeface="Outfit"/>
+              </a:rPr>
+              <a:t>classify every candidate part's ECCN before any PO; prefer EU sources (Riber, MBE-Komponenten, STAIB) or domestic builders as fallback; licence path confirmed = go / no-go gate P0</a:t>
+            </a:r>
+          </a:p>
+        </p:txBody>
+      </p:sp>
+      <p:sp>
+        <p:nvSpPr>
+          <p:cNvPr id="10" name="Rounded Rectangle 9"/>
           <p:cNvSpPr/>
           <p:nvPr/>
         </p:nvSpPr>
         <p:spPr>
           <a:xfrm>
-            <a:off x="6007608" y="1481328"/>
-            <a:ext cx="2514600" cy="658368"/>
+            <a:off x="3310128" y="1389888"/>
+            <a:ext cx="2514600" cy="3090672"/>
           </a:xfrm>
           <a:prstGeom prst="roundRect">
             <a:avLst>
-              <a:gd name="adj" fmla="val 10000"/>
+              <a:gd name="adj" fmla="val 5500"/>
             </a:avLst>
           </a:prstGeom>
           <a:solidFill>
@@ -25528,129 +25868,26 @@
           <a:lstStyle/>
           <a:p>
             <a:pPr algn="ctr"/>
-          </a:p>
-        </p:txBody>
-      </p:sp>
-      <p:pic>
-        <p:nvPicPr>
-          <p:cNvPr id="13" name="Picture 12" descr="window.png"/>
-          <p:cNvPicPr>
-            <a:picLocks noChangeAspect="1"/>
-          </p:cNvPicPr>
-          <p:nvPr/>
-        </p:nvPicPr>
-        <p:blipFill>
-          <a:blip r:embed="rId17"/>
-          <a:stretch>
-            <a:fillRect/>
-          </a:stretch>
-        </p:blipFill>
-        <p:spPr>
-          <a:xfrm>
-            <a:off x="6099048" y="1627632"/>
-            <a:ext cx="365760" cy="365760"/>
-          </a:xfrm>
-          <a:prstGeom prst="rect">
-            <a:avLst/>
-          </a:prstGeom>
-        </p:spPr>
-      </p:pic>
-      <p:sp>
-        <p:nvSpPr>
-          <p:cNvPr id="14" name="TextBox 13"/>
-          <p:cNvSpPr txBox="1"/>
-          <p:nvPr/>
-        </p:nvSpPr>
-        <p:spPr>
-          <a:xfrm>
-            <a:off x="6556248" y="1572768"/>
-            <a:ext cx="1856232" cy="182880"/>
-          </a:xfrm>
-          <a:prstGeom prst="rect">
-            <a:avLst/>
-          </a:prstGeom>
-          <a:noFill/>
-        </p:spPr>
-        <p:txBody>
-          <a:bodyPr wrap="square" anchor="t" lIns="0" rIns="0" tIns="0" bIns="0">
-            <a:spAutoFit/>
-          </a:bodyPr>
-          <a:lstStyle/>
-          <a:p>
-            <a:pPr algn="l">
-              <a:lnSpc>
-                <a:spcPct val="120000"/>
-              </a:lnSpc>
-            </a:pPr>
-            <a:r>
-              <a:rPr sz="780">
-                <a:solidFill>
-                  <a:srgbClr val="191919"/>
-                </a:solidFill>
-                <a:latin typeface="AvenirNext LT Pro Medium"/>
-              </a:rPr>
-              <a:t>Heated viewport</a:t>
-            </a:r>
-          </a:p>
-        </p:txBody>
-      </p:sp>
-      <p:sp>
-        <p:nvSpPr>
-          <p:cNvPr id="15" name="TextBox 14"/>
-          <p:cNvSpPr txBox="1"/>
-          <p:nvPr/>
-        </p:nvSpPr>
-        <p:spPr>
-          <a:xfrm>
-            <a:off x="6556248" y="1755648"/>
-            <a:ext cx="1856232" cy="329184"/>
-          </a:xfrm>
-          <a:prstGeom prst="rect">
-            <a:avLst/>
-          </a:prstGeom>
-          <a:noFill/>
-        </p:spPr>
-        <p:txBody>
-          <a:bodyPr wrap="square" anchor="t" lIns="0" rIns="0" tIns="0" bIns="0">
-            <a:spAutoFit/>
-          </a:bodyPr>
-          <a:lstStyle/>
-          <a:p>
-            <a:pPr algn="l">
-              <a:lnSpc>
-                <a:spcPct val="112000"/>
-              </a:lnSpc>
-            </a:pPr>
-            <a:r>
-              <a:rPr sz="660">
-                <a:solidFill>
-                  <a:srgbClr val="666666"/>
-                </a:solidFill>
-                <a:latin typeface="Outfit"/>
-              </a:rPr>
-              <a:t>keeps the pyrometer window free of Ga coating</a:t>
-            </a:r>
-          </a:p>
-        </p:txBody>
-      </p:sp>
-      <p:sp>
-        <p:nvSpPr>
-          <p:cNvPr id="16" name="Rounded Rectangle 15"/>
+            <a:endParaRPr/>
+          </a:p>
+        </p:txBody>
+      </p:sp>
+      <p:sp>
+        <p:nvSpPr>
+          <p:cNvPr id="11" name="Oval 10"/>
           <p:cNvSpPr/>
           <p:nvPr/>
         </p:nvSpPr>
         <p:spPr>
           <a:xfrm>
-            <a:off x="612648" y="2249424"/>
-            <a:ext cx="2514600" cy="658368"/>
-          </a:xfrm>
-          <a:prstGeom prst="roundRect">
-            <a:avLst>
-              <a:gd name="adj" fmla="val 10000"/>
-            </a:avLst>
+            <a:off x="3438144" y="1517904"/>
+            <a:ext cx="274320" cy="274320"/>
+          </a:xfrm>
+          <a:prstGeom prst="ellipse">
+            <a:avLst/>
           </a:prstGeom>
           <a:solidFill>
-            <a:srgbClr val="F5F5F5"/>
+            <a:srgbClr val="00B388"/>
           </a:solidFill>
           <a:ln>
             <a:noFill/>
@@ -25672,55 +25909,40 @@
           </a:fontRef>
         </p:style>
         <p:txBody>
-          <a:bodyPr rtlCol="0" anchor="ctr"/>
+          <a:bodyPr lIns="0" tIns="0" rIns="0" bIns="0" rtlCol="0" anchor="ctr"/>
           <a:lstStyle/>
           <a:p>
             <a:pPr algn="ctr"/>
-          </a:p>
-        </p:txBody>
-      </p:sp>
-      <p:pic>
-        <p:nvPicPr>
-          <p:cNvPr id="17" name="Picture 16" descr="leak.png"/>
-          <p:cNvPicPr>
-            <a:picLocks noChangeAspect="1"/>
-          </p:cNvPicPr>
+            <a:r>
+              <a:rPr sz="900">
+                <a:solidFill>
+                  <a:srgbClr val="FFFFFF"/>
+                </a:solidFill>
+                <a:latin typeface="AvenirNext LT Pro Medium"/>
+              </a:rPr>
+              <a:t>02</a:t>
+            </a:r>
+          </a:p>
+        </p:txBody>
+      </p:sp>
+      <p:sp>
+        <p:nvSpPr>
+          <p:cNvPr id="12" name="TextBox 11"/>
+          <p:cNvSpPr txBox="1"/>
           <p:nvPr/>
-        </p:nvPicPr>
-        <p:blipFill>
-          <a:blip r:embed="rId18"/>
-          <a:stretch>
-            <a:fillRect/>
-          </a:stretch>
-        </p:blipFill>
-        <p:spPr>
-          <a:xfrm>
-            <a:off x="704088" y="2395728"/>
-            <a:ext cx="365760" cy="365760"/>
+        </p:nvSpPr>
+        <p:spPr>
+          <a:xfrm>
+            <a:off x="3822191" y="1554480"/>
+            <a:ext cx="1856232" cy="228600"/>
           </a:xfrm>
           <a:prstGeom prst="rect">
             <a:avLst/>
           </a:prstGeom>
-        </p:spPr>
-      </p:pic>
-      <p:sp>
-        <p:nvSpPr>
-          <p:cNvPr id="18" name="TextBox 17"/>
-          <p:cNvSpPr txBox="1"/>
-          <p:nvPr/>
-        </p:nvSpPr>
-        <p:spPr>
-          <a:xfrm>
-            <a:off x="1161288" y="2340864"/>
-            <a:ext cx="1856232" cy="182880"/>
-          </a:xfrm>
-          <a:prstGeom prst="rect">
-            <a:avLst/>
-          </a:prstGeom>
           <a:noFill/>
         </p:spPr>
         <p:txBody>
-          <a:bodyPr wrap="square" anchor="t" lIns="0" rIns="0" tIns="0" bIns="0">
+          <a:bodyPr wrap="square" lIns="0" tIns="0" rIns="0" bIns="0" anchor="t">
             <a:spAutoFit/>
           </a:bodyPr>
           <a:lstStyle/>
@@ -25731,27 +25953,27 @@
               </a:lnSpc>
             </a:pPr>
             <a:r>
-              <a:rPr sz="780">
+              <a:rPr sz="1000">
                 <a:solidFill>
                   <a:srgbClr val="191919"/>
                 </a:solidFill>
                 <a:latin typeface="AvenirNext LT Pro Medium"/>
               </a:rPr>
-              <a:t>Helium leak detector</a:t>
-            </a:r>
-          </a:p>
-        </p:txBody>
-      </p:sp>
-      <p:sp>
-        <p:nvSpPr>
-          <p:cNvPr id="19" name="TextBox 18"/>
+              <a:t>Temperature spec</a:t>
+            </a:r>
+          </a:p>
+        </p:txBody>
+      </p:sp>
+      <p:sp>
+        <p:nvSpPr>
+          <p:cNvPr id="13" name="TextBox 12"/>
           <p:cNvSpPr txBox="1"/>
           <p:nvPr/>
         </p:nvSpPr>
         <p:spPr>
           <a:xfrm>
-            <a:off x="1161288" y="2523744"/>
-            <a:ext cx="1856232" cy="329184"/>
+            <a:off x="3438144" y="1956816"/>
+            <a:ext cx="2240280" cy="1417320"/>
           </a:xfrm>
           <a:prstGeom prst="rect">
             <a:avLst/>
@@ -25759,42 +25981,120 @@
           <a:noFill/>
         </p:spPr>
         <p:txBody>
-          <a:bodyPr wrap="square" anchor="t" lIns="0" rIns="0" tIns="0" bIns="0">
+          <a:bodyPr wrap="square" lIns="0" tIns="0" rIns="0" bIns="0" anchor="t">
             <a:spAutoFit/>
           </a:bodyPr>
           <a:lstStyle/>
           <a:p>
             <a:pPr algn="l">
               <a:lnSpc>
-                <a:spcPct val="112000"/>
+                <a:spcPct val="118000"/>
               </a:lnSpc>
             </a:pPr>
             <a:r>
-              <a:rPr sz="660">
-                <a:solidFill>
-                  <a:srgbClr val="666666"/>
+              <a:rPr sz="720">
+                <a:solidFill>
+                  <a:srgbClr val="191919"/>
                 </a:solidFill>
                 <a:latin typeface="Outfit"/>
               </a:rPr>
-              <a:t>commissioning leak-hunt — buy or rent</a:t>
-            </a:r>
-          </a:p>
-        </p:txBody>
-      </p:sp>
-      <p:sp>
-        <p:nvSpPr>
-          <p:cNvPr id="20" name="Rounded Rectangle 19"/>
+              <a:t>Selective-area growth only turns on above ~930–940 °C on-wafer, and AlN wants more. Used chassis come with ~900 °C GaAs manipulators — unusable — and retrofitting later means re-opening the chamber. Heater filaments also degrade in nitrogen plasma.</a:t>
+            </a:r>
+          </a:p>
+        </p:txBody>
+      </p:sp>
+      <p:sp>
+        <p:nvSpPr>
+          <p:cNvPr id="14" name="TextBox 13"/>
+          <p:cNvSpPr txBox="1"/>
+          <p:nvPr/>
+        </p:nvSpPr>
+        <p:spPr>
+          <a:xfrm>
+            <a:off x="3438144" y="3438144"/>
+            <a:ext cx="2240280" cy="164592"/>
+          </a:xfrm>
+          <a:prstGeom prst="rect">
+            <a:avLst/>
+          </a:prstGeom>
+          <a:noFill/>
+        </p:spPr>
+        <p:txBody>
+          <a:bodyPr wrap="square" lIns="0" tIns="0" rIns="0" bIns="0" anchor="t">
+            <a:spAutoFit/>
+          </a:bodyPr>
+          <a:lstStyle/>
+          <a:p>
+            <a:pPr algn="l">
+              <a:lnSpc>
+                <a:spcPct val="120000"/>
+              </a:lnSpc>
+            </a:pPr>
+            <a:r>
+              <a:rPr sz="700" spc="60">
+                <a:solidFill>
+                  <a:srgbClr val="00B388"/>
+                </a:solidFill>
+                <a:latin typeface="AvenirNext LT Pro Medium"/>
+              </a:rPr>
+              <a:t>MITIGATION</a:t>
+            </a:r>
+          </a:p>
+        </p:txBody>
+      </p:sp>
+      <p:sp>
+        <p:nvSpPr>
+          <p:cNvPr id="15" name="TextBox 14"/>
+          <p:cNvSpPr txBox="1"/>
+          <p:nvPr/>
+        </p:nvSpPr>
+        <p:spPr>
+          <a:xfrm>
+            <a:off x="3438144" y="3639312"/>
+            <a:ext cx="2240280" cy="777240"/>
+          </a:xfrm>
+          <a:prstGeom prst="rect">
+            <a:avLst/>
+          </a:prstGeom>
+          <a:noFill/>
+        </p:spPr>
+        <p:txBody>
+          <a:bodyPr wrap="square" lIns="0" tIns="0" rIns="0" bIns="0" anchor="t">
+            <a:spAutoFit/>
+          </a:bodyPr>
+          <a:lstStyle/>
+          <a:p>
+            <a:pPr algn="l">
+              <a:lnSpc>
+                <a:spcPct val="118000"/>
+              </a:lnSpc>
+            </a:pPr>
+            <a:r>
+              <a:rPr sz="700">
+                <a:solidFill>
+                  <a:srgbClr val="666666"/>
+                </a:solidFill>
+                <a:latin typeface="Outfit"/>
+              </a:rPr>
+              <a:t>order the 1200 °C manipulator as the first long-lead item; specify a W or PBN/PG heater for the N-plasma environment; treat filaments as consumables and stock spares</a:t>
+            </a:r>
+          </a:p>
+        </p:txBody>
+      </p:sp>
+      <p:sp>
+        <p:nvSpPr>
+          <p:cNvPr id="16" name="Rounded Rectangle 15"/>
           <p:cNvSpPr/>
           <p:nvPr/>
         </p:nvSpPr>
         <p:spPr>
           <a:xfrm>
-            <a:off x="3310128" y="2249424"/>
-            <a:ext cx="2514600" cy="658368"/>
+            <a:off x="6007608" y="1389888"/>
+            <a:ext cx="2514600" cy="3090672"/>
           </a:xfrm>
           <a:prstGeom prst="roundRect">
             <a:avLst>
-              <a:gd name="adj" fmla="val 10000"/>
+              <a:gd name="adj" fmla="val 5500"/>
             </a:avLst>
           </a:prstGeom>
           <a:solidFill>
@@ -25824,129 +26124,26 @@
           <a:lstStyle/>
           <a:p>
             <a:pPr algn="ctr"/>
-          </a:p>
-        </p:txBody>
-      </p:sp>
-      <p:pic>
-        <p:nvPicPr>
-          <p:cNvPr id="21" name="Picture 20" descr="alarm.png"/>
-          <p:cNvPicPr>
-            <a:picLocks noChangeAspect="1"/>
-          </p:cNvPicPr>
-          <p:nvPr/>
-        </p:nvPicPr>
-        <p:blipFill>
-          <a:blip r:embed="rId19"/>
-          <a:stretch>
-            <a:fillRect/>
-          </a:stretch>
-        </p:blipFill>
-        <p:spPr>
-          <a:xfrm>
-            <a:off x="3401568" y="2395728"/>
-            <a:ext cx="365760" cy="365760"/>
-          </a:xfrm>
-          <a:prstGeom prst="rect">
-            <a:avLst/>
-          </a:prstGeom>
-        </p:spPr>
-      </p:pic>
-      <p:sp>
-        <p:nvSpPr>
-          <p:cNvPr id="22" name="TextBox 21"/>
-          <p:cNvSpPr txBox="1"/>
-          <p:nvPr/>
-        </p:nvSpPr>
-        <p:spPr>
-          <a:xfrm>
-            <a:off x="3858768" y="2340864"/>
-            <a:ext cx="1856232" cy="182880"/>
-          </a:xfrm>
-          <a:prstGeom prst="rect">
-            <a:avLst/>
-          </a:prstGeom>
-          <a:noFill/>
-        </p:spPr>
-        <p:txBody>
-          <a:bodyPr wrap="square" anchor="t" lIns="0" rIns="0" tIns="0" bIns="0">
-            <a:spAutoFit/>
-          </a:bodyPr>
-          <a:lstStyle/>
-          <a:p>
-            <a:pPr algn="l">
-              <a:lnSpc>
-                <a:spcPct val="120000"/>
-              </a:lnSpc>
-            </a:pPr>
-            <a:r>
-              <a:rPr sz="780">
-                <a:solidFill>
-                  <a:srgbClr val="191919"/>
-                </a:solidFill>
-                <a:latin typeface="AvenirNext LT Pro Medium"/>
-              </a:rPr>
-              <a:t>O₂ depletion alarm</a:t>
-            </a:r>
-          </a:p>
-        </p:txBody>
-      </p:sp>
-      <p:sp>
-        <p:nvSpPr>
-          <p:cNvPr id="23" name="TextBox 22"/>
-          <p:cNvSpPr txBox="1"/>
-          <p:nvPr/>
-        </p:nvSpPr>
-        <p:spPr>
-          <a:xfrm>
-            <a:off x="3858768" y="2523744"/>
-            <a:ext cx="1856232" cy="329184"/>
-          </a:xfrm>
-          <a:prstGeom prst="rect">
-            <a:avLst/>
-          </a:prstGeom>
-          <a:noFill/>
-        </p:spPr>
-        <p:txBody>
-          <a:bodyPr wrap="square" anchor="t" lIns="0" rIns="0" tIns="0" bIns="0">
-            <a:spAutoFit/>
-          </a:bodyPr>
-          <a:lstStyle/>
-          <a:p>
-            <a:pPr algn="l">
-              <a:lnSpc>
-                <a:spcPct val="112000"/>
-              </a:lnSpc>
-            </a:pPr>
-            <a:r>
-              <a:rPr sz="660">
-                <a:solidFill>
-                  <a:srgbClr val="666666"/>
-                </a:solidFill>
-                <a:latin typeface="Outfit"/>
-              </a:rPr>
-              <a:t>LN₂ asphyxiation safety — code requirement</a:t>
-            </a:r>
-          </a:p>
-        </p:txBody>
-      </p:sp>
-      <p:sp>
-        <p:nvSpPr>
-          <p:cNvPr id="24" name="Rounded Rectangle 23"/>
+            <a:endParaRPr/>
+          </a:p>
+        </p:txBody>
+      </p:sp>
+      <p:sp>
+        <p:nvSpPr>
+          <p:cNvPr id="17" name="Oval 16"/>
           <p:cNvSpPr/>
           <p:nvPr/>
         </p:nvSpPr>
         <p:spPr>
           <a:xfrm>
-            <a:off x="6007608" y="2249424"/>
-            <a:ext cx="2514600" cy="658368"/>
-          </a:xfrm>
-          <a:prstGeom prst="roundRect">
-            <a:avLst>
-              <a:gd name="adj" fmla="val 10000"/>
-            </a:avLst>
+            <a:off x="6135624" y="1517904"/>
+            <a:ext cx="274320" cy="274320"/>
+          </a:xfrm>
+          <a:prstGeom prst="ellipse">
+            <a:avLst/>
           </a:prstGeom>
           <a:solidFill>
-            <a:srgbClr val="F5F5F5"/>
+            <a:srgbClr val="00B388"/>
           </a:solidFill>
           <a:ln>
             <a:noFill/>
@@ -25968,55 +26165,40 @@
           </a:fontRef>
         </p:style>
         <p:txBody>
-          <a:bodyPr rtlCol="0" anchor="ctr"/>
+          <a:bodyPr lIns="0" tIns="0" rIns="0" bIns="0" rtlCol="0" anchor="ctr"/>
           <a:lstStyle/>
           <a:p>
             <a:pPr algn="ctr"/>
-          </a:p>
-        </p:txBody>
-      </p:sp>
-      <p:pic>
-        <p:nvPicPr>
-          <p:cNvPr id="25" name="Picture 24" descr="ingot.png"/>
-          <p:cNvPicPr>
-            <a:picLocks noChangeAspect="1"/>
-          </p:cNvPicPr>
+            <a:r>
+              <a:rPr sz="900">
+                <a:solidFill>
+                  <a:srgbClr val="FFFFFF"/>
+                </a:solidFill>
+                <a:latin typeface="AvenirNext LT Pro Medium"/>
+              </a:rPr>
+              <a:t>03</a:t>
+            </a:r>
+          </a:p>
+        </p:txBody>
+      </p:sp>
+      <p:sp>
+        <p:nvSpPr>
+          <p:cNvPr id="18" name="TextBox 17"/>
+          <p:cNvSpPr txBox="1"/>
           <p:nvPr/>
-        </p:nvPicPr>
-        <p:blipFill>
-          <a:blip r:embed="rId20"/>
-          <a:stretch>
-            <a:fillRect/>
-          </a:stretch>
-        </p:blipFill>
-        <p:spPr>
-          <a:xfrm>
-            <a:off x="6099048" y="2395728"/>
-            <a:ext cx="365760" cy="365760"/>
+        </p:nvSpPr>
+        <p:spPr>
+          <a:xfrm>
+            <a:off x="6519672" y="1554480"/>
+            <a:ext cx="1856232" cy="228600"/>
           </a:xfrm>
           <a:prstGeom prst="rect">
             <a:avLst/>
           </a:prstGeom>
-        </p:spPr>
-      </p:pic>
-      <p:sp>
-        <p:nvSpPr>
-          <p:cNvPr id="26" name="TextBox 25"/>
-          <p:cNvSpPr txBox="1"/>
-          <p:nvPr/>
-        </p:nvSpPr>
-        <p:spPr>
-          <a:xfrm>
-            <a:off x="6556248" y="2340864"/>
-            <a:ext cx="1856232" cy="182880"/>
-          </a:xfrm>
-          <a:prstGeom prst="rect">
-            <a:avLst/>
-          </a:prstGeom>
           <a:noFill/>
         </p:spPr>
         <p:txBody>
-          <a:bodyPr wrap="square" anchor="t" lIns="0" rIns="0" tIns="0" bIns="0">
+          <a:bodyPr wrap="square" lIns="0" tIns="0" rIns="0" bIns="0" anchor="t">
             <a:spAutoFit/>
           </a:bodyPr>
           <a:lstStyle/>
@@ -26027,27 +26209,27 @@
               </a:lnSpc>
             </a:pPr>
             <a:r>
-              <a:rPr sz="780">
+              <a:rPr sz="1000">
                 <a:solidFill>
                   <a:srgbClr val="191919"/>
                 </a:solidFill>
                 <a:latin typeface="AvenirNext LT Pro Medium"/>
               </a:rPr>
-              <a:t>Initial source charges</a:t>
-            </a:r>
-          </a:p>
-        </p:txBody>
-      </p:sp>
-      <p:sp>
-        <p:nvSpPr>
-          <p:cNvPr id="27" name="TextBox 26"/>
+              <a:t>N₂ gas load</a:t>
+            </a:r>
+          </a:p>
+        </p:txBody>
+      </p:sp>
+      <p:sp>
+        <p:nvSpPr>
+          <p:cNvPr id="19" name="TextBox 18"/>
           <p:cNvSpPr txBox="1"/>
           <p:nvPr/>
         </p:nvSpPr>
         <p:spPr>
           <a:xfrm>
-            <a:off x="6556248" y="2523744"/>
-            <a:ext cx="1856232" cy="329184"/>
+            <a:off x="6135624" y="1956816"/>
+            <a:ext cx="2240280" cy="1417320"/>
           </a:xfrm>
           <a:prstGeom prst="rect">
             <a:avLst/>
@@ -26055,116 +26237,46 @@
           <a:noFill/>
         </p:spPr>
         <p:txBody>
-          <a:bodyPr wrap="square" anchor="t" lIns="0" rIns="0" tIns="0" bIns="0">
+          <a:bodyPr wrap="square" lIns="0" tIns="0" rIns="0" bIns="0" anchor="t">
             <a:spAutoFit/>
           </a:bodyPr>
           <a:lstStyle/>
           <a:p>
             <a:pPr algn="l">
               <a:lnSpc>
-                <a:spcPct val="112000"/>
+                <a:spcPct val="118000"/>
               </a:lnSpc>
             </a:pPr>
             <a:r>
-              <a:rPr sz="660">
-                <a:solidFill>
-                  <a:srgbClr val="666666"/>
+              <a:rPr sz="720">
+                <a:solidFill>
+                  <a:srgbClr val="191919"/>
                 </a:solidFill>
                 <a:latin typeface="Outfit"/>
               </a:rPr>
-              <a:t>first Ga · Al · Cu · Si · Mg fill + spare PBN crucibles</a:t>
-            </a:r>
-          </a:p>
-        </p:txBody>
-      </p:sp>
-      <p:sp>
-        <p:nvSpPr>
-          <p:cNvPr id="28" name="Rounded Rectangle 27"/>
-          <p:cNvSpPr/>
+              <a:t>Nitride growth runs at ~10⁻⁵ Torr of continuous N₂. Ion pumps saturate and cryopumps need constant regeneration at this load — a mis-sized vacuum stack is usually discovered only at first plasma, after the rebuild is finished.</a:t>
+            </a:r>
+          </a:p>
+        </p:txBody>
+      </p:sp>
+      <p:sp>
+        <p:nvSpPr>
+          <p:cNvPr id="20" name="TextBox 19"/>
+          <p:cNvSpPr txBox="1"/>
           <p:nvPr/>
         </p:nvSpPr>
         <p:spPr>
           <a:xfrm>
-            <a:off x="612648" y="3017520"/>
-            <a:ext cx="2514600" cy="658368"/>
-          </a:xfrm>
-          <a:prstGeom prst="roundRect">
-            <a:avLst>
-              <a:gd name="adj" fmla="val 10000"/>
-            </a:avLst>
-          </a:prstGeom>
-          <a:solidFill>
-            <a:srgbClr val="F5F5F5"/>
-          </a:solidFill>
-          <a:ln>
-            <a:noFill/>
-          </a:ln>
-          <a:effectLst/>
-        </p:spPr>
-        <p:style>
-          <a:lnRef idx="1">
-            <a:schemeClr val="accent1"/>
-          </a:lnRef>
-          <a:fillRef idx="3">
-            <a:schemeClr val="accent1"/>
-          </a:fillRef>
-          <a:effectRef idx="2">
-            <a:schemeClr val="accent1"/>
-          </a:effectRef>
-          <a:fontRef idx="minor">
-            <a:schemeClr val="lt1"/>
-          </a:fontRef>
-        </p:style>
-        <p:txBody>
-          <a:bodyPr rtlCol="0" anchor="ctr"/>
-          <a:lstStyle/>
-          <a:p>
-            <a:pPr algn="ctr"/>
-          </a:p>
-        </p:txBody>
-      </p:sp>
-      <p:pic>
-        <p:nvPicPr>
-          <p:cNvPr id="29" name="Picture 28" descr="ring.png"/>
-          <p:cNvPicPr>
-            <a:picLocks noChangeAspect="1"/>
-          </p:cNvPicPr>
-          <p:nvPr/>
-        </p:nvPicPr>
-        <p:blipFill>
-          <a:blip r:embed="rId21"/>
-          <a:stretch>
-            <a:fillRect/>
-          </a:stretch>
-        </p:blipFill>
-        <p:spPr>
-          <a:xfrm>
-            <a:off x="704088" y="3163824"/>
-            <a:ext cx="365760" cy="365760"/>
+            <a:off x="6135624" y="3438144"/>
+            <a:ext cx="2240280" cy="164592"/>
           </a:xfrm>
           <a:prstGeom prst="rect">
             <a:avLst/>
           </a:prstGeom>
-        </p:spPr>
-      </p:pic>
-      <p:sp>
-        <p:nvSpPr>
-          <p:cNvPr id="30" name="TextBox 29"/>
-          <p:cNvSpPr txBox="1"/>
-          <p:nvPr/>
-        </p:nvSpPr>
-        <p:spPr>
-          <a:xfrm>
-            <a:off x="1161288" y="3108960"/>
-            <a:ext cx="1856232" cy="182880"/>
-          </a:xfrm>
-          <a:prstGeom prst="rect">
-            <a:avLst/>
-          </a:prstGeom>
           <a:noFill/>
         </p:spPr>
         <p:txBody>
-          <a:bodyPr wrap="square" anchor="t" lIns="0" rIns="0" tIns="0" bIns="0">
+          <a:bodyPr wrap="square" lIns="0" tIns="0" rIns="0" bIns="0" anchor="t">
             <a:spAutoFit/>
           </a:bodyPr>
           <a:lstStyle/>
@@ -26175,27 +26287,27 @@
               </a:lnSpc>
             </a:pPr>
             <a:r>
-              <a:rPr sz="780">
-                <a:solidFill>
-                  <a:srgbClr val="191919"/>
+              <a:rPr sz="700" spc="60">
+                <a:solidFill>
+                  <a:srgbClr val="00B388"/>
                 </a:solidFill>
                 <a:latin typeface="AvenirNext LT Pro Medium"/>
               </a:rPr>
-              <a:t>Copper gaskets + spares kit</a:t>
-            </a:r>
-          </a:p>
-        </p:txBody>
-      </p:sp>
-      <p:sp>
-        <p:nvSpPr>
-          <p:cNvPr id="31" name="TextBox 30"/>
+              <a:t>MITIGATION</a:t>
+            </a:r>
+          </a:p>
+        </p:txBody>
+      </p:sp>
+      <p:sp>
+        <p:nvSpPr>
+          <p:cNvPr id="21" name="TextBox 20"/>
           <p:cNvSpPr txBox="1"/>
           <p:nvPr/>
         </p:nvSpPr>
         <p:spPr>
           <a:xfrm>
-            <a:off x="1161288" y="3291839"/>
-            <a:ext cx="1856232" cy="329184"/>
+            <a:off x="6135624" y="3639312"/>
+            <a:ext cx="2240280" cy="777240"/>
           </a:xfrm>
           <a:prstGeom prst="rect">
             <a:avLst/>
@@ -26203,211 +26315,24 @@
           <a:noFill/>
         </p:spPr>
         <p:txBody>
-          <a:bodyPr wrap="square" anchor="t" lIns="0" rIns="0" tIns="0" bIns="0">
+          <a:bodyPr wrap="square" lIns="0" tIns="0" rIns="0" bIns="0" anchor="t">
             <a:spAutoFit/>
           </a:bodyPr>
           <a:lstStyle/>
           <a:p>
             <a:pPr algn="l">
               <a:lnSpc>
-                <a:spcPct val="112000"/>
+                <a:spcPct val="118000"/>
               </a:lnSpc>
             </a:pPr>
             <a:r>
-              <a:rPr sz="660">
+              <a:rPr sz="700">
                 <a:solidFill>
                   <a:srgbClr val="666666"/>
                 </a:solidFill>
                 <a:latin typeface="Outfit"/>
               </a:rPr>
-              <a:t>every flange opening consumes one</a:t>
-            </a:r>
-          </a:p>
-        </p:txBody>
-      </p:sp>
-      <p:sp>
-        <p:nvSpPr>
-          <p:cNvPr id="32" name="Rounded Rectangle 31"/>
-          <p:cNvSpPr/>
-          <p:nvPr/>
-        </p:nvSpPr>
-        <p:spPr>
-          <a:xfrm>
-            <a:off x="3310128" y="3017520"/>
-            <a:ext cx="2514600" cy="658368"/>
-          </a:xfrm>
-          <a:prstGeom prst="roundRect">
-            <a:avLst>
-              <a:gd name="adj" fmla="val 10000"/>
-            </a:avLst>
-          </a:prstGeom>
-          <a:solidFill>
-            <a:srgbClr val="F5F5F5"/>
-          </a:solidFill>
-          <a:ln>
-            <a:noFill/>
-          </a:ln>
-          <a:effectLst/>
-        </p:spPr>
-        <p:style>
-          <a:lnRef idx="1">
-            <a:schemeClr val="accent1"/>
-          </a:lnRef>
-          <a:fillRef idx="3">
-            <a:schemeClr val="accent1"/>
-          </a:fillRef>
-          <a:effectRef idx="2">
-            <a:schemeClr val="accent1"/>
-          </a:effectRef>
-          <a:fontRef idx="minor">
-            <a:schemeClr val="lt1"/>
-          </a:fontRef>
-        </p:style>
-        <p:txBody>
-          <a:bodyPr rtlCol="0" anchor="ctr"/>
-          <a:lstStyle/>
-          <a:p>
-            <a:pPr algn="ctr"/>
-          </a:p>
-        </p:txBody>
-      </p:sp>
-      <p:pic>
-        <p:nvPicPr>
-          <p:cNvPr id="33" name="Picture 32" descr="mask.png"/>
-          <p:cNvPicPr>
-            <a:picLocks noChangeAspect="1"/>
-          </p:cNvPicPr>
-          <p:nvPr/>
-        </p:nvPicPr>
-        <p:blipFill>
-          <a:blip r:embed="rId22"/>
-          <a:stretch>
-            <a:fillRect/>
-          </a:stretch>
-        </p:blipFill>
-        <p:spPr>
-          <a:xfrm>
-            <a:off x="3401568" y="3163824"/>
-            <a:ext cx="365760" cy="365760"/>
-          </a:xfrm>
-          <a:prstGeom prst="rect">
-            <a:avLst/>
-          </a:prstGeom>
-        </p:spPr>
-      </p:pic>
-      <p:sp>
-        <p:nvSpPr>
-          <p:cNvPr id="34" name="TextBox 33"/>
-          <p:cNvSpPr txBox="1"/>
-          <p:nvPr/>
-        </p:nvSpPr>
-        <p:spPr>
-          <a:xfrm>
-            <a:off x="3858768" y="3108960"/>
-            <a:ext cx="1856232" cy="182880"/>
-          </a:xfrm>
-          <a:prstGeom prst="rect">
-            <a:avLst/>
-          </a:prstGeom>
-          <a:noFill/>
-        </p:spPr>
-        <p:txBody>
-          <a:bodyPr wrap="square" anchor="t" lIns="0" rIns="0" tIns="0" bIns="0">
-            <a:spAutoFit/>
-          </a:bodyPr>
-          <a:lstStyle/>
-          <a:p>
-            <a:pPr algn="l">
-              <a:lnSpc>
-                <a:spcPct val="120000"/>
-              </a:lnSpc>
-            </a:pPr>
-            <a:r>
-              <a:rPr sz="780">
-                <a:solidFill>
-                  <a:srgbClr val="191919"/>
-                </a:solidFill>
-                <a:latin typeface="AvenirNext LT Pro Medium"/>
-              </a:rPr>
-              <a:t>Mask patterning access</a:t>
-            </a:r>
-          </a:p>
-        </p:txBody>
-      </p:sp>
-      <p:sp>
-        <p:nvSpPr>
-          <p:cNvPr id="35" name="TextBox 34"/>
-          <p:cNvSpPr txBox="1"/>
-          <p:nvPr/>
-        </p:nvSpPr>
-        <p:spPr>
-          <a:xfrm>
-            <a:off x="3858768" y="3291839"/>
-            <a:ext cx="1856232" cy="329184"/>
-          </a:xfrm>
-          <a:prstGeom prst="rect">
-            <a:avLst/>
-          </a:prstGeom>
-          <a:noFill/>
-        </p:spPr>
-        <p:txBody>
-          <a:bodyPr wrap="square" anchor="t" lIns="0" rIns="0" tIns="0" bIns="0">
-            <a:spAutoFit/>
-          </a:bodyPr>
-          <a:lstStyle/>
-          <a:p>
-            <a:pPr algn="l">
-              <a:lnSpc>
-                <a:spcPct val="112000"/>
-              </a:lnSpc>
-            </a:pPr>
-            <a:r>
-              <a:rPr sz="660">
-                <a:solidFill>
-                  <a:srgbClr val="666666"/>
-                </a:solidFill>
-                <a:latin typeface="Outfit"/>
-              </a:rPr>
-              <a:t>SiO₂ / Ti deposition · litho · etch — for SAG wafers</a:t>
-            </a:r>
-          </a:p>
-        </p:txBody>
-      </p:sp>
-      <p:sp>
-        <p:nvSpPr>
-          <p:cNvPr id="36" name="TextBox 35"/>
-          <p:cNvSpPr txBox="1"/>
-          <p:nvPr/>
-        </p:nvSpPr>
-        <p:spPr>
-          <a:xfrm>
-            <a:off x="612648" y="3840480"/>
-            <a:ext cx="7918704" cy="365760"/>
-          </a:xfrm>
-          <a:prstGeom prst="rect">
-            <a:avLst/>
-          </a:prstGeom>
-          <a:noFill/>
-        </p:spPr>
-        <p:txBody>
-          <a:bodyPr wrap="square" anchor="t" lIns="0" rIns="0" tIns="0" bIns="0">
-            <a:spAutoFit/>
-          </a:bodyPr>
-          <a:lstStyle/>
-          <a:p>
-            <a:pPr algn="l">
-              <a:lnSpc>
-                <a:spcPct val="120000"/>
-              </a:lnSpc>
-            </a:pPr>
-            <a:r>
-              <a:rPr sz="680">
-                <a:solidFill>
-                  <a:srgbClr val="666666"/>
-                </a:solidFill>
-                <a:latin typeface="Outfit"/>
-              </a:rPr>
-              <a:t>Mask patterning is external cleanroom access or a paid service, not machine hardware — without it the selective-area-growth capability is stranded. Ex-situ metrology (XRD · AFM · Hall) assumed already available.</a:t>
+              <a:t>maglev turbo ≥2000 L/s as the primary growth pump, sized up front — never retrofitted; valved ion pump + TSP kept for idle / base pressure; getter-purified N₂ protects film purity</a:t>
             </a:r>
           </a:p>
         </p:txBody>
@@ -27252,33 +27177,6 @@
 </file>
 
 <file path=customXml/item1.xml><?xml version="1.0" encoding="utf-8"?>
-<p:properties xmlns:p="http://schemas.microsoft.com/office/2006/metadata/properties" xmlns:xsi="http://www.w3.org/2001/XMLSchema-instance" xmlns:pc="http://schemas.microsoft.com/office/infopath/2007/PartnerControls">
-  <documentManagement>
-    <Owner xmlns="ec86daf3-54cc-4371-8b45-255dbc846304" xsi:nil="true"/>
-    <TaxCatchAll xmlns="0fc404c9-74b8-4235-a9fc-590446d087ba" xsi:nil="true"/>
-    <lcf76f155ced4ddcb4097134ff3c332f xmlns="ec86daf3-54cc-4371-8b45-255dbc846304">
-      <Terms xmlns="http://schemas.microsoft.com/office/infopath/2007/PartnerControls"/>
-    </lcf76f155ced4ddcb4097134ff3c332f>
-    <Keyword xmlns="ec86daf3-54cc-4371-8b45-255dbc846304" xsi:nil="true"/>
-    <Summary xmlns="ec86daf3-54cc-4371-8b45-255dbc846304" xsi:nil="true"/>
-    <Status xmlns="ec86daf3-54cc-4371-8b45-255dbc846304" xsi:nil="true"/>
-    <EffectiveDate xmlns="ec86daf3-54cc-4371-8b45-255dbc846304">2026-03-24T01:53:06+00:00</EffectiveDate>
-    <Catgory xmlns="ec86daf3-54cc-4371-8b45-255dbc846304">SOP</Catgory>
-    <Department xmlns="ec86daf3-54cc-4371-8b45-255dbc846304" xsi:nil="true"/>
-  </documentManagement>
-</p:properties>
-</file>
-
-<file path=customXml/item2.xml><?xml version="1.0" encoding="utf-8"?>
-<?mso-contentType ?>
-<FormTemplates xmlns="http://schemas.microsoft.com/sharepoint/v3/contenttype/forms">
-  <Display>DocumentLibraryForm</Display>
-  <Edit>DocumentLibraryForm</Edit>
-  <New>DocumentLibraryForm</New>
-</FormTemplates>
-</file>
-
-<file path=customXml/item3.xml><?xml version="1.0" encoding="utf-8"?>
 <ct:contentTypeSchema xmlns:ct="http://schemas.microsoft.com/office/2006/metadata/contentType" xmlns:ma="http://schemas.microsoft.com/office/2006/metadata/properties/metaAttributes" ct:_="" ma:_="" ma:contentTypeName="Document" ma:contentTypeID="0x010100036E4847BD80E241AD671FD9ED4F6360" ma:contentTypeVersion="21" ma:contentTypeDescription="Create a new document." ma:contentTypeScope="" ma:versionID="4069c741a583665eed84be1efd03745f">
   <xsd:schema xmlns:xsd="http://www.w3.org/2001/XMLSchema" xmlns:xs="http://www.w3.org/2001/XMLSchema" xmlns:p="http://schemas.microsoft.com/office/2006/metadata/properties" xmlns:ns2="ec86daf3-54cc-4371-8b45-255dbc846304" xmlns:ns3="0fc404c9-74b8-4235-a9fc-590446d087ba" targetNamespace="http://schemas.microsoft.com/office/2006/metadata/properties" ma:root="true" ma:fieldsID="8b66d103d2bd64bb270579f4551d1277" ns2:_="" ns3:_="">
     <xsd:import namespace="ec86daf3-54cc-4371-8b45-255dbc846304"/>
@@ -27545,26 +27443,34 @@
 </ct:contentTypeSchema>
 </file>
 
-<file path=customXml/itemProps1.xml><?xml version="1.0" encoding="utf-8"?>
-<ds:datastoreItem xmlns:ds="http://schemas.openxmlformats.org/officeDocument/2006/customXml" ds:itemID="{FA497A0E-6993-4E56-A42E-040A48550A3E}">
-  <ds:schemaRefs>
-    <ds:schemaRef ds:uri="http://schemas.microsoft.com/office/2006/metadata/properties"/>
-    <ds:schemaRef ds:uri="http://schemas.microsoft.com/office/infopath/2007/PartnerControls"/>
-    <ds:schemaRef ds:uri="ec86daf3-54cc-4371-8b45-255dbc846304"/>
-    <ds:schemaRef ds:uri="0fc404c9-74b8-4235-a9fc-590446d087ba"/>
-  </ds:schemaRefs>
-</ds:datastoreItem>
+<file path=customXml/item2.xml><?xml version="1.0" encoding="utf-8"?>
+<?mso-contentType ?>
+<FormTemplates xmlns="http://schemas.microsoft.com/sharepoint/v3/contenttype/forms">
+  <Display>DocumentLibraryForm</Display>
+  <Edit>DocumentLibraryForm</Edit>
+  <New>DocumentLibraryForm</New>
+</FormTemplates>
 </file>
 
-<file path=customXml/itemProps2.xml><?xml version="1.0" encoding="utf-8"?>
-<ds:datastoreItem xmlns:ds="http://schemas.openxmlformats.org/officeDocument/2006/customXml" ds:itemID="{7A05AFF7-81B7-43EE-9E05-64E740D99DEB}">
-  <ds:schemaRefs>
-    <ds:schemaRef ds:uri="http://schemas.microsoft.com/sharepoint/v3/contenttype/forms"/>
-  </ds:schemaRefs>
-</ds:datastoreItem>
+<file path=customXml/item3.xml><?xml version="1.0" encoding="utf-8"?>
+<p:properties xmlns:p="http://schemas.microsoft.com/office/2006/metadata/properties" xmlns:xsi="http://www.w3.org/2001/XMLSchema-instance" xmlns:pc="http://schemas.microsoft.com/office/infopath/2007/PartnerControls">
+  <documentManagement>
+    <Owner xmlns="ec86daf3-54cc-4371-8b45-255dbc846304" xsi:nil="true"/>
+    <TaxCatchAll xmlns="0fc404c9-74b8-4235-a9fc-590446d087ba" xsi:nil="true"/>
+    <lcf76f155ced4ddcb4097134ff3c332f xmlns="ec86daf3-54cc-4371-8b45-255dbc846304">
+      <Terms xmlns="http://schemas.microsoft.com/office/infopath/2007/PartnerControls"/>
+    </lcf76f155ced4ddcb4097134ff3c332f>
+    <Keyword xmlns="ec86daf3-54cc-4371-8b45-255dbc846304" xsi:nil="true"/>
+    <Summary xmlns="ec86daf3-54cc-4371-8b45-255dbc846304" xsi:nil="true"/>
+    <Status xmlns="ec86daf3-54cc-4371-8b45-255dbc846304" xsi:nil="true"/>
+    <EffectiveDate xmlns="ec86daf3-54cc-4371-8b45-255dbc846304">2026-03-24T01:53:06+00:00</EffectiveDate>
+    <Catgory xmlns="ec86daf3-54cc-4371-8b45-255dbc846304">SOP</Catgory>
+    <Department xmlns="ec86daf3-54cc-4371-8b45-255dbc846304" xsi:nil="true"/>
+  </documentManagement>
+</p:properties>
 </file>
 
-<file path=customXml/itemProps3.xml><?xml version="1.0" encoding="utf-8"?>
+<file path=customXml/itemProps1.xml><?xml version="1.0" encoding="utf-8"?>
 <ds:datastoreItem xmlns:ds="http://schemas.openxmlformats.org/officeDocument/2006/customXml" ds:itemID="{E389C391-BB32-4D60-9AA4-E046AA36D869}">
   <ds:schemaRefs>
     <ds:schemaRef ds:uri="http://schemas.microsoft.com/office/2006/metadata/contentType"/>
@@ -27581,4 +27487,23 @@
     <ds:schemaRef ds:uri="http://schemas.microsoft.com/internal/obd"/>
   </ds:schemaRefs>
 </ds:datastoreItem>
+</file>
+
+<file path=customXml/itemProps2.xml><?xml version="1.0" encoding="utf-8"?>
+<ds:datastoreItem xmlns:ds="http://schemas.openxmlformats.org/officeDocument/2006/customXml" ds:itemID="{7A05AFF7-81B7-43EE-9E05-64E740D99DEB}">
+  <ds:schemaRefs>
+    <ds:schemaRef ds:uri="http://schemas.microsoft.com/sharepoint/v3/contenttype/forms"/>
+  </ds:schemaRefs>
+</ds:datastoreItem>
+</file>
+
+<file path=customXml/itemProps3.xml><?xml version="1.0" encoding="utf-8"?>
+<ds:datastoreItem xmlns:ds="http://schemas.openxmlformats.org/officeDocument/2006/customXml" ds:itemID="{FA497A0E-6993-4E56-A42E-040A48550A3E}">
+  <ds:schemaRefs>
+    <ds:schemaRef ds:uri="http://schemas.microsoft.com/office/2006/metadata/properties"/>
+    <ds:schemaRef ds:uri="http://schemas.microsoft.com/office/infopath/2007/PartnerControls"/>
+    <ds:schemaRef ds:uri="ec86daf3-54cc-4371-8b45-255dbc846304"/>
+    <ds:schemaRef ds:uri="0fc404c9-74b8-4235-a9fc-590446d087ba"/>
+  </ds:schemaRefs>
+</ds:datastoreItem>
 </file>